--- a/docs/presentation/cryptoflow.pptx
+++ b/docs/presentation/cryptoflow.pptx
@@ -251,7 +251,7 @@
           <a:p>
             <a:fld id="{2BF4C96F-5C6D-48ED-8D42-B768302B23AD}" type="datetimeFigureOut">
               <a:rPr lang="de-CH" smtClean="0"/>
-              <a:t>10.04.26</a:t>
+              <a:t>12.04.26</a:t>
             </a:fld>
             <a:endParaRPr lang="de-CH"/>
           </a:p>
@@ -329,7 +329,7 @@
           <a:p>
             <a:fld id="{EF76BEFE-BF9F-47C0-9B2B-37E6860B00C1}" type="slidenum">
               <a:rPr lang="de-CH" smtClean="0"/>
-              <a:t>‹Nr.›</a:t>
+              <a:t>‹#›</a:t>
             </a:fld>
             <a:endParaRPr lang="de-CH"/>
           </a:p>
@@ -428,7 +428,7 @@
           <a:p>
             <a:fld id="{736D3A44-FA09-4C0A-99A6-1BA009890161}" type="datetimeFigureOut">
               <a:rPr lang="de-CH" smtClean="0"/>
-              <a:t>10.04.26</a:t>
+              <a:t>12.04.26</a:t>
             </a:fld>
             <a:endParaRPr lang="de-CH"/>
           </a:p>
@@ -587,7 +587,7 @@
           <a:p>
             <a:fld id="{19EFE3F1-1C0D-4780-BCDC-4F7033F6C9E1}" type="slidenum">
               <a:rPr lang="de-CH" smtClean="0"/>
-              <a:t>‹Nr.›</a:t>
+              <a:t>‹#›</a:t>
             </a:fld>
             <a:endParaRPr lang="de-CH"/>
           </a:p>
@@ -741,7 +741,24 @@
           <a:lstStyle/>
           <a:p>
             <a:r>
-              <a:t>Open confidently. We built CryptoFlow to exercise the full set of EDPO lecture concepts end to end: two communication channels, five microservices, two saga patterns. This slide is just the name card — keep it to ten seconds.</a:t>
+              <a:rPr dirty="0"/>
+              <a:t>Open confidently. We built </a:t>
+            </a:r>
+            <a:r>
+              <a:rPr dirty="0" err="1"/>
+              <a:t>CryptoFlow</a:t>
+            </a:r>
+            <a:r>
+              <a:rPr dirty="0"/>
+              <a:t> to exercise the full set of EDPO lecture concepts end to end: two communication channels, five microservices, two saga patterns. This slide is just the name card </a:t>
+            </a:r>
+            <a:r>
+              <a:rPr lang="en-US" dirty="0"/>
+              <a:t>-</a:t>
+            </a:r>
+            <a:r>
+              <a:rPr dirty="0"/>
+              <a:t> keep it to ten seconds.</a:t>
             </a:r>
           </a:p>
         </p:txBody>
@@ -811,7 +828,16 @@
           <a:lstStyle/>
           <a:p>
             <a:r>
-              <a:t>This is where theory meets implementation. The flag-driven pattern is subtle but essential — without it, the BPMN gateway branches become unreachable. The compensation events use ECST so no synchronous callback is needed.</a:t>
+              <a:rPr dirty="0"/>
+              <a:t>This is where theory meets implementation. The flag-driven pattern is subtle but essential </a:t>
+            </a:r>
+            <a:r>
+              <a:rPr lang="en-US" dirty="0"/>
+              <a:t>-</a:t>
+            </a:r>
+            <a:r>
+              <a:rPr dirty="0"/>
+              <a:t> without it, the BPMN gateway branches become unreachable. The compensation events use ECST so no synchronous callback is needed.</a:t>
             </a:r>
           </a:p>
         </p:txBody>
@@ -1021,7 +1047,16 @@
           <a:lstStyle/>
           <a:p>
             <a:r>
-              <a:t>These three patterns form a chain: the outbox guarantees the event is published, the idempotent consumer guarantees it's applied exactly once, and human escalation handles the cases that automated retries cannot fix. The idempotency bug was discovered accidentally during integration — a real validation of the pattern's necessity.</a:t>
+              <a:rPr dirty="0"/>
+              <a:t>These three patterns form a chain: the outbox guarantees the event is published, the idempotent consumer guarantees it's applied exactly once, and human escalation handles the cases that automated retries cannot fix. The idempotency bug was discovered accidentally during integration </a:t>
+            </a:r>
+            <a:r>
+              <a:rPr lang="en-US" dirty="0"/>
+              <a:t>-</a:t>
+            </a:r>
+            <a:r>
+              <a:rPr dirty="0"/>
+              <a:t> a real validation of the pattern's necessity.</a:t>
             </a:r>
           </a:p>
         </p:txBody>
@@ -1231,7 +1266,24 @@
           <a:lstStyle/>
           <a:p>
             <a:r>
-              <a:t>Keep the demo tight — 2-3 minutes max. Have the Docker Compose stack running before the presentation starts. If something breaks live, switch to Operate to show the instance state — that's still a valid demo of observability.</a:t>
+              <a:rPr dirty="0"/>
+              <a:t>Keep the demo tight </a:t>
+            </a:r>
+            <a:r>
+              <a:rPr lang="en-US" dirty="0"/>
+              <a:t>-</a:t>
+            </a:r>
+            <a:r>
+              <a:rPr dirty="0"/>
+              <a:t> 2-3 minutes max. Have the Docker Compose stack running before the presentation starts. If something breaks live, switch to Operate to show the instance state </a:t>
+            </a:r>
+            <a:r>
+              <a:rPr lang="en-US" dirty="0"/>
+              <a:t>-</a:t>
+            </a:r>
+            <a:r>
+              <a:rPr dirty="0"/>
+              <a:t> that's still a valid demo of observability.</a:t>
             </a:r>
           </a:p>
         </p:txBody>
@@ -1441,7 +1493,16 @@
           <a:lstStyle/>
           <a:p>
             <a:r>
-              <a:t>Keep this brief. The point is that we chose a domain rich enough to require multiple bounded contexts, long-running processes, and eventual consistency — all things we wanted to demonstrate.</a:t>
+              <a:rPr dirty="0"/>
+              <a:t>Keep this brief. The point is that we chose a domain rich enough to require multiple bounded contexts, long-running processes, and eventual consistency </a:t>
+            </a:r>
+            <a:r>
+              <a:rPr lang="en-US" dirty="0"/>
+              <a:t>-</a:t>
+            </a:r>
+            <a:r>
+              <a:rPr dirty="0"/>
+              <a:t> all things we wanted to demonstrate.</a:t>
             </a:r>
           </a:p>
         </p:txBody>
@@ -1651,7 +1712,16 @@
           <a:lstStyle/>
           <a:p>
             <a:r>
-              <a:t>We won't deep-dive into event-driven architecture here — that's the focus of the next presentation. The key takeaway: services communicate through published facts, not remote commands. ECST lets each service maintain its own local view without querying others.</a:t>
+              <a:rPr dirty="0"/>
+              <a:t>We won't deep-dive into event-driven architecture here </a:t>
+            </a:r>
+            <a:r>
+              <a:rPr lang="en-US" dirty="0"/>
+              <a:t>-</a:t>
+            </a:r>
+            <a:r>
+              <a:rPr dirty="0"/>
+              <a:t> that's the focus of the next presentation. The key takeaway: services communicate through published facts, not remote commands. ECST lets each service maintain its own local view without querying others.</a:t>
             </a:r>
           </a:p>
         </p:txBody>
@@ -1721,7 +1791,16 @@
           <a:lstStyle/>
           <a:p>
             <a:r>
-              <a:t>Show the producer/consumer log snippets briefly. The main insight: durability is not a Kafka default — it requires explicit configuration. Our single-broker dev setup means acks=all is equivalent to acks=1 locally; we accept this as a conscious dev-environment trade-off.</a:t>
+              <a:rPr dirty="0"/>
+              <a:t>Show the producer/consumer log snippets briefly. The main insight: durability is not a Kafka default </a:t>
+            </a:r>
+            <a:r>
+              <a:rPr lang="en-US" dirty="0"/>
+              <a:t>-</a:t>
+            </a:r>
+            <a:r>
+              <a:rPr dirty="0"/>
+              <a:t> it requires explicit configuration. Our single-broker dev setup means acks=all is equivalent to acks=1 locally; we accept this as a conscious dev-environment trade-off.</a:t>
             </a:r>
           </a:p>
         </p:txBody>
@@ -1791,7 +1870,24 @@
           <a:lstStyle/>
           <a:p>
             <a:r>
-              <a:t>This is not a generic 'Camunda 8 is better' argument. These are project-specific reasons. The partitioned log matters because placeOrder has a non-deterministic wait — many orders can be open simultaneously. The connector templates matter because our flows include email notifications.</a:t>
+              <a:rPr dirty="0"/>
+              <a:t>This is not a generic 'Camunda 8 is better' argument. These are project-specific reasons. The partitioned log matters because </a:t>
+            </a:r>
+            <a:r>
+              <a:rPr dirty="0" err="1"/>
+              <a:t>placeOrder</a:t>
+            </a:r>
+            <a:r>
+              <a:rPr dirty="0"/>
+              <a:t> has a non-deterministic wait </a:t>
+            </a:r>
+            <a:r>
+              <a:rPr lang="en-US" dirty="0"/>
+              <a:t>-</a:t>
+            </a:r>
+            <a:r>
+              <a:rPr dirty="0"/>
+              <a:t> many orders can be open simultaneously. The connector templates matter because our flows include email notifications.</a:t>
             </a:r>
           </a:p>
         </p:txBody>
@@ -1931,7 +2027,16 @@
           <a:lstStyle/>
           <a:p>
             <a:r>
-              <a:t>Point to the BPMN diagram as you walk through. Emphasize: three services participate but only one (onboarding-service) owns the BPMN. The workers are stateless — they execute local transactions and report back.</a:t>
+              <a:rPr dirty="0"/>
+              <a:t>Point to the BPMN diagram as you walk through. Emphasize: three services participate but only one (onboarding-service) owns the BPMN. The workers are stateless </a:t>
+            </a:r>
+            <a:r>
+              <a:rPr lang="en-US" dirty="0"/>
+              <a:t>-</a:t>
+            </a:r>
+            <a:r>
+              <a:rPr dirty="0"/>
+              <a:t> they execute local transactions and report back.</a:t>
             </a:r>
           </a:p>
         </p:txBody>
@@ -2538,7 +2643,7 @@
           <a:p>
             <a:fld id="{7559FC98-AF75-4A00-A03C-DF9FEBF6BCB9}" type="slidenum">
               <a:rPr lang="en-GB" smtClean="0"/>
-              <a:t>‹Nr.›</a:t>
+              <a:t>‹#›</a:t>
             </a:fld>
             <a:endParaRPr lang="en-GB"/>
           </a:p>
@@ -3107,7 +3212,7 @@
           <a:p>
             <a:fld id="{7559FC98-AF75-4A00-A03C-DF9FEBF6BCB9}" type="slidenum">
               <a:rPr lang="en-GB" smtClean="0"/>
-              <a:t>‹Nr.›</a:t>
+              <a:t>‹#›</a:t>
             </a:fld>
             <a:endParaRPr lang="en-GB"/>
           </a:p>
@@ -4783,7 +4888,7 @@
           <a:p>
             <a:fld id="{7559FC98-AF75-4A00-A03C-DF9FEBF6BCB9}" type="slidenum">
               <a:rPr lang="en-GB" smtClean="0"/>
-              <a:t>‹Nr.›</a:t>
+              <a:t>‹#›</a:t>
             </a:fld>
             <a:endParaRPr lang="en-GB"/>
           </a:p>
@@ -5313,7 +5418,7 @@
           <a:p>
             <a:fld id="{7559FC98-AF75-4A00-A03C-DF9FEBF6BCB9}" type="slidenum">
               <a:rPr lang="en-GB" smtClean="0"/>
-              <a:t>‹Nr.›</a:t>
+              <a:t>‹#›</a:t>
             </a:fld>
             <a:endParaRPr lang="en-GB"/>
           </a:p>
@@ -6420,7 +6525,7 @@
             <a:fld id="{7559FC98-AF75-4A00-A03C-DF9FEBF6BCB9}" type="slidenum">
               <a:rPr lang="en-GB" smtClean="0"/>
               <a:pPr/>
-              <a:t>‹Nr.›</a:t>
+              <a:t>‹#›</a:t>
             </a:fld>
             <a:endParaRPr lang="en-GB" dirty="0"/>
           </a:p>
@@ -7502,7 +7607,7 @@
             <a:fld id="{7559FC98-AF75-4A00-A03C-DF9FEBF6BCB9}" type="slidenum">
               <a:rPr lang="en-GB" smtClean="0"/>
               <a:pPr/>
-              <a:t>‹Nr.›</a:t>
+              <a:t>‹#›</a:t>
             </a:fld>
             <a:endParaRPr lang="en-GB" dirty="0"/>
           </a:p>
@@ -7964,7 +8069,7 @@
             <a:fld id="{7559FC98-AF75-4A00-A03C-DF9FEBF6BCB9}" type="slidenum">
               <a:rPr lang="en-GB" smtClean="0"/>
               <a:pPr/>
-              <a:t>‹Nr.›</a:t>
+              <a:t>‹#›</a:t>
             </a:fld>
             <a:endParaRPr lang="en-GB" dirty="0"/>
           </a:p>
@@ -8348,7 +8453,7 @@
           <a:p>
             <a:fld id="{7559FC98-AF75-4A00-A03C-DF9FEBF6BCB9}" type="slidenum">
               <a:rPr lang="en-GB" smtClean="0"/>
-              <a:t>‹Nr.›</a:t>
+              <a:t>‹#›</a:t>
             </a:fld>
             <a:endParaRPr lang="en-GB"/>
           </a:p>
@@ -8796,7 +8901,7 @@
           <a:p>
             <a:fld id="{ED8FFC02-F414-406A-9AF9-AE6E7846E736}" type="datetime4">
               <a:rPr lang="en-GB" smtClean="0"/>
-              <a:t>10 April 2026</a:t>
+              <a:t>12 April 2026</a:t>
             </a:fld>
             <a:endParaRPr lang="en-GB" dirty="0"/>
           </a:p>
@@ -8887,7 +8992,7 @@
             <a:fld id="{7559FC98-AF75-4A00-A03C-DF9FEBF6BCB9}" type="slidenum">
               <a:rPr lang="en-GB" smtClean="0"/>
               <a:pPr/>
-              <a:t>‹Nr.›</a:t>
+              <a:t>‹#›</a:t>
             </a:fld>
             <a:endParaRPr lang="en-GB" dirty="0"/>
           </a:p>
@@ -9490,7 +9595,16 @@
           <a:lstStyle/>
           <a:p>
             <a:r>
-              <a:t>Onboarding — Compensation &amp; Flag-Driven Completion</a:t>
+              <a:rPr dirty="0"/>
+              <a:t>Onboarding </a:t>
+            </a:r>
+            <a:r>
+              <a:rPr lang="en-US" dirty="0"/>
+              <a:t>-</a:t>
+            </a:r>
+            <a:r>
+              <a:rPr dirty="0"/>
+              <a:t> Compensation &amp; Flag-Driven Completion</a:t>
             </a:r>
           </a:p>
         </p:txBody>
@@ -9511,69 +9625,113 @@
           <a:lstStyle/>
           <a:p>
             <a:r>
-              <a:rPr sz="1400"/>
-              <a:t>Challenge: one creation succeeds, the other fails — what now?</a:t>
-            </a:r>
-          </a:p>
-          <a:p>
-            <a:r>
-              <a:rPr sz="1400"/>
+              <a:rPr sz="1400" dirty="0"/>
+              <a:t>Challenge: one creation succeeds, the other fails </a:t>
+            </a:r>
+            <a:r>
+              <a:rPr lang="en-US" sz="1400" dirty="0"/>
+              <a:t>-</a:t>
+            </a:r>
+            <a:r>
+              <a:rPr sz="1400" dirty="0"/>
+              <a:t> what now?</a:t>
+            </a:r>
+          </a:p>
+          <a:p>
+            <a:r>
+              <a:rPr sz="1400" dirty="0"/>
               <a:t>Flag-driven completion (ADR-0012)</a:t>
             </a:r>
           </a:p>
           <a:p>
             <a:pPr lvl="1"/>
             <a:r>
-              <a:rPr sz="1200"/>
-              <a:t>Workers always complete Zeebe jobs, report outcome via flags</a:t>
+              <a:rPr sz="1200" dirty="0"/>
+              <a:t>Workers always complete </a:t>
+            </a:r>
+            <a:r>
+              <a:rPr sz="1200" dirty="0" err="1"/>
+              <a:t>Zeebe</a:t>
+            </a:r>
+            <a:r>
+              <a:rPr sz="1200" dirty="0"/>
+              <a:t> jobs, report outcome via flags</a:t>
             </a:r>
           </a:p>
           <a:p>
             <a:pPr lvl="1"/>
             <a:r>
-              <a:rPr sz="1200"/>
-              <a:t>isUserCreated / isPortfolioCreated drive gateway branches</a:t>
+              <a:rPr sz="1200" dirty="0" err="1"/>
+              <a:t>isUserCreated</a:t>
+            </a:r>
+            <a:r>
+              <a:rPr sz="1200" dirty="0"/>
+              <a:t> / </a:t>
+            </a:r>
+            <a:r>
+              <a:rPr sz="1200" dirty="0" err="1"/>
+              <a:t>isPortfolioCreated</a:t>
+            </a:r>
+            <a:r>
+              <a:rPr sz="1200" dirty="0"/>
+              <a:t> drive gateway branches</a:t>
             </a:r>
           </a:p>
           <a:p>
             <a:pPr lvl="1"/>
             <a:r>
-              <a:rPr sz="1200"/>
+              <a:rPr sz="1200" dirty="0"/>
               <a:t>BPMN errors would short-circuit and bypass compensation gateways</a:t>
             </a:r>
           </a:p>
           <a:p>
             <a:r>
-              <a:rPr sz="1400"/>
+              <a:rPr sz="1400" dirty="0"/>
               <a:t>Compensation (ADR-0011)</a:t>
             </a:r>
           </a:p>
           <a:p>
             <a:pPr lvl="1"/>
             <a:r>
-              <a:rPr sz="1200"/>
+              <a:rPr sz="1200" dirty="0"/>
               <a:t>Exclusive gateways inspect flags → compensation handlers</a:t>
             </a:r>
           </a:p>
           <a:p>
             <a:pPr lvl="1"/>
             <a:r>
-              <a:rPr sz="1200"/>
+              <a:rPr sz="1200" dirty="0"/>
               <a:t>Delete local entity + publish compensation request for peer</a:t>
             </a:r>
           </a:p>
           <a:p>
             <a:pPr lvl="1"/>
             <a:r>
-              <a:rPr sz="1200"/>
-              <a:t>User/Portfolio CompensationRequestedEvent carries full payload</a:t>
+              <a:rPr sz="1200" dirty="0"/>
+              <a:t>User/Portfolio </a:t>
+            </a:r>
+            <a:r>
+              <a:rPr sz="1200" dirty="0" err="1"/>
+              <a:t>CompensationRequestedEvent</a:t>
+            </a:r>
+            <a:r>
+              <a:rPr sz="1200" dirty="0"/>
+              <a:t> carries full payload</a:t>
             </a:r>
           </a:p>
           <a:p>
             <a:pPr lvl="1"/>
             <a:r>
-              <a:rPr sz="1200"/>
-              <a:t>Idempotent deletes — safe under at-least-once delivery</a:t>
+              <a:rPr sz="1200" dirty="0"/>
+              <a:t>Idempotent deletes </a:t>
+            </a:r>
+            <a:r>
+              <a:rPr lang="en-US" sz="1200" dirty="0"/>
+              <a:t>-</a:t>
+            </a:r>
+            <a:r>
+              <a:rPr sz="1200" dirty="0"/>
+              <a:t> safe under at-least-once delivery</a:t>
             </a:r>
           </a:p>
         </p:txBody>
@@ -9686,53 +9844,74 @@
           <a:lstStyle/>
           <a:p>
             <a:r>
-              <a:rPr sz="1600"/>
+              <a:rPr sz="1600" dirty="0"/>
               <a:t>Originally the BPMN lived inside user-service</a:t>
             </a:r>
           </a:p>
           <a:p>
             <a:r>
-              <a:rPr sz="1600"/>
+              <a:rPr sz="1600" dirty="0"/>
               <a:t>Problem: orchestrator coordinates work across two bounded contexts</a:t>
             </a:r>
           </a:p>
           <a:p>
             <a:pPr lvl="1"/>
             <a:r>
-              <a:rPr sz="1400"/>
+              <a:rPr sz="1400" dirty="0"/>
               <a:t>Coupling + mixed responsibilities violates DDD boundaries</a:t>
             </a:r>
           </a:p>
           <a:p>
             <a:r>
-              <a:rPr sz="1600"/>
+              <a:rPr sz="1600" dirty="0"/>
               <a:t>Solution: extract into a dedicated onboarding-service</a:t>
             </a:r>
           </a:p>
           <a:p>
             <a:pPr lvl="1"/>
             <a:r>
-              <a:rPr sz="1400"/>
-              <a:t>Owns the BPMN process and Zeebe deployment</a:t>
+              <a:rPr sz="1400" dirty="0"/>
+              <a:t>Owns the BPMN process and </a:t>
+            </a:r>
+            <a:r>
+              <a:rPr sz="1400" dirty="0" err="1"/>
+              <a:t>Zeebe</a:t>
+            </a:r>
+            <a:r>
+              <a:rPr sz="1400" dirty="0"/>
+              <a:t> deployment</a:t>
             </a:r>
           </a:p>
           <a:p>
             <a:pPr lvl="1"/>
             <a:r>
-              <a:rPr sz="1400"/>
-              <a:t>No persistent business data — workflow state lives in Zeebe</a:t>
-            </a:r>
+              <a:rPr sz="1400" dirty="0"/>
+              <a:t>No persistent business data </a:t>
+            </a:r>
+            <a:r>
+              <a:rPr lang="en-US" sz="1400" dirty="0"/>
+              <a:t>-</a:t>
+            </a:r>
+            <a:r>
+              <a:rPr sz="1400" dirty="0"/>
+              <a:t> workflow state lives in </a:t>
+            </a:r>
+            <a:r>
+              <a:rPr sz="1400" dirty="0" err="1"/>
+              <a:t>Zeebe</a:t>
+            </a:r>
+            <a:endParaRPr sz="1400" dirty="0"/>
           </a:p>
           <a:p>
             <a:pPr lvl="1"/>
             <a:r>
-              <a:rPr sz="1400"/>
+              <a:rPr sz="1400" dirty="0"/>
               <a:t>User and portfolio services keep their domain autonomy</a:t>
             </a:r>
           </a:p>
           <a:p>
             <a:r>
-              <a:rPr sz="1600"/>
+              <a:rPr sz="1600" dirty="0"/>
               <a:t>Trade-off: 5 services instead of 4, but clean separation</a:t>
             </a:r>
           </a:p>
@@ -9825,7 +10004,16 @@
           <a:lstStyle/>
           <a:p>
             <a:r>
-              <a:t>Place Order Process — Fairy Tale Saga</a:t>
+              <a:rPr dirty="0"/>
+              <a:t>Place Order Process </a:t>
+            </a:r>
+            <a:r>
+              <a:rPr lang="en-US" dirty="0"/>
+              <a:t>-</a:t>
+            </a:r>
+            <a:r>
+              <a:rPr dirty="0"/>
+              <a:t> Fairy Tale Saga</a:t>
             </a:r>
           </a:p>
         </p:txBody>
@@ -10182,48 +10370,72 @@
           <a:lstStyle/>
           <a:p>
             <a:r>
-              <a:rPr sz="1600"/>
+              <a:rPr sz="1600" dirty="0"/>
               <a:t>Problem: reject orders from unconfirmed users without calling user-service</a:t>
             </a:r>
           </a:p>
           <a:p>
             <a:r>
-              <a:rPr sz="1600"/>
+              <a:rPr sz="1600" dirty="0"/>
               <a:t>Solution (ADR-0017): transaction-service keeps its own table of confirmed users</a:t>
             </a:r>
           </a:p>
           <a:p>
             <a:pPr lvl="1"/>
             <a:r>
-              <a:rPr sz="1400"/>
-              <a:t>user-service publishes UserConfirmedEvent to a log-compacted topic</a:t>
+              <a:rPr sz="1400" dirty="0"/>
+              <a:t>user-service publishes </a:t>
+            </a:r>
+            <a:r>
+              <a:rPr sz="1400" dirty="0" err="1"/>
+              <a:t>UserConfirmedEvent</a:t>
+            </a:r>
+            <a:r>
+              <a:rPr sz="1400" dirty="0"/>
+              <a:t> to a log-compacted topic</a:t>
             </a:r>
           </a:p>
           <a:p>
             <a:pPr lvl="1"/>
             <a:r>
-              <a:rPr sz="1400"/>
-              <a:t>transaction-service consumes and upserts into local DB</a:t>
+              <a:rPr sz="1400" dirty="0"/>
+              <a:t>transaction-service consumes and </a:t>
+            </a:r>
+            <a:r>
+              <a:rPr sz="1400" dirty="0" err="1"/>
+              <a:t>upserts</a:t>
+            </a:r>
+            <a:r>
+              <a:rPr sz="1400" dirty="0"/>
+              <a:t> into local DB</a:t>
             </a:r>
           </a:p>
           <a:p>
             <a:pPr lvl="1"/>
             <a:r>
-              <a:rPr sz="1400"/>
+              <a:rPr sz="1400" dirty="0"/>
               <a:t>Order validation = local read, sub-millisecond, no network call</a:t>
             </a:r>
           </a:p>
           <a:p>
             <a:r>
-              <a:rPr sz="1600"/>
+              <a:rPr sz="1600" dirty="0"/>
               <a:t>Trade-off: brief eventual consistency window</a:t>
             </a:r>
           </a:p>
           <a:p>
             <a:pPr lvl="1"/>
             <a:r>
-              <a:rPr sz="1400"/>
-              <a:t>Acceptable — a newly confirmed user won't place an order immediately</a:t>
+              <a:rPr sz="1400" dirty="0"/>
+              <a:t>Acceptable </a:t>
+            </a:r>
+            <a:r>
+              <a:rPr lang="en-US" sz="1400" dirty="0"/>
+              <a:t>-</a:t>
+            </a:r>
+            <a:r>
+              <a:rPr sz="1400" dirty="0"/>
+              <a:t> a newly confirmed user won't place an order immediately</a:t>
             </a:r>
           </a:p>
         </p:txBody>
@@ -10336,39 +10548,63 @@
           <a:lstStyle/>
           <a:p>
             <a:r>
-              <a:rPr sz="1600"/>
-              <a:t>BPMN learning curve — demanding upfront, reduced implementation effort after</a:t>
-            </a:r>
-          </a:p>
-          <a:p>
-            <a:r>
-              <a:rPr sz="1600"/>
+              <a:rPr sz="1600" dirty="0"/>
+              <a:t>BPMN learning curve </a:t>
+            </a:r>
+            <a:r>
+              <a:rPr lang="en-US" sz="1600" dirty="0"/>
+              <a:t>-</a:t>
+            </a:r>
+            <a:r>
+              <a:rPr sz="1600" dirty="0"/>
+              <a:t> demanding upfront, reduced implementation effort after</a:t>
+            </a:r>
+          </a:p>
+          <a:p>
+            <a:r>
+              <a:rPr sz="1600" dirty="0"/>
               <a:t>Concepts intuitive in theory, complex in practice</a:t>
             </a:r>
           </a:p>
           <a:p>
             <a:pPr lvl="1"/>
             <a:r>
-              <a:rPr sz="1400"/>
+              <a:rPr sz="1400" dirty="0"/>
               <a:t>Orchestration, compensation, ECST multiply downstream decisions</a:t>
             </a:r>
           </a:p>
           <a:p>
             <a:r>
-              <a:rPr sz="1600"/>
+              <a:rPr sz="1600" dirty="0"/>
               <a:t>Saga selection only became clear by analyzing the nature of the wait</a:t>
             </a:r>
           </a:p>
           <a:p>
             <a:r>
-              <a:rPr sz="1600"/>
-              <a:t>Integration issues surface late — deserialization, correlation keys, payloads</a:t>
-            </a:r>
-          </a:p>
-          <a:p>
-            <a:r>
-              <a:rPr sz="1600"/>
-              <a:t>Two people, five services — ambitious scope, ADR-0010 added overhead</a:t>
+              <a:rPr sz="1600" dirty="0"/>
+              <a:t>Integration issues surface late </a:t>
+            </a:r>
+            <a:r>
+              <a:rPr lang="en-US" sz="1600" dirty="0"/>
+              <a:t>-</a:t>
+            </a:r>
+            <a:r>
+              <a:rPr sz="1600" dirty="0"/>
+              <a:t> deserialization, correlation keys, payloads</a:t>
+            </a:r>
+          </a:p>
+          <a:p>
+            <a:r>
+              <a:rPr sz="1600" dirty="0"/>
+              <a:t>Two people, five services </a:t>
+            </a:r>
+            <a:r>
+              <a:rPr lang="en-US" sz="1600" dirty="0"/>
+              <a:t>-</a:t>
+            </a:r>
+            <a:r>
+              <a:rPr sz="1600" dirty="0"/>
+              <a:t> ambitious scope, ADR-0010 added overhead</a:t>
             </a:r>
           </a:p>
         </p:txBody>
@@ -10481,47 +10717,71 @@
           <a:lstStyle/>
           <a:p>
             <a:r>
-              <a:rPr sz="1400"/>
-              <a:t>Demo 1 — Happy-path onboarding</a:t>
+              <a:rPr sz="1400" dirty="0"/>
+              <a:t>Demo 1 </a:t>
+            </a:r>
+            <a:r>
+              <a:rPr lang="en-US" sz="1400" dirty="0"/>
+              <a:t>-</a:t>
+            </a:r>
+            <a:r>
+              <a:rPr sz="1400" dirty="0"/>
+              <a:t> Happy-path onboarding</a:t>
             </a:r>
           </a:p>
           <a:p>
             <a:pPr lvl="1"/>
             <a:r>
-              <a:rPr sz="1200"/>
-              <a:t>Tasklist form → confirmation email → click → user + portfolio created</a:t>
+              <a:rPr sz="1200" dirty="0" err="1"/>
+              <a:t>Tasklist</a:t>
+            </a:r>
+            <a:r>
+              <a:rPr sz="1200" dirty="0"/>
+              <a:t> form → confirmation email → click → user + portfolio created</a:t>
             </a:r>
           </a:p>
           <a:p>
             <a:pPr lvl="1"/>
             <a:r>
-              <a:rPr sz="1200"/>
+              <a:rPr sz="1200" dirty="0"/>
               <a:t>Camunda Operate shows the completed process instance</a:t>
             </a:r>
           </a:p>
           <a:p>
             <a:r>
-              <a:rPr sz="1400"/>
-              <a:t>Demo 2 — Happy-path order placement</a:t>
+              <a:rPr sz="1400" dirty="0"/>
+              <a:t>Demo 2 </a:t>
+            </a:r>
+            <a:r>
+              <a:rPr lang="en-US" sz="1400" dirty="0"/>
+              <a:t>-</a:t>
+            </a:r>
+            <a:r>
+              <a:rPr sz="1400" dirty="0"/>
+              <a:t> Happy-path order placement</a:t>
             </a:r>
           </a:p>
           <a:p>
             <a:pPr lvl="1"/>
             <a:r>
-              <a:rPr sz="1200"/>
-              <a:t>Tasklist order → price match → APPROVED → portfolio updated</a:t>
+              <a:rPr sz="1200" dirty="0" err="1"/>
+              <a:t>Tasklist</a:t>
+            </a:r>
+            <a:r>
+              <a:rPr sz="1200" dirty="0"/>
+              <a:t> order → price match → APPROVED → portfolio updated</a:t>
             </a:r>
           </a:p>
           <a:p>
             <a:pPr lvl="1"/>
             <a:r>
-              <a:rPr sz="1200"/>
+              <a:rPr sz="1200" dirty="0"/>
               <a:t>Notification email received</a:t>
             </a:r>
           </a:p>
           <a:p>
             <a:r>
-              <a:rPr sz="1400"/>
+              <a:rPr sz="1400" dirty="0"/>
               <a:t>Optional if time permits: timeout scenario, Kafka UI, Operate history</a:t>
             </a:r>
           </a:p>
@@ -10925,7 +11185,15 @@
           <a:p>
             <a:r>
               <a:rPr sz="2000" dirty="0"/>
-              <a:t>Crypto portfolio simulation platform — not a production exchange</a:t>
+              <a:t>Crypto portfolio simulation platform </a:t>
+            </a:r>
+            <a:r>
+              <a:rPr lang="en-US" sz="2000" dirty="0"/>
+              <a:t>-</a:t>
+            </a:r>
+            <a:r>
+              <a:rPr sz="2000" dirty="0"/>
+              <a:t> not a production exchange</a:t>
             </a:r>
           </a:p>
           <a:p>
@@ -11053,7 +11321,16 @@
           <a:lstStyle/>
           <a:p>
             <a:r>
-              <a:t>Domain — Five Bounded Contexts</a:t>
+              <a:rPr dirty="0"/>
+              <a:t>Domain </a:t>
+            </a:r>
+            <a:r>
+              <a:rPr lang="de-CH" dirty="0"/>
+              <a:t>-</a:t>
+            </a:r>
+            <a:r>
+              <a:rPr dirty="0"/>
+              <a:t> Five Bounded Contexts</a:t>
             </a:r>
           </a:p>
         </p:txBody>
@@ -11074,52 +11351,92 @@
           <a:lstStyle/>
           <a:p>
             <a:r>
-              <a:rPr sz="1600"/>
-              <a:t>Market Data — upstream price feed</a:t>
-            </a:r>
-          </a:p>
-          <a:p>
-            <a:r>
-              <a:rPr sz="1600"/>
-              <a:t>Portfolio — holdings &amp; valuation</a:t>
-            </a:r>
-          </a:p>
-          <a:p>
-            <a:r>
-              <a:rPr sz="1600"/>
-              <a:t>Trading — order lifecycle</a:t>
-            </a:r>
-          </a:p>
-          <a:p>
-            <a:r>
-              <a:rPr sz="1600"/>
-              <a:t>User Identity — accounts &amp; confirmation</a:t>
-            </a:r>
-          </a:p>
-          <a:p>
-            <a:r>
-              <a:rPr sz="1600"/>
-              <a:t>Onboarding — saga orchestrator</a:t>
+              <a:rPr sz="1600" dirty="0"/>
+              <a:t>Market Data </a:t>
+            </a:r>
+            <a:r>
+              <a:rPr lang="en-US" sz="1600" dirty="0"/>
+              <a:t>-</a:t>
+            </a:r>
+            <a:r>
+              <a:rPr sz="1600" dirty="0"/>
+              <a:t> upstream price feed</a:t>
+            </a:r>
+          </a:p>
+          <a:p>
+            <a:r>
+              <a:rPr sz="1600" dirty="0"/>
+              <a:t>Portfolio </a:t>
+            </a:r>
+            <a:r>
+              <a:rPr lang="en-US" sz="1600" dirty="0"/>
+              <a:t>-</a:t>
+            </a:r>
+            <a:r>
+              <a:rPr sz="1600" dirty="0"/>
+              <a:t> holdings &amp; valuation</a:t>
+            </a:r>
+          </a:p>
+          <a:p>
+            <a:r>
+              <a:rPr sz="1600" dirty="0"/>
+              <a:t>Trading </a:t>
+            </a:r>
+            <a:r>
+              <a:rPr lang="en-US" sz="1600" dirty="0"/>
+              <a:t>-</a:t>
+            </a:r>
+            <a:r>
+              <a:rPr sz="1600" dirty="0"/>
+              <a:t> order lifecycle</a:t>
+            </a:r>
+          </a:p>
+          <a:p>
+            <a:r>
+              <a:rPr sz="1600" dirty="0"/>
+              <a:t>User Identity </a:t>
+            </a:r>
+            <a:r>
+              <a:rPr lang="en-US" sz="1600" dirty="0"/>
+              <a:t>-</a:t>
+            </a:r>
+            <a:r>
+              <a:rPr sz="1600" dirty="0"/>
+              <a:t> accounts &amp; confirmation</a:t>
+            </a:r>
+          </a:p>
+          <a:p>
+            <a:r>
+              <a:rPr sz="1600" dirty="0"/>
+              <a:t>Onboarding </a:t>
+            </a:r>
+            <a:r>
+              <a:rPr lang="en-US" sz="1600" dirty="0"/>
+              <a:t>-</a:t>
+            </a:r>
+            <a:r>
+              <a:rPr sz="1600" dirty="0"/>
+              <a:t> saga orchestrator</a:t>
             </a:r>
           </a:p>
           <a:p>
             <a:pPr lvl="1"/>
             <a:r>
-              <a:rPr sz="1400"/>
+              <a:rPr sz="1400" dirty="0"/>
               <a:t>Upstream/downstream relationships</a:t>
             </a:r>
           </a:p>
           <a:p>
             <a:pPr lvl="1"/>
             <a:r>
-              <a:rPr sz="1400"/>
+              <a:rPr sz="1400" dirty="0"/>
               <a:t>Partnership: User ↔ Portfolio (compensation)</a:t>
             </a:r>
           </a:p>
           <a:p>
             <a:pPr lvl="1"/>
             <a:r>
-              <a:rPr sz="1400"/>
+              <a:rPr sz="1400" dirty="0"/>
               <a:t>Shared kernel: shared-events module</a:t>
             </a:r>
           </a:p>
@@ -11520,7 +11837,16 @@
           <a:lstStyle/>
           <a:p>
             <a:r>
-              <a:t>Kafka Experiments — Assignment 1 (Summary)</a:t>
+              <a:rPr dirty="0"/>
+              <a:t>Kafka Experiments </a:t>
+            </a:r>
+            <a:r>
+              <a:rPr lang="en-US" dirty="0"/>
+              <a:t>-</a:t>
+            </a:r>
+            <a:r>
+              <a:rPr dirty="0"/>
+              <a:t> Assignment 1 (Summary)</a:t>
             </a:r>
           </a:p>
         </p:txBody>
@@ -11541,37 +11867,69 @@
           <a:lstStyle/>
           <a:p>
             <a:r>
-              <a:rPr sz="1600"/>
+              <a:rPr sz="1600" dirty="0"/>
               <a:t>Four experiments on multi-broker clusters validating Kafka reliability</a:t>
             </a:r>
           </a:p>
           <a:p>
             <a:r>
-              <a:rPr sz="1600"/>
-              <a:t>acks=0: eventID=76 permanently lost — producer cannot detect the loss</a:t>
-            </a:r>
-          </a:p>
-          <a:p>
-            <a:r>
-              <a:rPr sz="1600"/>
-              <a:t>acks=1: eventID=71 ACKed by leader but lost when leader crashed before replication</a:t>
-            </a:r>
-          </a:p>
-          <a:p>
-            <a:r>
-              <a:rPr sz="1600"/>
+              <a:rPr sz="1600" dirty="0"/>
+              <a:t>acks=0: </a:t>
+            </a:r>
+            <a:r>
+              <a:rPr sz="1600" dirty="0" err="1"/>
+              <a:t>eventID</a:t>
+            </a:r>
+            <a:r>
+              <a:rPr sz="1600" dirty="0"/>
+              <a:t>=76 permanently lost </a:t>
+            </a:r>
+            <a:r>
+              <a:rPr lang="en-US" sz="1600" dirty="0"/>
+              <a:t>-</a:t>
+            </a:r>
+            <a:r>
+              <a:rPr sz="1600" dirty="0"/>
+              <a:t> producer cannot detect the loss</a:t>
+            </a:r>
+          </a:p>
+          <a:p>
+            <a:r>
+              <a:rPr sz="1600" dirty="0"/>
+              <a:t>acks=1: </a:t>
+            </a:r>
+            <a:r>
+              <a:rPr sz="1600" dirty="0" err="1"/>
+              <a:t>eventID</a:t>
+            </a:r>
+            <a:r>
+              <a:rPr sz="1600" dirty="0"/>
+              <a:t>=71 </a:t>
+            </a:r>
+            <a:r>
+              <a:rPr sz="1600" dirty="0" err="1"/>
+              <a:t>ACKed</a:t>
+            </a:r>
+            <a:r>
+              <a:rPr sz="1600" dirty="0"/>
+              <a:t> by leader but lost when leader crashed before replication</a:t>
+            </a:r>
+          </a:p>
+          <a:p>
+            <a:r>
+              <a:rPr sz="1600" dirty="0"/>
               <a:t>acks=all: ~8.9s availability gap during failover, zero data loss</a:t>
             </a:r>
           </a:p>
           <a:p>
             <a:r>
-              <a:rPr sz="1600"/>
+              <a:rPr sz="1600" dirty="0"/>
               <a:t>Offset reset: earliest replays retained history; latest silently skips it</a:t>
             </a:r>
           </a:p>
           <a:p>
             <a:r>
-              <a:rPr sz="1600"/>
+              <a:rPr sz="1600" dirty="0"/>
               <a:t>Findings directly informed our production config choices (ADR-0001)</a:t>
             </a:r>
           </a:p>
@@ -11685,68 +12043,124 @@
           <a:lstStyle/>
           <a:p>
             <a:r>
-              <a:rPr sz="1400"/>
+              <a:rPr sz="1400" dirty="0"/>
               <a:t>Transition: from events to processes</a:t>
             </a:r>
           </a:p>
           <a:p>
             <a:r>
-              <a:rPr sz="1400"/>
-              <a:t>Two workflows need durable waiting states — onboarding and order placement</a:t>
-            </a:r>
-          </a:p>
-          <a:p>
-            <a:r>
-              <a:rPr sz="1400"/>
-              <a:t>Why not Camunda 7 / Operaton?</a:t>
+              <a:rPr sz="1400" dirty="0"/>
+              <a:t>Two workflows need durable waiting states </a:t>
+            </a:r>
+            <a:r>
+              <a:rPr lang="en-US" sz="1400" dirty="0"/>
+              <a:t>-</a:t>
+            </a:r>
+            <a:r>
+              <a:rPr sz="1400" dirty="0"/>
+              <a:t> onboarding and order placement</a:t>
+            </a:r>
+          </a:p>
+          <a:p>
+            <a:r>
+              <a:rPr sz="1400" dirty="0"/>
+              <a:t>Why not Camunda 7 / </a:t>
+            </a:r>
+            <a:r>
+              <a:rPr sz="1400" dirty="0" err="1"/>
+              <a:t>Operaton</a:t>
+            </a:r>
+            <a:r>
+              <a:rPr sz="1400" dirty="0"/>
+              <a:t>?</a:t>
             </a:r>
           </a:p>
           <a:p>
             <a:pPr lvl="1"/>
             <a:r>
-              <a:rPr sz="1200"/>
+              <a:rPr sz="1200" dirty="0"/>
               <a:t>Embedded engine stores process state in the application DB</a:t>
             </a:r>
           </a:p>
           <a:p>
             <a:pPr lvl="1"/>
             <a:r>
-              <a:rPr sz="1200"/>
-              <a:t>Many concurrent placeOrder waits would need a shared polling table</a:t>
+              <a:rPr sz="1200" dirty="0"/>
+              <a:t>Many concurrent </a:t>
+            </a:r>
+            <a:r>
+              <a:rPr sz="1200" dirty="0" err="1"/>
+              <a:t>placeOrder</a:t>
+            </a:r>
+            <a:r>
+              <a:rPr sz="1200" dirty="0"/>
+              <a:t> waits would need a shared polling table</a:t>
             </a:r>
           </a:p>
           <a:p>
             <a:pPr lvl="1"/>
             <a:r>
-              <a:rPr sz="1200"/>
+              <a:rPr sz="1200" dirty="0"/>
               <a:t>Kafka and SMTP require custom application-level client code</a:t>
             </a:r>
           </a:p>
           <a:p>
             <a:r>
-              <a:rPr sz="1400"/>
-              <a:t>Camunda 8 / Zeebe advantages</a:t>
+              <a:rPr sz="1400" dirty="0"/>
+              <a:t>Camunda 8 / </a:t>
+            </a:r>
+            <a:r>
+              <a:rPr sz="1400" dirty="0" err="1"/>
+              <a:t>Zeebe</a:t>
+            </a:r>
+            <a:r>
+              <a:rPr sz="1400" dirty="0"/>
+              <a:t> advantages</a:t>
             </a:r>
           </a:p>
           <a:p>
             <a:pPr lvl="1"/>
             <a:r>
-              <a:rPr sz="1200"/>
-              <a:t>Partitioned log — each instance waits independently, no job-lock contention</a:t>
+              <a:rPr sz="1200" dirty="0"/>
+              <a:t>Partitioned log </a:t>
+            </a:r>
+            <a:r>
+              <a:rPr lang="en-US" sz="1200" dirty="0"/>
+              <a:t>-</a:t>
+            </a:r>
+            <a:r>
+              <a:rPr sz="1200" dirty="0"/>
+              <a:t> each instance waits independently, no job-lock contention</a:t>
             </a:r>
           </a:p>
           <a:p>
             <a:pPr lvl="1"/>
             <a:r>
-              <a:rPr sz="1200"/>
-              <a:t>Connector templates — Kafka + SMTP inside BPMN, zero notification code</a:t>
+              <a:rPr sz="1200" dirty="0"/>
+              <a:t>Connector templates </a:t>
+            </a:r>
+            <a:r>
+              <a:rPr lang="en-US" sz="1200" dirty="0"/>
+              <a:t>-</a:t>
+            </a:r>
+            <a:r>
+              <a:rPr sz="1200" dirty="0"/>
+              <a:t> Kafka + SMTP inside BPMN, zero notification code</a:t>
             </a:r>
           </a:p>
           <a:p>
             <a:pPr lvl="1"/>
             <a:r>
-              <a:rPr sz="1200"/>
-              <a:t>Camunda Operate — runtime visibility without custom dashboards</a:t>
+              <a:rPr sz="1200" dirty="0"/>
+              <a:t>Camunda Operate </a:t>
+            </a:r>
+            <a:r>
+              <a:rPr lang="en-US" sz="1200" dirty="0"/>
+              <a:t>-</a:t>
+            </a:r>
+            <a:r>
+              <a:rPr sz="1200" dirty="0"/>
+              <a:t> runtime visibility without custom dashboards</a:t>
             </a:r>
           </a:p>
         </p:txBody>
@@ -11838,7 +12252,16 @@
           <a:lstStyle/>
           <a:p>
             <a:r>
-              <a:t>Two Saga Patterns — Driven by Wait Semantics</a:t>
+              <a:rPr dirty="0"/>
+              <a:t>Two Saga Patterns </a:t>
+            </a:r>
+            <a:r>
+              <a:rPr lang="en-US" dirty="0"/>
+              <a:t>-</a:t>
+            </a:r>
+            <a:r>
+              <a:rPr dirty="0"/>
+              <a:t> Driven by Wait Semantics</a:t>
             </a:r>
           </a:p>
         </p:txBody>
@@ -11859,61 +12282,101 @@
           <a:lstStyle/>
           <a:p>
             <a:r>
-              <a:rPr sz="1400"/>
-              <a:t>Two orchestrated saga styles — choice driven by nature of the wait</a:t>
-            </a:r>
-          </a:p>
-          <a:p>
-            <a:r>
-              <a:rPr sz="1400"/>
-              <a:t>Onboarding → Parallel Saga (aeo)</a:t>
+              <a:rPr sz="1400" dirty="0"/>
+              <a:t>Two orchestrated saga styles </a:t>
+            </a:r>
+            <a:r>
+              <a:rPr lang="en-US" sz="1400" dirty="0"/>
+              <a:t>-</a:t>
+            </a:r>
+            <a:r>
+              <a:rPr sz="1400" dirty="0"/>
+              <a:t> choice driven by nature of the wait</a:t>
+            </a:r>
+          </a:p>
+          <a:p>
+            <a:r>
+              <a:rPr sz="1400" dirty="0"/>
+              <a:t>Onboarding → Parallel Saga (</a:t>
+            </a:r>
+            <a:r>
+              <a:rPr sz="1400" dirty="0" err="1"/>
+              <a:t>aeo</a:t>
+            </a:r>
+            <a:r>
+              <a:rPr sz="1400" dirty="0"/>
+              <a:t>)</a:t>
             </a:r>
           </a:p>
           <a:p>
             <a:pPr lvl="1"/>
             <a:r>
-              <a:rPr sz="1200"/>
+              <a:rPr sz="1200" dirty="0"/>
               <a:t>Deterministic wait (user clicks confirmation link)</a:t>
             </a:r>
           </a:p>
           <a:p>
             <a:pPr lvl="1"/>
             <a:r>
-              <a:rPr sz="1200"/>
-              <a:t>Spans two bounded contexts — User + Portfolio</a:t>
+              <a:rPr sz="1200" dirty="0"/>
+              <a:t>Spans two bounded contexts </a:t>
+            </a:r>
+            <a:r>
+              <a:rPr lang="en-US" sz="1200" dirty="0"/>
+              <a:t>-</a:t>
+            </a:r>
+            <a:r>
+              <a:rPr sz="1200" dirty="0"/>
+              <a:t> User + Portfolio</a:t>
             </a:r>
           </a:p>
           <a:p>
             <a:pPr lvl="1"/>
             <a:r>
-              <a:rPr sz="1200"/>
+              <a:rPr sz="1200" dirty="0"/>
               <a:t>Needs all-or-nothing consistency</a:t>
             </a:r>
           </a:p>
           <a:p>
             <a:r>
-              <a:rPr sz="1400"/>
-              <a:t>Order Placement → Fairy Tale Saga (seo)</a:t>
+              <a:rPr sz="1400" dirty="0"/>
+              <a:t>Order Placement → Fairy Tale Saga (</a:t>
+            </a:r>
+            <a:r>
+              <a:rPr sz="1400" dirty="0" err="1"/>
+              <a:t>seo</a:t>
+            </a:r>
+            <a:r>
+              <a:rPr sz="1400" dirty="0"/>
+              <a:t>)</a:t>
             </a:r>
           </a:p>
           <a:p>
             <a:pPr lvl="1"/>
             <a:r>
-              <a:rPr sz="1200"/>
+              <a:rPr sz="1200" dirty="0"/>
               <a:t>Non-deterministic wait (price match from market feed)</a:t>
             </a:r>
           </a:p>
           <a:p>
             <a:pPr lvl="1"/>
             <a:r>
-              <a:rPr sz="1200"/>
-              <a:t>Stays inside one bounded context — Trading</a:t>
+              <a:rPr sz="1200" dirty="0"/>
+              <a:t>Stays inside one bounded context </a:t>
+            </a:r>
+            <a:r>
+              <a:rPr lang="en-US" sz="1200" dirty="0"/>
+              <a:t>-</a:t>
+            </a:r>
+            <a:r>
+              <a:rPr sz="1200" dirty="0"/>
+              <a:t> Trading</a:t>
             </a:r>
           </a:p>
           <a:p>
             <a:pPr lvl="1"/>
             <a:r>
-              <a:rPr sz="1200"/>
+              <a:rPr sz="1200" dirty="0"/>
               <a:t>Accepts eventual consistency with Portfolio</a:t>
             </a:r>
           </a:p>
@@ -12030,7 +12493,16 @@
           <a:lstStyle/>
           <a:p>
             <a:r>
-              <a:t>Onboarding Process — Parallel Saga</a:t>
+              <a:rPr dirty="0"/>
+              <a:t>Onboarding Process </a:t>
+            </a:r>
+            <a:r>
+              <a:rPr lang="en-US" dirty="0"/>
+              <a:t>-</a:t>
+            </a:r>
+            <a:r>
+              <a:rPr dirty="0"/>
+              <a:t> Parallel Saga</a:t>
             </a:r>
           </a:p>
         </p:txBody>
@@ -12945,50 +13417,177 @@
 </file>
 
 <file path=customXml/item1.xml><?xml version="1.0" encoding="utf-8"?>
+<TemplafySlideTemplateConfiguration><![CDATA[{"slideVersion":1,"isValidatorEnabled":false,"isLocked":false,"elementsMetadata":[{"type":"shape","elementConfiguration":{"binding":"{{FormatDateTime(Form.Date,Translate(\"DateFormat\"),DocumentLanguage)}}","type":"text","disableUpdates":false}},{"type":"shape","elementConfiguration":{"width":"{{UserProfile.Department.REFDepartmentLogo.WidthPNGPPTFooter}}","height":"{{UserProfile.Department.REFDepartmentLogo.HeightPNGPPTFooter}}","image":"{{UserProfile.Department.REFDepartmentLogo.ImagePNG}}","visibility":"{{IfElse(Form.FooterLogo, VisibilityType.Visible,VisibilityType.Hidden)}}","type":"image","disableUpdates":false}},{"type":"shape","elementConfiguration":{"binding":"{{Form.Footer}}","type":"text","disableUpdates":false}},{"type":"shape","elementConfiguration":{"binding":"{{UserProfile.Department.DepartmentName}}","visibility":"{{IfElse(Form.FooterLogo, VisibilityType.Hidden,VisibilityType.Visible)}}","type":"text","disableUpdates":false}}],"slideId":"637750113834156510","enableDocumentContentUpdater":true,"version":"2.0"}]]></TemplafySlideTemplateConfiguration>
+</file>
+
+<file path=customXml/item10.xml><?xml version="1.0" encoding="utf-8"?>
+<TemplafySlideTemplateConfiguration><![CDATA[{"slideVersion":1,"isValidatorEnabled":false,"isLocked":false,"elementsMetadata":[],"slideId":"637750113834254135","enableDocumentContentUpdater":true,"version":"2.0"}]]></TemplafySlideTemplateConfiguration>
+</file>
+
+<file path=customXml/item11.xml><?xml version="1.0" encoding="utf-8"?>
+<p:properties xmlns:p="http://schemas.microsoft.com/office/2006/metadata/properties" xmlns:xsi="http://www.w3.org/2001/XMLSchema-instance" xmlns:pc="http://schemas.microsoft.com/office/infopath/2007/PartnerControls">
+  <documentManagement>
+    <lcf76f155ced4ddcb4097134ff3c332f xmlns="07c8a24f-8b40-44ca-950f-ae5db2c4fa23">
+      <Terms xmlns="http://schemas.microsoft.com/office/infopath/2007/PartnerControls"/>
+    </lcf76f155ced4ddcb4097134ff3c332f>
+    <TaxCatchAll xmlns="71d337dc-809a-4269-a690-d6cd31b4acd0" xsi:nil="true"/>
+  </documentManagement>
+</p:properties>
+</file>
+
+<file path=customXml/item12.xml><?xml version="1.0" encoding="utf-8"?>
+<TemplafySlideTemplateConfiguration><![CDATA[{"slideVersion":1,"isValidatorEnabled":false,"isLocked":false,"elementsMetadata":[],"slideId":"637750113834120761","enableDocumentContentUpdater":true,"version":"2.0"}]]></TemplafySlideTemplateConfiguration>
+</file>
+
+<file path=customXml/item13.xml><?xml version="1.0" encoding="utf-8"?>
+<TemplafySlideTemplateConfiguration><![CDATA[{"slideVersion":1,"isValidatorEnabled":false,"isLocked":false,"elementsMetadata":[{"type":"shape","elementConfiguration":{"width":"{{UserProfile.Department.REFDepartmentLogo.WidthPNGPPT}}","height":"{{UserProfile.Department.REFDepartmentLogo.HeightPNGPPT}}","image":"{{UserProfile.Department.REFDepartmentLogo.ImagePNG}}","type":"image","disableUpdates":false}}],"slideId":"638097175473157463","enableDocumentContentUpdater":false,"version":"2.0"}]]></TemplafySlideTemplateConfiguration>
+</file>
+
+<file path=customXml/item14.xml><?xml version="1.0" encoding="utf-8"?>
+<TemplafySlideFormConfiguration><![CDATA[{"formFields":[{"required":true,"shareValue":false,"type":"datePicker","name":"Date","label":"Datum"},{"required":false,"placeholder":"","lines":1,"shareValue":false,"type":"textBox","name":"Footer","label":"Fusszeile"},{"defaultValue":{"fixedValue":true},"shareValue":false,"type":"checkBox","name":"FooterLogo","label":"mit Logo in der Fusszeile"}],"formDataEntries":[]}]]></TemplafySlideFormConfiguration>
+</file>
+
+<file path=customXml/item15.xml><?xml version="1.0" encoding="utf-8"?>
+<TemplafySlideFormConfiguration><![CDATA[{"formFields":[{"required":true,"shareValue":false,"type":"datePicker","name":"Date","label":"Datum"},{"required":false,"placeholder":"","lines":1,"shareValue":false,"type":"textBox","name":"Footer","label":"Fusszeile"},{"defaultValue":{"fixedValue":true},"shareValue":false,"type":"checkBox","name":"FooterLogo","label":"mit Logo in der Fusszeile"}],"formDataEntries":[]}]]></TemplafySlideFormConfiguration>
+</file>
+
+<file path=customXml/item16.xml><?xml version="1.0" encoding="utf-8"?>
+<TemplafySlideTemplateConfiguration><![CDATA[{"slideVersion":1,"isValidatorEnabled":false,"isLocked":false,"elementsMetadata":[{"type":"shape","elementConfiguration":{"width":"{{UserProfile.Department.REFDepartmentLogo.WidthPNGPPT}}","height":"{{UserProfile.Department.REFDepartmentLogo.HeightPNGPPT}}","image":"{{UserProfile.Department.REFDepartmentLogo.ImagePNG}}","type":"image","disableUpdates":false}}],"slideId":"637750113834107608","enableDocumentContentUpdater":true,"version":"2.0"}]]></TemplafySlideTemplateConfiguration>
+</file>
+
+<file path=customXml/item17.xml><?xml version="1.0" encoding="utf-8"?>
+<TemplafySlideTemplateConfiguration><![CDATA[{"slideVersion":1,"isValidatorEnabled":false,"isLocked":false,"elementsMetadata":[{"type":"shape","elementConfiguration":{"binding":"{{FormatDateTime(Form.Date,Translate(\"DateFormat\"),DocumentLanguage)}}","type":"text","disableUpdates":false}},{"type":"shape","elementConfiguration":{"width":"{{UserProfile.Department.REFDepartmentLogo.WidthPNGPPTFooter}}","height":"{{UserProfile.Department.REFDepartmentLogo.HeightPNGPPTFooter}}","image":"{{UserProfile.Department.REFDepartmentLogo.ImagePNG}}","visibility":"{{IfElse(Form.FooterLogo, VisibilityType.Visible,VisibilityType.Hidden)}}","type":"image","disableUpdates":false}},{"type":"shape","elementConfiguration":{"binding":"{{Form.Footer}}","type":"text","disableUpdates":false}},{"type":"shape","elementConfiguration":{"binding":"{{UserProfile.Department.DepartmentName}}","visibility":"{{IfElse(Form.FooterLogo, VisibilityType.Hidden,VisibilityType.Visible)}}","type":"text","disableUpdates":false}}],"slideId":"637750113834135648","enableDocumentContentUpdater":true,"version":"2.0"}]]></TemplafySlideTemplateConfiguration>
+</file>
+
+<file path=customXml/item18.xml><?xml version="1.0" encoding="utf-8"?>
+<TemplafyFormConfiguration><![CDATA[{"formFields":[{"required":true,"shareValue":false,"type":"datePicker","name":"Date","label":"Datum"},{"required":false,"placeholder":"","lines":1,"shareValue":false,"type":"textBox","name":"Footer","label":"Fusszeile"},{"defaultValue":{"fixedValue":true},"shareValue":false,"type":"checkBox","name":"FooterLogo","label":"mit Logo in der Fusszeile"}],"formDataEntries":[{"name":"Date","value":"+Z5Mp3YA6oBTYCzRQ9X9ow=="},{"name":"FooterLogo","value":"iTzqZGj1P6MRGUQq8ahlhA=="}]}]]></TemplafyFormConfiguration>
+</file>
+
+<file path=customXml/item19.xml><?xml version="1.0" encoding="utf-8"?>
+<TemplafySlideTemplateConfiguration><![CDATA[{"slideVersion":1,"isValidatorEnabled":false,"isLocked":false,"elementsMetadata":[],"slideId":"637750113834122525","enableDocumentContentUpdater":true,"version":"2.0"}]]></TemplafySlideTemplateConfiguration>
+</file>
+
+<file path=customXml/item2.xml><?xml version="1.0" encoding="utf-8"?>
+<TemplafySlideTemplateConfiguration><![CDATA[{"slideVersion":1,"isValidatorEnabled":false,"isLocked":false,"elementsMetadata":[{"type":"shape","elementConfiguration":{"binding":"{{FormatDateTime(Form.Date,Translate(\"DateFormat\"),DocumentLanguage)}}","type":"text","disableUpdates":false}},{"type":"shape","elementConfiguration":{"width":"{{UserProfile.Department.REFDepartmentLogo.WidthPNGPPTFooter}}","height":"{{UserProfile.Department.REFDepartmentLogo.HeightPNGPPTFooter}}","image":"{{UserProfile.Department.REFDepartmentLogo.ImagePNG}}","visibility":"{{IfElse(Form.FooterLogo, VisibilityType.Visible,VisibilityType.Hidden)}}","type":"image","disableUpdates":false}},{"type":"shape","elementConfiguration":{"binding":"{{Form.Footer}}","type":"text","disableUpdates":false}},{"type":"shape","elementConfiguration":{"binding":"{{UserProfile.Department.DepartmentName}}","visibility":"{{IfElse(Form.FooterLogo, VisibilityType.Hidden,VisibilityType.Visible)}}","type":"text","disableUpdates":false}}],"slideId":"637750113834113416","enableDocumentContentUpdater":true,"version":"2.0"}]]></TemplafySlideTemplateConfiguration>
+</file>
+
+<file path=customXml/item20.xml><?xml version="1.0" encoding="utf-8"?>
+<TemplafySlideTemplateConfiguration><![CDATA[{"slideVersion":1,"isValidatorEnabled":false,"isLocked":false,"elementsMetadata":[{"type":"shape","elementConfiguration":{"binding":"{{FormatDateTime(Form.Date,Translate(\"DateFormat\"),DocumentLanguage)}}","type":"text","disableUpdates":false}},{"type":"shape","elementConfiguration":{"width":"{{UserProfile.Department.REFDepartmentLogo.WidthPNGPPTFooter}}","height":"{{UserProfile.Department.REFDepartmentLogo.HeightPNGPPTFooter}}","image":"{{UserProfile.Department.REFDepartmentLogo.ImagePNG}}","visibility":"{{IfElse(Form.FooterLogo, VisibilityType.Visible,VisibilityType.Hidden)}}","type":"image","disableUpdates":false}},{"type":"shape","elementConfiguration":{"binding":"{{Form.Footer}}","type":"text","disableUpdates":false}},{"type":"shape","elementConfiguration":{"binding":"{{UserProfile.Department.DepartmentName}}","visibility":"{{IfElse(Form.FooterLogo, VisibilityType.Hidden,VisibilityType.Visible)}}","type":"text","disableUpdates":false}}],"slideId":"637750113834237210","enableDocumentContentUpdater":true,"version":"2.0"}]]></TemplafySlideTemplateConfiguration>
+</file>
+
+<file path=customXml/item21.xml><?xml version="1.0" encoding="utf-8"?>
+<TemplafySlideFormConfiguration><![CDATA[{"formFields":[],"formDataEntries":[]}]]></TemplafySlideFormConfiguration>
+</file>
+
+<file path=customXml/item22.xml><?xml version="1.0" encoding="utf-8"?>
+<TemplafySlideFormConfiguration><![CDATA[{"formFields":[{"required":true,"shareValue":false,"type":"datePicker","name":"Date","label":"Datum"},{"required":false,"placeholder":"","lines":1,"shareValue":false,"type":"textBox","name":"Footer","label":"Fusszeile"},{"defaultValue":{"fixedValue":true},"shareValue":false,"type":"checkBox","name":"FooterLogo","label":"mit Logo in der Fusszeile"}],"formDataEntries":[]}]]></TemplafySlideFormConfiguration>
+</file>
+
+<file path=customXml/item23.xml><?xml version="1.0" encoding="utf-8"?>
+<TemplafySlideFormConfiguration><![CDATA[{"formFields":[],"formDataEntries":[]}]]></TemplafySlideFormConfiguration>
+</file>
+
+<file path=customXml/item24.xml><?xml version="1.0" encoding="utf-8"?>
+<TemplafySlideFormConfiguration><![CDATA[{"formFields":[{"required":true,"shareValue":false,"type":"datePicker","name":"Date","label":"Datum"},{"required":false,"placeholder":"","lines":1,"shareValue":false,"type":"textBox","name":"Footer","label":"Fusszeile"},{"defaultValue":{"fixedValue":true},"shareValue":false,"type":"checkBox","name":"FooterLogo","label":"mit Logo in der Fusszeile"}],"formDataEntries":[]}]]></TemplafySlideFormConfiguration>
+</file>
+
+<file path=customXml/item25.xml><?xml version="1.0" encoding="utf-8"?>
+<TemplafySlideFormConfiguration><![CDATA[{"formFields":[],"formDataEntries":[]}]]></TemplafySlideFormConfiguration>
+</file>
+
+<file path=customXml/item26.xml><?xml version="1.0" encoding="utf-8"?>
+<TemplafySlideFormConfiguration><![CDATA[{"formFields":[],"formDataEntries":[]}]]></TemplafySlideFormConfiguration>
+</file>
+
+<file path=customXml/item27.xml><?xml version="1.0" encoding="utf-8"?>
 <TemplafySlideTemplateConfiguration><![CDATA[{"slideVersion":1,"isValidatorEnabled":false,"isLocked":false,"elementsMetadata":[{"type":"shape","elementConfiguration":{"width":"{{UserProfile.Department.REFDepartmentLogo.WidthPNGPPT}}","height":"{{UserProfile.Department.REFDepartmentLogo.HeightPNGPPT}}","image":"{{UserProfile.Department.REFDepartmentLogo.ImagePNG}}","type":"image","disableUpdates":false}},{"type":"shape","elementConfiguration":{"binding":"{{UserProfile.Department.DepartmentName}} \n{{UserProfile.Department.DepartmentStreet}} {{UserProfile.Department.DepartmentStreetNumber}} \n{{UserProfile.Department.DepartmentPOBox}} {{UserProfile.Department.DepartmentCity}} \n{{UserProfile.Department.DepartmentCountry}} \n{{UserProfile.Department.DepartmentWebsite}}","type":"text","disableUpdates":false}}],"slideId":"637750113834283378","enableDocumentContentUpdater":true,"version":"2.0"}]]></TemplafySlideTemplateConfiguration>
 </file>
 
-<file path=customXml/item10.xml><?xml version="1.0" encoding="utf-8"?>
+<file path=customXml/item28.xml><?xml version="1.0" encoding="utf-8"?>
+<TemplafySlideTemplateConfiguration><![CDATA[{"slideVersion":1,"isValidatorEnabled":false,"isLocked":false,"elementsMetadata":[{"type":"shape","elementConfiguration":{"binding":"{{FormatDateTime(Form.Date,Translate(\"DateFormat\"),DocumentLanguage)}}","type":"text","disableUpdates":false}},{"type":"shape","elementConfiguration":{"width":"{{UserProfile.Department.REFDepartmentLogo.WidthPNGPPTFooter}}","height":"{{UserProfile.Department.REFDepartmentLogo.HeightPNGPPTFooter}}","image":"{{UserProfile.Department.REFDepartmentLogo.ImagePNG}}","visibility":"{{IfElse(Form.FooterLogo, VisibilityType.Visible,VisibilityType.Hidden)}}","type":"image","disableUpdates":false}},{"type":"shape","elementConfiguration":{"binding":"{{Form.Footer}}","type":"text","disableUpdates":false}},{"type":"shape","elementConfiguration":{"binding":"{{UserProfile.Department.DepartmentName}}","visibility":"{{IfElse(Form.FooterLogo, VisibilityType.Hidden,VisibilityType.Visible)}}","type":"text","disableUpdates":false}}],"slideId":"637750113834279331","enableDocumentContentUpdater":true,"version":"2.0"}]]></TemplafySlideTemplateConfiguration>
+</file>
+
+<file path=customXml/item29.xml><?xml version="1.0" encoding="utf-8"?>
 <TemplafySlideFormConfiguration><![CDATA[{"formFields":[],"formDataEntries":[]}]]></TemplafySlideFormConfiguration>
 </file>
 
-<file path=customXml/item11.xml><?xml version="1.0" encoding="utf-8"?>
-<TemplafySlideTemplateConfiguration><![CDATA[{"slideVersion":1,"isValidatorEnabled":false,"isLocked":false,"elementsMetadata":[{"type":"shape","elementConfiguration":{"binding":"{{FormatDateTime(Form.Date,Translate(\"DateFormat\"),DocumentLanguage)}}","type":"text","disableUpdates":false}},{"type":"shape","elementConfiguration":{"width":"{{UserProfile.Department.REFDepartmentLogo.WidthPNGPPTFooter}}","height":"{{UserProfile.Department.REFDepartmentLogo.HeightPNGPPTFooter}}","image":"{{UserProfile.Department.REFDepartmentLogo.ImagePNG}}","visibility":"{{IfElse(Form.FooterLogo, VisibilityType.Visible,VisibilityType.Hidden)}}","type":"image","disableUpdates":false}},{"type":"shape","elementConfiguration":{"binding":"{{Form.Footer}}","type":"text","disableUpdates":false}},{"type":"shape","elementConfiguration":{"binding":"{{UserProfile.Department.DepartmentName}}","visibility":"{{IfElse(Form.FooterLogo, VisibilityType.Hidden,VisibilityType.Visible)}}","type":"text","disableUpdates":false}}],"slideId":"637750113834113416","enableDocumentContentUpdater":true,"version":"2.0"}]]></TemplafySlideTemplateConfiguration>
-</file>
-
-<file path=customXml/item12.xml><?xml version="1.0" encoding="utf-8"?>
-<TemplafyFormConfiguration><![CDATA[{"formFields":[{"required":true,"shareValue":false,"type":"datePicker","name":"Date","label":"Datum"},{"required":false,"placeholder":"","lines":1,"shareValue":false,"type":"textBox","name":"Footer","label":"Fusszeile"},{"defaultValue":{"fixedValue":true},"shareValue":false,"type":"checkBox","name":"FooterLogo","label":"mit Logo in der Fusszeile"}],"formDataEntries":[{"name":"Date","value":"+Z5Mp3YA6oBTYCzRQ9X9ow=="},{"name":"FooterLogo","value":"iTzqZGj1P6MRGUQq8ahlhA=="}]}]]></TemplafyFormConfiguration>
-</file>
-
-<file path=customXml/item13.xml><?xml version="1.0" encoding="utf-8"?>
+<file path=customXml/item3.xml><?xml version="1.0" encoding="utf-8"?>
+<TemplafySlideFormConfiguration><![CDATA[{"formFields":[],"formDataEntries":[]}]]></TemplafySlideFormConfiguration>
+</file>
+
+<file path=customXml/item30.xml><?xml version="1.0" encoding="utf-8"?>
+<TemplafySlideTemplateConfiguration><![CDATA[{"slideVersion":1,"isValidatorEnabled":false,"isLocked":false,"elementsMetadata":[],"slideId":"637750113834125595","enableDocumentContentUpdater":true,"version":"2.0"}]]></TemplafySlideTemplateConfiguration>
+</file>
+
+<file path=customXml/item31.xml><?xml version="1.0" encoding="utf-8"?>
+<TemplafySlideTemplateConfiguration><![CDATA[{"slideVersion":1,"isValidatorEnabled":false,"isLocked":false,"elementsMetadata":[{"type":"shape","elementConfiguration":{"width":"{{UserProfile.Department.REFDepartmentLogo.WidthPNGPPT}}","height":"{{UserProfile.Department.REFDepartmentLogo.HeightPNGPPT}}","image":"{{UserProfile.Department.REFDepartmentLogo.ImagePNG}}","type":"image","disableUpdates":false}}],"slideId":"637750113834106457","enableDocumentContentUpdater":true,"version":"2.0"}]]></TemplafySlideTemplateConfiguration>
+</file>
+
+<file path=customXml/item32.xml><?xml version="1.0" encoding="utf-8"?>
+<TemplafySlideFormConfiguration><![CDATA[{"formFields":[{"required":true,"shareValue":false,"type":"datePicker","name":"Date","label":"Datum"},{"required":false,"placeholder":"","lines":1,"shareValue":false,"type":"textBox","name":"Footer","label":"Fusszeile"},{"defaultValue":{"fixedValue":true},"shareValue":false,"type":"checkBox","name":"FooterLogo","label":"mit Logo in der Fusszeile"}],"formDataEntries":[]}]]></TemplafySlideFormConfiguration>
+</file>
+
+<file path=customXml/item33.xml><?xml version="1.0" encoding="utf-8"?>
+<TemplafySlideFormConfiguration><![CDATA[{"formFields":[{"required":true,"shareValue":false,"type":"datePicker","name":"Date","label":"Datum"},{"required":false,"placeholder":"","lines":1,"shareValue":false,"type":"textBox","name":"Footer","label":"Fusszeile"},{"defaultValue":{"fixedValue":true},"shareValue":false,"type":"checkBox","name":"FooterLogo","label":"mit Logo in der Fusszeile"}],"formDataEntries":[]}]]></TemplafySlideFormConfiguration>
+</file>
+
+<file path=customXml/item34.xml><?xml version="1.0" encoding="utf-8"?>
+<TemplafySlideFormConfiguration><![CDATA[{"formFields":[],"formDataEntries":[]}]]></TemplafySlideFormConfiguration>
+</file>
+
+<file path=customXml/item35.xml><?xml version="1.0" encoding="utf-8"?>
+<TemplafySlideFormConfiguration><![CDATA[{"formFields":[{"required":true,"shareValue":false,"type":"datePicker","name":"Date","label":"Datum"},{"required":false,"placeholder":"","lines":1,"shareValue":false,"type":"textBox","name":"Footer","label":"Fusszeile"},{"defaultValue":{"fixedValue":true},"shareValue":false,"type":"checkBox","name":"FooterLogo","label":"mit Logo in der Fusszeile"}],"formDataEntries":[]}]]></TemplafySlideFormConfiguration>
+</file>
+
+<file path=customXml/item36.xml><?xml version="1.0" encoding="utf-8"?>
+<TemplafySlideFormConfiguration><![CDATA[{"formFields":[{"required":true,"shareValue":false,"type":"datePicker","name":"Date","label":"Datum"},{"required":false,"placeholder":"","lines":1,"shareValue":false,"type":"textBox","name":"Footer","label":"Fusszeile"},{"defaultValue":{"fixedValue":true},"shareValue":false,"type":"checkBox","name":"FooterLogo","label":"mit Logo in der Fusszeile"}],"formDataEntries":[]}]]></TemplafySlideFormConfiguration>
+</file>
+
+<file path=customXml/item37.xml><?xml version="1.0" encoding="utf-8"?>
+<TemplafySlideTemplateConfiguration><![CDATA[{"slideVersion":1,"isValidatorEnabled":false,"isLocked":false,"elementsMetadata":[{"type":"shape","elementConfiguration":{"binding":"{{FormatDateTime(Form.Date,Translate(\"DateFormat\"),DocumentLanguage)}}","type":"text","disableUpdates":false}},{"type":"shape","elementConfiguration":{"binding":"{{Form.Footer}}","type":"text","disableUpdates":false}},{"type":"shape","elementConfiguration":{"width":"{{UserProfile.Department.REFDepartmentLogo.WidthPNGPPTFooter}}","height":"{{UserProfile.Department.REFDepartmentLogo.HeightPNGPPTFooter}}","image":"{{UserProfile.Department.REFDepartmentLogo.ImagePNG}}","visibility":"{{IfElse(Form.FooterLogo, VisibilityType.Visible,VisibilityType.Hidden)}}","type":"image","disableUpdates":false}},{"type":"shape","elementConfiguration":{"binding":"{{UserProfile.Department.DepartmentName}}","visibility":"{{IfElse(Form.FooterLogo, VisibilityType.Hidden,VisibilityType.Visible)}}","type":"text","disableUpdates":false}}],"slideId":"637750113834107890","enableDocumentContentUpdater":true,"version":"2.0"}]]></TemplafySlideTemplateConfiguration>
+</file>
+
+<file path=customXml/item38.xml><?xml version="1.0" encoding="utf-8"?>
+<TemplafySlideTemplateConfiguration><![CDATA[{"slideVersion":1,"isValidatorEnabled":false,"isLocked":false,"elementsMetadata":[{"type":"shape","elementConfiguration":{"binding":"{{FormatDateTime(Form.Date,Translate(\"DateFormat\"),DocumentLanguage)}}","type":"text","disableUpdates":false}},{"type":"shape","elementConfiguration":{"width":"{{UserProfile.Department.REFDepartmentLogo.WidthPNGPPTFooter}}","height":"{{UserProfile.Department.REFDepartmentLogo.HeightPNGPPTFooter}}","image":"{{UserProfile.Department.REFDepartmentLogo.ImagePNG}}","visibility":"{{IfElse(Form.FooterLogo, VisibilityType.Visible,VisibilityType.Hidden)}}","type":"image","disableUpdates":false}},{"type":"shape","elementConfiguration":{"binding":"{{Form.Footer}}","type":"text","disableUpdates":false}},{"type":"shape","elementConfiguration":{"binding":"{{UserProfile.Department.DepartmentName}}","visibility":"{{IfElse(Form.FooterLogo, VisibilityType.Hidden,VisibilityType.Visible)}}","type":"text","disableUpdates":false}}],"slideId":"637750113834231105","enableDocumentContentUpdater":true,"version":"2.0"}]]></TemplafySlideTemplateConfiguration>
+</file>
+
+<file path=customXml/item39.xml><?xml version="1.0" encoding="utf-8"?>
+<TemplafySlideFormConfiguration><![CDATA[{"formFields":[{"required":true,"shareValue":false,"type":"datePicker","name":"Date","label":"Datum"},{"required":false,"placeholder":"","lines":1,"shareValue":false,"type":"textBox","name":"Footer","label":"Fusszeile"},{"defaultValue":{"fixedValue":true},"shareValue":false,"type":"checkBox","name":"FooterLogo","label":"mit Logo in der Fusszeile"}],"formDataEntries":[]}]]></TemplafySlideFormConfiguration>
+</file>
+
+<file path=customXml/item4.xml><?xml version="1.0" encoding="utf-8"?>
+<TemplafySlideTemplateConfiguration><![CDATA[{"slideVersion":1,"isValidatorEnabled":false,"isLocked":false,"elementsMetadata":[{"type":"shape","elementConfiguration":{"width":"{{UserProfile.Department.REFDepartmentLogo.WidthPNGPPT}}","height":"{{UserProfile.Department.REFDepartmentLogo.HeightPNGPPT}}","image":"{{UserProfile.Department.REFDepartmentLogo.ImagePNG}}","type":"image","disableUpdates":false}}],"slideId":"637750113834107008","enableDocumentContentUpdater":true,"version":"2.0"}]]></TemplafySlideTemplateConfiguration>
+</file>
+
+<file path=customXml/item40.xml><?xml version="1.0" encoding="utf-8"?>
 <TemplafySlideTemplateConfiguration><![CDATA[{"slideVersion":1,"isValidatorEnabled":false,"isLocked":false,"elementsMetadata":[{"type":"shape","elementConfiguration":{"binding":"{{FormatDateTime(Form.Date,Translate(\"DateFormat\"),DocumentLanguage)}}","type":"text","disableUpdates":false}},{"type":"shape","elementConfiguration":{"width":"{{UserProfile.Department.REFDepartmentLogo.WidthPNGPPTFooter}}","height":"{{UserProfile.Department.REFDepartmentLogo.HeightPNGPPTFooter}}","image":"{{UserProfile.Department.REFDepartmentLogo.ImagePNG}}","visibility":"{{IfElse(Form.FooterLogo, VisibilityType.Visible,VisibilityType.Hidden)}}","type":"image","disableUpdates":false}},{"type":"shape","elementConfiguration":{"binding":"{{Form.Footer}}","type":"text","disableUpdates":false}},{"type":"shape","elementConfiguration":{"binding":"{{UserProfile.Department.DepartmentName}}","visibility":"{{IfElse(Form.FooterLogo, VisibilityType.Hidden,VisibilityType.Visible)}}","type":"text","disableUpdates":false}}],"slideId":"637750113834249425","enableDocumentContentUpdater":true,"version":"2.0"}]]></TemplafySlideTemplateConfiguration>
 </file>
 
-<file path=customXml/item14.xml><?xml version="1.0" encoding="utf-8"?>
-<TemplafySlideTemplateConfiguration><![CDATA[{"slideVersion":1,"isValidatorEnabled":false,"isLocked":false,"elementsMetadata":[{"type":"shape","elementConfiguration":{"binding":"{{FormatDateTime(Form.Date,Translate(\"DateFormat\"),DocumentLanguage)}}","type":"text","disableUpdates":false}},{"type":"shape","elementConfiguration":{"width":"{{UserProfile.Department.REFDepartmentLogo.WidthPNGPPTFooter}}","height":"{{UserProfile.Department.REFDepartmentLogo.HeightPNGPPTFooter}}","image":"{{UserProfile.Department.REFDepartmentLogo.ImagePNG}}","visibility":"{{IfElse(Form.FooterLogo, VisibilityType.Visible,VisibilityType.Hidden)}}","type":"image","disableUpdates":false}},{"type":"shape","elementConfiguration":{"binding":"{{Form.Footer}}","type":"text","disableUpdates":false}},{"type":"shape","elementConfiguration":{"binding":"{{UserProfile.Department.DepartmentName}}","visibility":"{{IfElse(Form.FooterLogo, VisibilityType.Hidden,VisibilityType.Visible)}}","type":"text","disableUpdates":false}}],"slideId":"637750113834195832","enableDocumentContentUpdater":true,"version":"2.0"}]]></TemplafySlideTemplateConfiguration>
-</file>
-
-<file path=customXml/item15.xml><?xml version="1.0" encoding="utf-8"?>
+<file path=customXml/item41.xml><?xml version="1.0" encoding="utf-8"?>
+<TemplafySlideTemplateConfiguration><![CDATA[{"slideVersion":1,"isValidatorEnabled":false,"isLocked":false,"elementsMetadata":[{"type":"shape","elementConfiguration":{"binding":"{{FormatDateTime(Form.Date,Translate(\"DateFormat\"),DocumentLanguage)}}","type":"text","disableUpdates":false}},{"type":"shape","elementConfiguration":{"width":"{{UserProfile.Department.REFDepartmentLogo.WidthPNGPPTFooter}}","height":"{{UserProfile.Department.REFDepartmentLogo.HeightPNGPPTFooter}}","image":"{{UserProfile.Department.REFDepartmentLogo.ImagePNG}}","visibility":"{{IfElse(Form.FooterLogo, VisibilityType.Visible,VisibilityType.Hidden)}}","type":"image","disableUpdates":false}},{"type":"shape","elementConfiguration":{"binding":"{{Form.Footer}}","type":"text","disableUpdates":false}},{"type":"shape","elementConfiguration":{"binding":"{{UserProfile.Department.DepartmentName}}","visibility":"{{IfElse(Form.FooterLogo, VisibilityType.Hidden,VisibilityType.Visible)}}","type":"text","disableUpdates":false}}],"slideId":"637750113834257356","enableDocumentContentUpdater":true,"version":"2.0"}]]></TemplafySlideTemplateConfiguration>
+</file>
+
+<file path=customXml/item42.xml><?xml version="1.0" encoding="utf-8"?>
+<TemplafySlideTemplateConfiguration><![CDATA[{"slideVersion":1,"isValidatorEnabled":false,"isLocked":false,"elementsMetadata":[],"slideId":"637750113834130535","enableDocumentContentUpdater":true,"version":"2.0"}]]></TemplafySlideTemplateConfiguration>
+</file>
+
+<file path=customXml/item43.xml><?xml version="1.0" encoding="utf-8"?>
 <TemplafySlideFormConfiguration><![CDATA[{"formFields":[],"formDataEntries":[]}]]></TemplafySlideFormConfiguration>
 </file>
 
-<file path=customXml/item16.xml><?xml version="1.0" encoding="utf-8"?>
-<TemplafySlideTemplateConfiguration><![CDATA[{"slideVersion":1,"isValidatorEnabled":false,"isLocked":false,"elementsMetadata":[{"type":"shape","elementConfiguration":{"binding":"{{FormatDateTime(Form.Date,Translate(\"DateFormat\"),DocumentLanguage)}}","type":"text","disableUpdates":false}},{"type":"shape","elementConfiguration":{"width":"{{UserProfile.Department.REFDepartmentLogo.WidthPNGPPTFooter}}","height":"{{UserProfile.Department.REFDepartmentLogo.HeightPNGPPTFooter}}","image":"{{UserProfile.Department.REFDepartmentLogo.ImagePNG}}","visibility":"{{IfElse(Form.FooterLogo, VisibilityType.Visible,VisibilityType.Hidden)}}","type":"image","disableUpdates":false}},{"type":"shape","elementConfiguration":{"binding":"{{Form.Footer}}","type":"text","disableUpdates":false}},{"type":"shape","elementConfiguration":{"binding":"{{UserProfile.Department.DepartmentName}}","visibility":"{{IfElse(Form.FooterLogo, VisibilityType.Hidden,VisibilityType.Visible)}}","type":"text","disableUpdates":false}}],"slideId":"637750113834156510","enableDocumentContentUpdater":true,"version":"2.0"}]]></TemplafySlideTemplateConfiguration>
-</file>
-
-<file path=customXml/item17.xml><?xml version="1.0" encoding="utf-8"?>
-<TemplafySlideTemplateConfiguration><![CDATA[{"slideVersion":1,"isValidatorEnabled":false,"isLocked":false,"elementsMetadata":[],"slideId":"637750113834122525","enableDocumentContentUpdater":true,"version":"2.0"}]]></TemplafySlideTemplateConfiguration>
-</file>
-
-<file path=customXml/item18.xml><?xml version="1.0" encoding="utf-8"?>
-<TemplafySlideTemplateConfiguration><![CDATA[{"slideVersion":1,"isValidatorEnabled":false,"isLocked":false,"elementsMetadata":[{"type":"shape","elementConfiguration":{"binding":"{{FormatDateTime(Form.Date,Translate(\"DateFormat\"),DocumentLanguage)}}","type":"text","disableUpdates":false}},{"type":"shape","elementConfiguration":{"width":"{{UserProfile.Department.REFDepartmentLogo.WidthPNGPPTFooter}}","height":"{{UserProfile.Department.REFDepartmentLogo.HeightPNGPPTFooter}}","image":"{{UserProfile.Department.REFDepartmentLogo.ImagePNG}}","visibility":"{{IfElse(Form.FooterLogo, VisibilityType.Visible,VisibilityType.Hidden)}}","type":"image","disableUpdates":false}},{"type":"shape","elementConfiguration":{"binding":"{{Form.Footer}}","type":"text","disableUpdates":false}},{"type":"shape","elementConfiguration":{"binding":"{{UserProfile.Department.DepartmentName}}","visibility":"{{IfElse(Form.FooterLogo, VisibilityType.Hidden,VisibilityType.Visible)}}","type":"text","disableUpdates":false}}],"slideId":"637750113834257356","enableDocumentContentUpdater":true,"version":"2.0"}]]></TemplafySlideTemplateConfiguration>
-</file>
-
-<file path=customXml/item19.xml><?xml version="1.0" encoding="utf-8"?>
+<file path=customXml/item44.xml><?xml version="1.0" encoding="utf-8"?>
+<TemplafySlideFormConfiguration><![CDATA[{"formFields":[],"formDataEntries":[]}]]></TemplafySlideFormConfiguration>
+</file>
+
+<file path=customXml/item45.xml><?xml version="1.0" encoding="utf-8"?>
 <TemplafySlideFormConfiguration><![CDATA[{"formFields":[{"required":true,"shareValue":false,"type":"datePicker","name":"Date","label":"Datum"},{"required":false,"placeholder":"","lines":1,"shareValue":false,"type":"textBox","name":"Footer","label":"Fusszeile"},{"defaultValue":{"fixedValue":true},"shareValue":false,"type":"checkBox","name":"FooterLogo","label":"mit Logo in der Fusszeile"}],"formDataEntries":[]}]]></TemplafySlideFormConfiguration>
 </file>
 
-<file path=customXml/item2.xml><?xml version="1.0" encoding="utf-8"?>
+<file path=customXml/item46.xml><?xml version="1.0" encoding="utf-8"?>
+<TemplafySlideTemplateConfiguration><![CDATA[{"slideVersion":1,"isValidatorEnabled":false,"isLocked":false,"elementsMetadata":[],"slideId":"637750113834253485","enableDocumentContentUpdater":true,"version":"2.0"}]]></TemplafySlideTemplateConfiguration>
+</file>
+
+<file path=customXml/item47.xml><?xml version="1.0" encoding="utf-8"?>
 <?mso-contentType ?>
 <FormTemplates xmlns="http://schemas.microsoft.com/sharepoint/v3/contenttype/forms">
   <Display>DocumentLibraryForm</Display>
@@ -12997,23 +13596,11 @@
 </FormTemplates>
 </file>
 
-<file path=customXml/item20.xml><?xml version="1.0" encoding="utf-8"?>
+<file path=customXml/item48.xml><?xml version="1.0" encoding="utf-8"?>
 <TemplafySlideFormConfiguration><![CDATA[{"formFields":[{"required":true,"shareValue":false,"type":"datePicker","name":"Date","label":"Datum"},{"required":false,"placeholder":"","lines":1,"shareValue":false,"type":"textBox","name":"Footer","label":"Fusszeile"},{"defaultValue":{"fixedValue":true},"shareValue":false,"type":"checkBox","name":"FooterLogo","label":"mit Logo in der Fusszeile"}],"formDataEntries":[]}]]></TemplafySlideFormConfiguration>
 </file>
 
-<file path=customXml/item21.xml><?xml version="1.0" encoding="utf-8"?>
-<TemplafyTemplateConfiguration><![CDATA[{"elementsMetadata":[{"type":"shape","id":"56ce75b3-422e-4bea-941a-dc00172cd73f","elementConfiguration":{"binding":"{{FormatDateTime(Form.Date,Translate(\"DateFormat\"),DocumentLanguage)}}","type":"text","disableUpdates":false}},{"type":"shape","id":"ff4a6372-22c5-4dd4-8428-3be358c8e860","elementConfiguration":{"width":"{{UserProfile.Department.REFDepartmentLogo.WidthPNGPPTFooter}}","height":"{{UserProfile.Department.REFDepartmentLogo.HeightPNGPPTFooter}}","image":"{{UserProfile.Department.REFDepartmentLogo.ImagePNG}}","visibility":"{{IfElse(Form.FooterLogo, VisibilityType.Visible,VisibilityType.Hidden)}}","type":"image","disableUpdates":false}},{"type":"shape","id":"802336ec-566b-4a3d-896e-7cccb9fe246d","elementConfiguration":{"binding":"{{Form.Footer}}","type":"text","disableUpdates":false}},{"type":"shape","id":"a2d41398-5271-4cc9-b1dd-66e099bdef04","elementConfiguration":{"binding":"{{UserProfile.Department.DepartmentName}}","visibility":"{{IfElse(Form.FooterLogo, VisibilityType.Hidden,VisibilityType.Visible)}}","type":"text","disableUpdates":false}},{"type":"shape","id":"a40dda36-18a9-40da-9166-9a47a867251f","elementConfiguration":{"width":"{{UserProfile.Department.REFDepartmentLogo.WidthPNGPPT}}","height":"{{UserProfile.Department.REFDepartmentLogo.HeightPNGPPT}}","image":"{{UserProfile.Department.REFDepartmentLogo.ImagePNG}}","type":"image","disableUpdates":false}},{"type":"shape","id":"239d4f55-1bac-4607-8b11-947c6c77cd46","elementConfiguration":{"binding":"{{UserProfile.Department.DepartmentName}} \n{{UserProfile.Department.DepartmentStreet}} {{UserProfile.Department.DepartmentStreetNumber}} \n{{UserProfile.Department.DepartmentPOBox}} {{UserProfile.Department.DepartmentCity}} \n{{UserProfile.Department.DepartmentCountry}} \n{{UserProfile.Department.DepartmentWebsite}}","type":"text","disableUpdates":false}},{"type":"shape","id":"4e7e3c8a-6e06-4468-a348-0ba7b10c4800","elementConfiguration":{"width":"{{UserProfile.Department.REFDepartmentLogo.WidthPNGPPT}}","height":"{{UserProfile.Department.REFDepartmentLogo.HeightPNGPPT}}","image":"{{UserProfile.Department.REFDepartmentLogo.ImagePNG}}","type":"image","disableUpdates":false}},{"type":"shape","id":"843f5766-31d9-4280-a669-00226bb12ba8","elementConfiguration":{"binding":"{{FormatDateTime(Form.Date,Translate(\"DateFormat\"),DocumentLanguage)}}","type":"text","disableUpdates":false}},{"type":"shape","id":"9b9e4f3c-de31-4236-8ed4-5b99f4d3cf2e","elementConfiguration":{"width":"{{UserProfile.Department.REFDepartmentLogo.WidthPNGPPTFooter}}","height":"{{UserProfile.Department.REFDepartmentLogo.HeightPNGPPTFooter}}","image":"{{UserProfile.Department.REFDepartmentLogo.ImagePNG}}","visibility":"{{IfElse(Form.FooterLogo, VisibilityType.Visible,VisibilityType.Hidden)}}","type":"image","disableUpdates":false}},{"type":"shape","id":"75162e3e-ae53-4b5e-99da-7a45748d34cc","elementConfiguration":{"binding":"{{Form.Footer}}","type":"text","disableUpdates":false}},{"type":"shape","id":"4b457ff6-1749-4ff7-9ec1-d06b95bd97c4","elementConfiguration":{"binding":"{{UserProfile.Department.DepartmentName}}","visibility":"{{IfElse(Form.FooterLogo, VisibilityType.Hidden,VisibilityType.Visible)}}","type":"text","disableUpdates":false}},{"type":"shape","id":"595e50e6-f562-4e70-8412-9b3e58d54d40","elementConfiguration":{"width":"{{UserProfile.Department.REFDepartmentLogo.WidthPNGPPT}}","height":"{{UserProfile.Department.REFDepartmentLogo.HeightPNGPPT}}","image":"{{UserProfile.Department.REFDepartmentLogo.ImagePNG}}","type":"image","disableUpdates":false}},{"type":"shape","id":"987706d0-0020-48f8-abb7-fa71e92ba907","elementConfiguration":{"binding":"{{FormatDateTime(Form.Date,Translate(\"DateFormat\"),DocumentLanguage)}}","type":"text","disableUpdates":false}},{"type":"shape","id":"18680601-61d8-4c65-b887-d43faff0f7e7","elementConfiguration":{"width":"{{UserProfile.Department.REFDepartmentLogo.WidthPNGPPT}}","height":"{{UserProfile.Department.REFDepartmentLogo.HeightPNGPPT}}","image":"{{UserProfile.Department.REFDepartmentLogo.ImagePNG}}","type":"image","disableUpdates":false}},{"type":"shape","id":"889eed5e-adc6-4545-a320-e60e7fe89049","elementConfiguration":{"binding":"{{FormatDateTime(Form.Date,Translate(\"DateFormat\"),DocumentLanguage)}}","type":"text","disableUpdates":false}},{"type":"shape","id":"3f852e2a-90cd-405b-aa63-881f2da03bb5","elementConfiguration":{"width":"{{UserProfile.Department.REFDepartmentLogo.WidthPNGPPTFooter}}","height":"{{UserProfile.Department.REFDepartmentLogo.HeightPNGPPTFooter}}","image":"{{UserProfile.Department.REFDepartmentLogo.ImagePNG}}","visibility":"{{IfElse(Form.FooterLogo, VisibilityType.Visible,VisibilityType.Hidden)}}","type":"image","disableUpdates":false}},{"type":"shape","id":"a606881e-514e-4f57-b14a-3e310a69b4b5","elementConfiguration":{"binding":"{{Form.Footer}}","type":"text","disableUpdates":false}},{"type":"shape","id":"d89fcdf5-4b31-4eed-a6ec-a34b7588e3dc","elementConfiguration":{"binding":"{{UserProfile.Department.DepartmentName}}","visibility":"{{IfElse(Form.FooterLogo, VisibilityType.Hidden,VisibilityType.Visible)}}","type":"text","disableUpdates":false}},{"type":"shape","id":"e4895852-1c5c-4754-a233-3eec028fd2a8","elementConfiguration":{"binding":"{{FormatDateTime(Form.Date,Translate(\"DateFormat\"),DocumentLanguage)}}","type":"text","disableUpdates":false}},{"type":"shape","id":"d621d8b6-cd2e-463b-982e-d95c5f8a82fb","elementConfiguration":{"width":"{{UserProfile.Department.REFDepartmentLogo.WidthPNGPPTFooter}}","height":"{{UserProfile.Department.REFDepartmentLogo.HeightPNGPPTFooter}}","image":"{{UserProfile.Department.REFDepartmentLogo.ImagePNG}}","visibility":"{{IfElse(Form.FooterLogo, VisibilityType.Visible,VisibilityType.Hidden)}}","type":"image","disableUpdates":false}},{"type":"shape","id":"65b937f8-b6ed-482d-9fcb-89e2ad98182a","elementConfiguration":{"binding":"{{Form.Footer}}","type":"text","disableUpdates":false}},{"type":"shape","id":"8e41931c-7f95-42d4-bfa3-9c5f04293069","elementConfiguration":{"binding":"{{UserProfile.Department.DepartmentName}}","visibility":"{{IfElse(Form.FooterLogo, VisibilityType.Hidden,VisibilityType.Visible)}}","type":"text","disableUpdates":false}},{"type":"shape","id":"313b8357-6b18-490c-9533-a6c0ee071962","elementConfiguration":{"binding":"{{FormatDateTime(Form.Date,Translate(\"DateFormat\"),DocumentLanguage)}}","type":"text","disableUpdates":false}},{"type":"shape","id":"69582c92-e5c7-4749-97ef-47cc4b58fa8b","elementConfiguration":{"binding":"{{FormatDateTime(Form.Date,Translate(\"DateFormat\"),DocumentLanguage)}}","type":"text","disableUpdates":false}},{"type":"shape","id":"4ee707e9-0b9f-42e6-bfac-8cfa418e9d62","elementConfiguration":{"binding":"{{Form.Footer}}","type":"text","disableUpdates":false}},{"type":"shape","id":"b710521b-d63f-429f-a075-a52a6cb7c897","elementConfiguration":{"width":"{{UserProfile.Department.REFDepartmentLogo.WidthPNGPPTFooter}}","height":"{{UserProfile.Department.REFDepartmentLogo.HeightPNGPPTFooter}}","image":"{{UserProfile.Department.REFDepartmentLogo.ImagePNG}}","visibility":"{{IfElse(Form.FooterLogo, VisibilityType.Visible,VisibilityType.Hidden)}}","type":"image","disableUpdates":false}},{"type":"shape","id":"4c8a9ee4-f540-4aa0-9380-f692b4e2dcc6","elementConfiguration":{"binding":"{{UserProfile.Department.DepartmentName}}","visibility":"{{IfElse(Form.FooterLogo, VisibilityType.Hidden,VisibilityType.Visible)}}","type":"text","disableUpdates":false}},{"type":"shape","id":"9c2bec1f-485e-44d6-987c-4c2a62826230","elementConfiguration":{"binding":"{{FormatDateTime(Form.Date,Translate(\"DateFormat\"),DocumentLanguage)}}","type":"text","disableUpdates":false}},{"type":"shape","id":"965f1849-534b-4cf0-ad65-b946ad9126d8","elementConfiguration":{"width":"{{UserProfile.Department.REFDepartmentLogo.WidthPNGPPTFooter}}","height":"{{UserProfile.Department.REFDepartmentLogo.HeightPNGPPTFooter}}","image":"{{UserProfile.Department.REFDepartmentLogo.ImagePNG}}","visibility":"{{IfElse(Form.FooterLogo, VisibilityType.Visible,VisibilityType.Hidden)}}","type":"image","disableUpdates":false}},{"type":"shape","id":"73b120c8-aa6c-4644-86bc-360261a349b9","elementConfiguration":{"binding":"{{Form.Footer}}","type":"text","disableUpdates":false}},{"type":"shape","id":"297fab75-6aaa-4b1a-95bb-193250870530","elementConfiguration":{"binding":"{{UserProfile.Department.DepartmentName}}","visibility":"{{IfElse(Form.FooterLogo, VisibilityType.Hidden,VisibilityType.Visible)}}","type":"text","disableUpdates":false}}],"transformationConfigurations":[{"language":"{{UserProfile.DocumentLanguage.Language}}","disableUpdates":false,"type":"proofingLanguage"},{"propertyName":"creator","propertyValue":"{{UserProfile.FirstName}} {{UserProfile.LastName}}","disableUpdates":false,"type":"documentProperty"},{"propertyName":"title","propertyValue":"Presentation - University of St.Gallen","disableUpdates":false,"type":"documentProperty"}],"templateName":"UNISG Präsentation","templateDescription":"","enableDocumentContentUpdater":true,"version":"2.0"}]]></TemplafyTemplateConfiguration>
-</file>
-
-<file path=customXml/item22.xml><?xml version="1.0" encoding="utf-8"?>
-<TemplafySlideFormConfiguration><![CDATA[{"formFields":[],"formDataEntries":[]}]]></TemplafySlideFormConfiguration>
-</file>
-
-<file path=customXml/item23.xml><?xml version="1.0" encoding="utf-8"?>
-<TemplafySlideTemplateConfiguration><![CDATA[{"slideVersion":1,"isValidatorEnabled":false,"isLocked":false,"elementsMetadata":[],"slideId":"637750113834125595","enableDocumentContentUpdater":true,"version":"2.0"}]]></TemplafySlideTemplateConfiguration>
-</file>
-
-<file path=customXml/item24.xml><?xml version="1.0" encoding="utf-8"?>
+<file path=customXml/item49.xml><?xml version="1.0" encoding="utf-8"?>
 <ct:contentTypeSchema xmlns:ct="http://schemas.microsoft.com/office/2006/metadata/contentType" xmlns:ma="http://schemas.microsoft.com/office/2006/metadata/properties/metaAttributes" ct:_="" ma:_="" ma:contentTypeName="Document" ma:contentTypeID="0x01010034C2EED3AEDAB24AB48AF05A7A255DF4" ma:contentTypeVersion="21" ma:contentTypeDescription="Create a new document." ma:contentTypeScope="" ma:versionID="274d9017fadbcc8b67afbe4b22a55600">
   <xsd:schema xmlns:xsd="http://www.w3.org/2001/XMLSchema" xmlns:xs="http://www.w3.org/2001/XMLSchema" xmlns:p="http://schemas.microsoft.com/office/2006/metadata/properties" xmlns:ns2="07c8a24f-8b40-44ca-950f-ae5db2c4fa23" xmlns:ns3="71d337dc-809a-4269-a690-d6cd31b4acd0" targetNamespace="http://schemas.microsoft.com/office/2006/metadata/properties" ma:root="true" ma:fieldsID="0b58614a3de855f8a451fa93eb2e43b4" ns2:_="" ns3:_="">
     <xsd:import namespace="07c8a24f-8b40-44ca-950f-ae5db2c4fa23"/>
@@ -13262,123 +13849,8 @@
 </ct:contentTypeSchema>
 </file>
 
-<file path=customXml/item25.xml><?xml version="1.0" encoding="utf-8"?>
-<TemplafySlideTemplateConfiguration><![CDATA[{"slideVersion":1,"isValidatorEnabled":false,"isLocked":false,"elementsMetadata":[{"type":"shape","elementConfiguration":{"binding":"{{FormatDateTime(Form.Date,Translate(\"DateFormat\"),DocumentLanguage)}}","type":"text","disableUpdates":false}},{"type":"shape","elementConfiguration":{"width":"{{UserProfile.Department.REFDepartmentLogo.WidthPNGPPTFooter}}","height":"{{UserProfile.Department.REFDepartmentLogo.HeightPNGPPTFooter}}","image":"{{UserProfile.Department.REFDepartmentLogo.ImagePNG}}","visibility":"{{IfElse(Form.FooterLogo, VisibilityType.Visible,VisibilityType.Hidden)}}","type":"image","disableUpdates":false}},{"type":"shape","elementConfiguration":{"binding":"{{Form.Footer}}","type":"text","disableUpdates":false}},{"type":"shape","elementConfiguration":{"binding":"{{UserProfile.Department.DepartmentName}}","visibility":"{{IfElse(Form.FooterLogo, VisibilityType.Hidden,VisibilityType.Visible)}}","type":"text","disableUpdates":false}}],"slideId":"637750113834237210","enableDocumentContentUpdater":true,"version":"2.0"}]]></TemplafySlideTemplateConfiguration>
-</file>
-
-<file path=customXml/item26.xml><?xml version="1.0" encoding="utf-8"?>
-<TemplafySlideTemplateConfiguration><![CDATA[{"slideVersion":1,"isValidatorEnabled":false,"isLocked":false,"elementsMetadata":[{"type":"shape","elementConfiguration":{"binding":"{{FormatDateTime(Form.Date,Translate(\"DateFormat\"),DocumentLanguage)}}","type":"text","disableUpdates":false}},{"type":"shape","elementConfiguration":{"width":"{{UserProfile.Department.REFDepartmentLogo.WidthPNGPPTFooter}}","height":"{{UserProfile.Department.REFDepartmentLogo.HeightPNGPPTFooter}}","image":"{{UserProfile.Department.REFDepartmentLogo.ImagePNG}}","visibility":"{{IfElse(Form.FooterLogo, VisibilityType.Visible,VisibilityType.Hidden)}}","type":"image","disableUpdates":false}},{"type":"shape","elementConfiguration":{"binding":"{{Form.Footer}}","type":"text","disableUpdates":false}},{"type":"shape","elementConfiguration":{"binding":"{{UserProfile.Department.DepartmentName}}","visibility":"{{IfElse(Form.FooterLogo, VisibilityType.Hidden,VisibilityType.Visible)}}","type":"text","disableUpdates":false}}],"slideId":"637750113834261908","enableDocumentContentUpdater":true,"version":"2.0"}]]></TemplafySlideTemplateConfiguration>
-</file>
-
-<file path=customXml/item27.xml><?xml version="1.0" encoding="utf-8"?>
-<TemplafySlideTemplateConfiguration><![CDATA[{"slideVersion":1,"isValidatorEnabled":false,"isLocked":false,"elementsMetadata":[],"slideId":"637750113834254135","enableDocumentContentUpdater":true,"version":"2.0"}]]></TemplafySlideTemplateConfiguration>
-</file>
-
-<file path=customXml/item28.xml><?xml version="1.0" encoding="utf-8"?>
-<TemplafySlideTemplateConfiguration><![CDATA[{"slideVersion":1,"isValidatorEnabled":false,"isLocked":false,"elementsMetadata":[{"type":"shape","elementConfiguration":{"width":"{{UserProfile.Department.REFDepartmentLogo.WidthPNGPPT}}","height":"{{UserProfile.Department.REFDepartmentLogo.HeightPNGPPT}}","image":"{{UserProfile.Department.REFDepartmentLogo.ImagePNG}}","type":"image","disableUpdates":false}}],"slideId":"637750113834106457","enableDocumentContentUpdater":true,"version":"2.0"}]]></TemplafySlideTemplateConfiguration>
-</file>
-
-<file path=customXml/item29.xml><?xml version="1.0" encoding="utf-8"?>
-<TemplafySlideFormConfiguration><![CDATA[{"formFields":[{"required":true,"shareValue":false,"type":"datePicker","name":"Date","label":"Datum"},{"required":false,"placeholder":"","lines":1,"shareValue":false,"type":"textBox","name":"Footer","label":"Fusszeile"},{"defaultValue":{"fixedValue":true},"shareValue":false,"type":"checkBox","name":"FooterLogo","label":"mit Logo in der Fusszeile"}],"formDataEntries":[]}]]></TemplafySlideFormConfiguration>
-</file>
-
-<file path=customXml/item3.xml><?xml version="1.0" encoding="utf-8"?>
-<TemplafySlideTemplateConfiguration><![CDATA[{"slideVersion":1,"isValidatorEnabled":false,"isLocked":false,"elementsMetadata":[{"type":"shape","elementConfiguration":{"binding":"{{FormatDateTime(Form.Date,Translate(\"DateFormat\"),DocumentLanguage)}}","type":"text","disableUpdates":false}},{"type":"shape","elementConfiguration":{"width":"{{UserProfile.Department.REFDepartmentLogo.WidthPNGPPTFooter}}","height":"{{UserProfile.Department.REFDepartmentLogo.HeightPNGPPTFooter}}","image":"{{UserProfile.Department.REFDepartmentLogo.ImagePNG}}","visibility":"{{IfElse(Form.FooterLogo, VisibilityType.Visible,VisibilityType.Hidden)}}","type":"image","disableUpdates":false}},{"type":"shape","elementConfiguration":{"binding":"{{Form.Footer}}","type":"text","disableUpdates":false}},{"type":"shape","elementConfiguration":{"binding":"{{UserProfile.Department.DepartmentName}}","visibility":"{{IfElse(Form.FooterLogo, VisibilityType.Hidden,VisibilityType.Visible)}}","type":"text","disableUpdates":false}}],"slideId":"637750113834135648","enableDocumentContentUpdater":true,"version":"2.0"}]]></TemplafySlideTemplateConfiguration>
-</file>
-
-<file path=customXml/item30.xml><?xml version="1.0" encoding="utf-8"?>
-<p:properties xmlns:p="http://schemas.microsoft.com/office/2006/metadata/properties" xmlns:xsi="http://www.w3.org/2001/XMLSchema-instance" xmlns:pc="http://schemas.microsoft.com/office/infopath/2007/PartnerControls">
-  <documentManagement>
-    <lcf76f155ced4ddcb4097134ff3c332f xmlns="07c8a24f-8b40-44ca-950f-ae5db2c4fa23">
-      <Terms xmlns="http://schemas.microsoft.com/office/infopath/2007/PartnerControls"/>
-    </lcf76f155ced4ddcb4097134ff3c332f>
-    <TaxCatchAll xmlns="71d337dc-809a-4269-a690-d6cd31b4acd0" xsi:nil="true"/>
-  </documentManagement>
-</p:properties>
-</file>
-
-<file path=customXml/item31.xml><?xml version="1.0" encoding="utf-8"?>
-<TemplafySlideFormConfiguration><![CDATA[{"formFields":[{"required":true,"shareValue":false,"type":"datePicker","name":"Date","label":"Datum"},{"required":false,"placeholder":"","lines":1,"shareValue":false,"type":"textBox","name":"Footer","label":"Fusszeile"},{"defaultValue":{"fixedValue":true},"shareValue":false,"type":"checkBox","name":"FooterLogo","label":"mit Logo in der Fusszeile"}],"formDataEntries":[]}]]></TemplafySlideFormConfiguration>
-</file>
-
-<file path=customXml/item32.xml><?xml version="1.0" encoding="utf-8"?>
+<file path=customXml/item5.xml><?xml version="1.0" encoding="utf-8"?>
 <TemplafySlideFormConfiguration><![CDATA[{"formFields":[],"formDataEntries":[]}]]></TemplafySlideFormConfiguration>
-</file>
-
-<file path=customXml/item33.xml><?xml version="1.0" encoding="utf-8"?>
-<TemplafySlideFormConfiguration><![CDATA[{"formFields":[],"formDataEntries":[]}]]></TemplafySlideFormConfiguration>
-</file>
-
-<file path=customXml/item34.xml><?xml version="1.0" encoding="utf-8"?>
-<TemplafySlideFormConfiguration><![CDATA[{"formFields":[],"formDataEntries":[]}]]></TemplafySlideFormConfiguration>
-</file>
-
-<file path=customXml/item35.xml><?xml version="1.0" encoding="utf-8"?>
-<TemplafySlideTemplateConfiguration><![CDATA[{"slideVersion":1,"isValidatorEnabled":false,"isLocked":false,"elementsMetadata":[],"slideId":"637750113834120761","enableDocumentContentUpdater":true,"version":"2.0"}]]></TemplafySlideTemplateConfiguration>
-</file>
-
-<file path=customXml/item36.xml><?xml version="1.0" encoding="utf-8"?>
-<TemplafySlideFormConfiguration><![CDATA[{"formFields":[{"required":true,"shareValue":false,"type":"datePicker","name":"Date","label":"Datum"},{"required":false,"placeholder":"","lines":1,"shareValue":false,"type":"textBox","name":"Footer","label":"Fusszeile"},{"defaultValue":{"fixedValue":true},"shareValue":false,"type":"checkBox","name":"FooterLogo","label":"mit Logo in der Fusszeile"}],"formDataEntries":[]}]]></TemplafySlideFormConfiguration>
-</file>
-
-<file path=customXml/item37.xml><?xml version="1.0" encoding="utf-8"?>
-<TemplafySlideTemplateConfiguration><![CDATA[{"slideVersion":1,"isValidatorEnabled":false,"isLocked":false,"elementsMetadata":[{"type":"shape","elementConfiguration":{"width":"{{UserProfile.Department.REFDepartmentLogo.WidthPNGPPT}}","height":"{{UserProfile.Department.REFDepartmentLogo.HeightPNGPPT}}","image":"{{UserProfile.Department.REFDepartmentLogo.ImagePNG}}","type":"image","disableUpdates":false}}],"slideId":"637750113834107008","enableDocumentContentUpdater":true,"version":"2.0"}]]></TemplafySlideTemplateConfiguration>
-</file>
-
-<file path=customXml/item38.xml><?xml version="1.0" encoding="utf-8"?>
-<TemplafySlideFormConfiguration><![CDATA[{"formFields":[{"required":true,"shareValue":false,"type":"datePicker","name":"Date","label":"Datum"},{"required":false,"placeholder":"","lines":1,"shareValue":false,"type":"textBox","name":"Footer","label":"Fusszeile"},{"defaultValue":{"fixedValue":true},"shareValue":false,"type":"checkBox","name":"FooterLogo","label":"mit Logo in der Fusszeile"}],"formDataEntries":[]}]]></TemplafySlideFormConfiguration>
-</file>
-
-<file path=customXml/item39.xml><?xml version="1.0" encoding="utf-8"?>
-<TemplafySlideTemplateConfiguration><![CDATA[{"slideVersion":1,"isValidatorEnabled":false,"isLocked":false,"elementsMetadata":[],"slideId":"637750113834130535","enableDocumentContentUpdater":true,"version":"2.0"}]]></TemplafySlideTemplateConfiguration>
-</file>
-
-<file path=customXml/item4.xml><?xml version="1.0" encoding="utf-8"?>
-<TemplafySlideTemplateConfiguration><![CDATA[{"slideVersion":1,"isValidatorEnabled":false,"isLocked":false,"elementsMetadata":[{"type":"shape","elementConfiguration":{"binding":"{{FormatDateTime(Form.Date,Translate(\"DateFormat\"),DocumentLanguage)}}","type":"text","disableUpdates":false}},{"type":"shape","elementConfiguration":{"width":"{{UserProfile.Department.REFDepartmentLogo.WidthPNGPPTFooter}}","height":"{{UserProfile.Department.REFDepartmentLogo.HeightPNGPPTFooter}}","image":"{{UserProfile.Department.REFDepartmentLogo.ImagePNG}}","visibility":"{{IfElse(Form.FooterLogo, VisibilityType.Visible,VisibilityType.Hidden)}}","type":"image","disableUpdates":false}},{"type":"shape","elementConfiguration":{"binding":"{{Form.Footer}}","type":"text","disableUpdates":false}},{"type":"shape","elementConfiguration":{"binding":"{{UserProfile.Department.DepartmentName}}","visibility":"{{IfElse(Form.FooterLogo, VisibilityType.Hidden,VisibilityType.Visible)}}","type":"text","disableUpdates":false}}],"slideId":"637750113834231105","enableDocumentContentUpdater":true,"version":"2.0"}]]></TemplafySlideTemplateConfiguration>
-</file>
-
-<file path=customXml/item40.xml><?xml version="1.0" encoding="utf-8"?>
-<TemplafySlideFormConfiguration><![CDATA[{"formFields":[],"formDataEntries":[]}]]></TemplafySlideFormConfiguration>
-</file>
-
-<file path=customXml/item41.xml><?xml version="1.0" encoding="utf-8"?>
-<TemplafySlideFormConfiguration><![CDATA[{"formFields":[],"formDataEntries":[]}]]></TemplafySlideFormConfiguration>
-</file>
-
-<file path=customXml/item42.xml><?xml version="1.0" encoding="utf-8"?>
-<TemplafySlideTemplateConfiguration><![CDATA[{"slideVersion":1,"isValidatorEnabled":false,"isLocked":false,"elementsMetadata":[],"slideId":"637750113834267111","enableDocumentContentUpdater":true,"version":"2.0"}]]></TemplafySlideTemplateConfiguration>
-</file>
-
-<file path=customXml/item43.xml><?xml version="1.0" encoding="utf-8"?>
-<TemplafySlideTemplateConfiguration><![CDATA[{"slideVersion":1,"isValidatorEnabled":false,"isLocked":false,"elementsMetadata":[{"type":"shape","elementConfiguration":{"width":"{{UserProfile.Department.REFDepartmentLogo.WidthPNGPPT}}","height":"{{UserProfile.Department.REFDepartmentLogo.HeightPNGPPT}}","image":"{{UserProfile.Department.REFDepartmentLogo.ImagePNG}}","type":"image","disableUpdates":false}}],"slideId":"638097175473157463","enableDocumentContentUpdater":false,"version":"2.0"}]]></TemplafySlideTemplateConfiguration>
-</file>
-
-<file path=customXml/item44.xml><?xml version="1.0" encoding="utf-8"?>
-<TemplafySlideFormConfiguration><![CDATA[{"formFields":[{"required":true,"shareValue":false,"type":"datePicker","name":"Date","label":"Datum"},{"required":false,"placeholder":"","lines":1,"shareValue":false,"type":"textBox","name":"Footer","label":"Fusszeile"},{"defaultValue":{"fixedValue":true},"shareValue":false,"type":"checkBox","name":"FooterLogo","label":"mit Logo in der Fusszeile"}],"formDataEntries":[]}]]></TemplafySlideFormConfiguration>
-</file>
-
-<file path=customXml/item45.xml><?xml version="1.0" encoding="utf-8"?>
-<TemplafySlideFormConfiguration><![CDATA[{"formFields":[{"required":true,"shareValue":false,"type":"datePicker","name":"Date","label":"Datum"},{"required":false,"placeholder":"","lines":1,"shareValue":false,"type":"textBox","name":"Footer","label":"Fusszeile"},{"defaultValue":{"fixedValue":true},"shareValue":false,"type":"checkBox","name":"FooterLogo","label":"mit Logo in der Fusszeile"}],"formDataEntries":[]}]]></TemplafySlideFormConfiguration>
-</file>
-
-<file path=customXml/item46.xml><?xml version="1.0" encoding="utf-8"?>
-<TemplafySlideFormConfiguration><![CDATA[{"formFields":[],"formDataEntries":[]}]]></TemplafySlideFormConfiguration>
-</file>
-
-<file path=customXml/item47.xml><?xml version="1.0" encoding="utf-8"?>
-<TemplafySlideTemplateConfiguration><![CDATA[{"slideVersion":1,"isValidatorEnabled":false,"isLocked":false,"elementsMetadata":[{"type":"shape","elementConfiguration":{"binding":"{{FormatDateTime(Form.Date,Translate(\"DateFormat\"),DocumentLanguage)}}","type":"text","disableUpdates":false}},{"type":"shape","elementConfiguration":{"width":"{{UserProfile.Department.REFDepartmentLogo.WidthPNGPPTFooter}}","height":"{{UserProfile.Department.REFDepartmentLogo.HeightPNGPPTFooter}}","image":"{{UserProfile.Department.REFDepartmentLogo.ImagePNG}}","visibility":"{{IfElse(Form.FooterLogo, VisibilityType.Visible,VisibilityType.Hidden)}}","type":"image","disableUpdates":false}},{"type":"shape","elementConfiguration":{"binding":"{{Form.Footer}}","type":"text","disableUpdates":false}},{"type":"shape","elementConfiguration":{"binding":"{{UserProfile.Department.DepartmentName}}","visibility":"{{IfElse(Form.FooterLogo, VisibilityType.Hidden,VisibilityType.Visible)}}","type":"text","disableUpdates":false}}],"slideId":"637750113834264450","enableDocumentContentUpdater":true,"version":"2.0"}]]></TemplafySlideTemplateConfiguration>
-</file>
-
-<file path=customXml/item48.xml><?xml version="1.0" encoding="utf-8"?>
-<TemplafySlideFormConfiguration><![CDATA[{"formFields":[{"required":true,"shareValue":false,"type":"datePicker","name":"Date","label":"Datum"},{"required":false,"placeholder":"","lines":1,"shareValue":false,"type":"textBox","name":"Footer","label":"Fusszeile"},{"defaultValue":{"fixedValue":true},"shareValue":false,"type":"checkBox","name":"FooterLogo","label":"mit Logo in der Fusszeile"}],"formDataEntries":[]}]]></TemplafySlideFormConfiguration>
-</file>
-
-<file path=customXml/item49.xml><?xml version="1.0" encoding="utf-8"?>
-<TemplafySlideFormConfiguration><![CDATA[{"formFields":[{"required":true,"shareValue":false,"type":"datePicker","name":"Date","label":"Datum"},{"required":false,"placeholder":"","lines":1,"shareValue":false,"type":"textBox","name":"Footer","label":"Fusszeile"},{"defaultValue":{"fixedValue":true},"shareValue":false,"type":"checkBox","name":"FooterLogo","label":"mit Logo in der Fusszeile"}],"formDataEntries":[]}]]></TemplafySlideFormConfiguration>
-</file>
-
-<file path=customXml/item5.xml><?xml version="1.0" encoding="utf-8"?>
-<TemplafySlideTemplateConfiguration><![CDATA[{"slideVersion":1,"isValidatorEnabled":false,"isLocked":false,"elementsMetadata":[{"type":"shape","elementConfiguration":{"binding":"{{FormatDateTime(Form.Date,Translate(\"DateFormat\"),DocumentLanguage)}}","type":"text","disableUpdates":false}},{"type":"shape","elementConfiguration":{"width":"{{UserProfile.Department.REFDepartmentLogo.WidthPNGPPTFooter}}","height":"{{UserProfile.Department.REFDepartmentLogo.HeightPNGPPTFooter}}","image":"{{UserProfile.Department.REFDepartmentLogo.ImagePNG}}","visibility":"{{IfElse(Form.FooterLogo, VisibilityType.Visible,VisibilityType.Hidden)}}","type":"image","disableUpdates":false}},{"type":"shape","elementConfiguration":{"binding":"{{Form.Footer}}","type":"text","disableUpdates":false}},{"type":"shape","elementConfiguration":{"binding":"{{UserProfile.Department.DepartmentName}}","visibility":"{{IfElse(Form.FooterLogo, VisibilityType.Hidden,VisibilityType.Visible)}}","type":"text","disableUpdates":false}}],"slideId":"637750113834269210","enableDocumentContentUpdater":true,"version":"2.0"}]]></TemplafySlideTemplateConfiguration>
 </file>
 
 <file path=customXml/item50.xml><?xml version="1.0" encoding="utf-8"?>
@@ -13386,108 +13858,299 @@
 </file>
 
 <file path=customXml/item51.xml><?xml version="1.0" encoding="utf-8"?>
-<TemplafySlideTemplateConfiguration><![CDATA[{"slideVersion":1,"isValidatorEnabled":false,"isLocked":false,"elementsMetadata":[{"type":"shape","elementConfiguration":{"width":"{{UserProfile.Department.REFDepartmentLogo.WidthPNGPPT}}","height":"{{UserProfile.Department.REFDepartmentLogo.HeightPNGPPT}}","image":"{{UserProfile.Department.REFDepartmentLogo.ImagePNG}}","type":"image","disableUpdates":false}}],"slideId":"637750113834107608","enableDocumentContentUpdater":true,"version":"2.0"}]]></TemplafySlideTemplateConfiguration>
+<TemplafySlideFormConfiguration><![CDATA[{"formFields":[{"required":true,"shareValue":false,"type":"datePicker","name":"Date","label":"Datum"},{"required":false,"placeholder":"","lines":1,"shareValue":false,"type":"textBox","name":"Footer","label":"Fusszeile"},{"defaultValue":{"fixedValue":true},"shareValue":false,"type":"checkBox","name":"FooterLogo","label":"mit Logo in der Fusszeile"}],"formDataEntries":[]}]]></TemplafySlideFormConfiguration>
 </file>
 
 <file path=customXml/item52.xml><?xml version="1.0" encoding="utf-8"?>
-<TemplafySlideTemplateConfiguration><![CDATA[{"slideVersion":1,"isValidatorEnabled":false,"isLocked":false,"elementsMetadata":[{"type":"shape","elementConfiguration":{"binding":"{{FormatDateTime(Form.Date,Translate(\"DateFormat\"),DocumentLanguage)}}","type":"text","disableUpdates":false}},{"type":"shape","elementConfiguration":{"binding":"{{Form.Footer}}","type":"text","disableUpdates":false}},{"type":"shape","elementConfiguration":{"width":"{{UserProfile.Department.REFDepartmentLogo.WidthPNGPPTFooter}}","height":"{{UserProfile.Department.REFDepartmentLogo.HeightPNGPPTFooter}}","image":"{{UserProfile.Department.REFDepartmentLogo.ImagePNG}}","visibility":"{{IfElse(Form.FooterLogo, VisibilityType.Visible,VisibilityType.Hidden)}}","type":"image","disableUpdates":false}},{"type":"shape","elementConfiguration":{"binding":"{{UserProfile.Department.DepartmentName}}","visibility":"{{IfElse(Form.FooterLogo, VisibilityType.Hidden,VisibilityType.Visible)}}","type":"text","disableUpdates":false}}],"slideId":"637750113834107890","enableDocumentContentUpdater":true,"version":"2.0"}]]></TemplafySlideTemplateConfiguration>
+<TemplafySlideTemplateConfiguration><![CDATA[{"slideVersion":1,"isValidatorEnabled":false,"isLocked":false,"elementsMetadata":[{"type":"shape","elementConfiguration":{"binding":"{{FormatDateTime(Form.Date,Translate(\"DateFormat\"),DocumentLanguage)}}","type":"text","disableUpdates":false}},{"type":"shape","elementConfiguration":{"width":"{{UserProfile.Department.REFDepartmentLogo.WidthPNGPPTFooter}}","height":"{{UserProfile.Department.REFDepartmentLogo.HeightPNGPPTFooter}}","image":"{{UserProfile.Department.REFDepartmentLogo.ImagePNG}}","visibility":"{{IfElse(Form.FooterLogo, VisibilityType.Visible,VisibilityType.Hidden)}}","type":"image","disableUpdates":false}},{"type":"shape","elementConfiguration":{"binding":"{{Form.Footer}}","type":"text","disableUpdates":false}},{"type":"shape","elementConfiguration":{"binding":"{{UserProfile.Department.DepartmentName}}","visibility":"{{IfElse(Form.FooterLogo, VisibilityType.Hidden,VisibilityType.Visible)}}","type":"text","disableUpdates":false}}],"slideId":"637750113834261908","enableDocumentContentUpdater":true,"version":"2.0"}]]></TemplafySlideTemplateConfiguration>
 </file>
 
 <file path=customXml/item53.xml><?xml version="1.0" encoding="utf-8"?>
+<TemplafyTemplateConfiguration><![CDATA[{"elementsMetadata":[{"type":"shape","id":"56ce75b3-422e-4bea-941a-dc00172cd73f","elementConfiguration":{"binding":"{{FormatDateTime(Form.Date,Translate(\"DateFormat\"),DocumentLanguage)}}","type":"text","disableUpdates":false}},{"type":"shape","id":"ff4a6372-22c5-4dd4-8428-3be358c8e860","elementConfiguration":{"width":"{{UserProfile.Department.REFDepartmentLogo.WidthPNGPPTFooter}}","height":"{{UserProfile.Department.REFDepartmentLogo.HeightPNGPPTFooter}}","image":"{{UserProfile.Department.REFDepartmentLogo.ImagePNG}}","visibility":"{{IfElse(Form.FooterLogo, VisibilityType.Visible,VisibilityType.Hidden)}}","type":"image","disableUpdates":false}},{"type":"shape","id":"802336ec-566b-4a3d-896e-7cccb9fe246d","elementConfiguration":{"binding":"{{Form.Footer}}","type":"text","disableUpdates":false}},{"type":"shape","id":"a2d41398-5271-4cc9-b1dd-66e099bdef04","elementConfiguration":{"binding":"{{UserProfile.Department.DepartmentName}}","visibility":"{{IfElse(Form.FooterLogo, VisibilityType.Hidden,VisibilityType.Visible)}}","type":"text","disableUpdates":false}},{"type":"shape","id":"a40dda36-18a9-40da-9166-9a47a867251f","elementConfiguration":{"width":"{{UserProfile.Department.REFDepartmentLogo.WidthPNGPPT}}","height":"{{UserProfile.Department.REFDepartmentLogo.HeightPNGPPT}}","image":"{{UserProfile.Department.REFDepartmentLogo.ImagePNG}}","type":"image","disableUpdates":false}},{"type":"shape","id":"239d4f55-1bac-4607-8b11-947c6c77cd46","elementConfiguration":{"binding":"{{UserProfile.Department.DepartmentName}} \n{{UserProfile.Department.DepartmentStreet}} {{UserProfile.Department.DepartmentStreetNumber}} \n{{UserProfile.Department.DepartmentPOBox}} {{UserProfile.Department.DepartmentCity}} \n{{UserProfile.Department.DepartmentCountry}} \n{{UserProfile.Department.DepartmentWebsite}}","type":"text","disableUpdates":false}},{"type":"shape","id":"4e7e3c8a-6e06-4468-a348-0ba7b10c4800","elementConfiguration":{"width":"{{UserProfile.Department.REFDepartmentLogo.WidthPNGPPT}}","height":"{{UserProfile.Department.REFDepartmentLogo.HeightPNGPPT}}","image":"{{UserProfile.Department.REFDepartmentLogo.ImagePNG}}","type":"image","disableUpdates":false}},{"type":"shape","id":"843f5766-31d9-4280-a669-00226bb12ba8","elementConfiguration":{"binding":"{{FormatDateTime(Form.Date,Translate(\"DateFormat\"),DocumentLanguage)}}","type":"text","disableUpdates":false}},{"type":"shape","id":"9b9e4f3c-de31-4236-8ed4-5b99f4d3cf2e","elementConfiguration":{"width":"{{UserProfile.Department.REFDepartmentLogo.WidthPNGPPTFooter}}","height":"{{UserProfile.Department.REFDepartmentLogo.HeightPNGPPTFooter}}","image":"{{UserProfile.Department.REFDepartmentLogo.ImagePNG}}","visibility":"{{IfElse(Form.FooterLogo, VisibilityType.Visible,VisibilityType.Hidden)}}","type":"image","disableUpdates":false}},{"type":"shape","id":"75162e3e-ae53-4b5e-99da-7a45748d34cc","elementConfiguration":{"binding":"{{Form.Footer}}","type":"text","disableUpdates":false}},{"type":"shape","id":"4b457ff6-1749-4ff7-9ec1-d06b95bd97c4","elementConfiguration":{"binding":"{{UserProfile.Department.DepartmentName}}","visibility":"{{IfElse(Form.FooterLogo, VisibilityType.Hidden,VisibilityType.Visible)}}","type":"text","disableUpdates":false}},{"type":"shape","id":"595e50e6-f562-4e70-8412-9b3e58d54d40","elementConfiguration":{"width":"{{UserProfile.Department.REFDepartmentLogo.WidthPNGPPT}}","height":"{{UserProfile.Department.REFDepartmentLogo.HeightPNGPPT}}","image":"{{UserProfile.Department.REFDepartmentLogo.ImagePNG}}","type":"image","disableUpdates":false}},{"type":"shape","id":"987706d0-0020-48f8-abb7-fa71e92ba907","elementConfiguration":{"binding":"{{FormatDateTime(Form.Date,Translate(\"DateFormat\"),DocumentLanguage)}}","type":"text","disableUpdates":false}},{"type":"shape","id":"18680601-61d8-4c65-b887-d43faff0f7e7","elementConfiguration":{"width":"{{UserProfile.Department.REFDepartmentLogo.WidthPNGPPT}}","height":"{{UserProfile.Department.REFDepartmentLogo.HeightPNGPPT}}","image":"{{UserProfile.Department.REFDepartmentLogo.ImagePNG}}","type":"image","disableUpdates":false}},{"type":"shape","id":"889eed5e-adc6-4545-a320-e60e7fe89049","elementConfiguration":{"binding":"{{FormatDateTime(Form.Date,Translate(\"DateFormat\"),DocumentLanguage)}}","type":"text","disableUpdates":false}},{"type":"shape","id":"3f852e2a-90cd-405b-aa63-881f2da03bb5","elementConfiguration":{"width":"{{UserProfile.Department.REFDepartmentLogo.WidthPNGPPTFooter}}","height":"{{UserProfile.Department.REFDepartmentLogo.HeightPNGPPTFooter}}","image":"{{UserProfile.Department.REFDepartmentLogo.ImagePNG}}","visibility":"{{IfElse(Form.FooterLogo, VisibilityType.Visible,VisibilityType.Hidden)}}","type":"image","disableUpdates":false}},{"type":"shape","id":"a606881e-514e-4f57-b14a-3e310a69b4b5","elementConfiguration":{"binding":"{{Form.Footer}}","type":"text","disableUpdates":false}},{"type":"shape","id":"d89fcdf5-4b31-4eed-a6ec-a34b7588e3dc","elementConfiguration":{"binding":"{{UserProfile.Department.DepartmentName}}","visibility":"{{IfElse(Form.FooterLogo, VisibilityType.Hidden,VisibilityType.Visible)}}","type":"text","disableUpdates":false}},{"type":"shape","id":"e4895852-1c5c-4754-a233-3eec028fd2a8","elementConfiguration":{"binding":"{{FormatDateTime(Form.Date,Translate(\"DateFormat\"),DocumentLanguage)}}","type":"text","disableUpdates":false}},{"type":"shape","id":"d621d8b6-cd2e-463b-982e-d95c5f8a82fb","elementConfiguration":{"width":"{{UserProfile.Department.REFDepartmentLogo.WidthPNGPPTFooter}}","height":"{{UserProfile.Department.REFDepartmentLogo.HeightPNGPPTFooter}}","image":"{{UserProfile.Department.REFDepartmentLogo.ImagePNG}}","visibility":"{{IfElse(Form.FooterLogo, VisibilityType.Visible,VisibilityType.Hidden)}}","type":"image","disableUpdates":false}},{"type":"shape","id":"65b937f8-b6ed-482d-9fcb-89e2ad98182a","elementConfiguration":{"binding":"{{Form.Footer}}","type":"text","disableUpdates":false}},{"type":"shape","id":"8e41931c-7f95-42d4-bfa3-9c5f04293069","elementConfiguration":{"binding":"{{UserProfile.Department.DepartmentName}}","visibility":"{{IfElse(Form.FooterLogo, VisibilityType.Hidden,VisibilityType.Visible)}}","type":"text","disableUpdates":false}},{"type":"shape","id":"313b8357-6b18-490c-9533-a6c0ee071962","elementConfiguration":{"binding":"{{FormatDateTime(Form.Date,Translate(\"DateFormat\"),DocumentLanguage)}}","type":"text","disableUpdates":false}},{"type":"shape","id":"69582c92-e5c7-4749-97ef-47cc4b58fa8b","elementConfiguration":{"binding":"{{FormatDateTime(Form.Date,Translate(\"DateFormat\"),DocumentLanguage)}}","type":"text","disableUpdates":false}},{"type":"shape","id":"4ee707e9-0b9f-42e6-bfac-8cfa418e9d62","elementConfiguration":{"binding":"{{Form.Footer}}","type":"text","disableUpdates":false}},{"type":"shape","id":"b710521b-d63f-429f-a075-a52a6cb7c897","elementConfiguration":{"width":"{{UserProfile.Department.REFDepartmentLogo.WidthPNGPPTFooter}}","height":"{{UserProfile.Department.REFDepartmentLogo.HeightPNGPPTFooter}}","image":"{{UserProfile.Department.REFDepartmentLogo.ImagePNG}}","visibility":"{{IfElse(Form.FooterLogo, VisibilityType.Visible,VisibilityType.Hidden)}}","type":"image","disableUpdates":false}},{"type":"shape","id":"4c8a9ee4-f540-4aa0-9380-f692b4e2dcc6","elementConfiguration":{"binding":"{{UserProfile.Department.DepartmentName}}","visibility":"{{IfElse(Form.FooterLogo, VisibilityType.Hidden,VisibilityType.Visible)}}","type":"text","disableUpdates":false}},{"type":"shape","id":"9c2bec1f-485e-44d6-987c-4c2a62826230","elementConfiguration":{"binding":"{{FormatDateTime(Form.Date,Translate(\"DateFormat\"),DocumentLanguage)}}","type":"text","disableUpdates":false}},{"type":"shape","id":"965f1849-534b-4cf0-ad65-b946ad9126d8","elementConfiguration":{"width":"{{UserProfile.Department.REFDepartmentLogo.WidthPNGPPTFooter}}","height":"{{UserProfile.Department.REFDepartmentLogo.HeightPNGPPTFooter}}","image":"{{UserProfile.Department.REFDepartmentLogo.ImagePNG}}","visibility":"{{IfElse(Form.FooterLogo, VisibilityType.Visible,VisibilityType.Hidden)}}","type":"image","disableUpdates":false}},{"type":"shape","id":"73b120c8-aa6c-4644-86bc-360261a349b9","elementConfiguration":{"binding":"{{Form.Footer}}","type":"text","disableUpdates":false}},{"type":"shape","id":"297fab75-6aaa-4b1a-95bb-193250870530","elementConfiguration":{"binding":"{{UserProfile.Department.DepartmentName}}","visibility":"{{IfElse(Form.FooterLogo, VisibilityType.Hidden,VisibilityType.Visible)}}","type":"text","disableUpdates":false}}],"transformationConfigurations":[{"language":"{{UserProfile.DocumentLanguage.Language}}","disableUpdates":false,"type":"proofingLanguage"},{"propertyName":"creator","propertyValue":"{{UserProfile.FirstName}} {{UserProfile.LastName}}","disableUpdates":false,"type":"documentProperty"},{"propertyName":"title","propertyValue":"Presentation - University of St.Gallen","disableUpdates":false,"type":"documentProperty"}],"templateName":"UNISG Präsentation","templateDescription":"","enableDocumentContentUpdater":true,"version":"2.0"}]]></TemplafyTemplateConfiguration>
+</file>
+
+<file path=customXml/item54.xml><?xml version="1.0" encoding="utf-8"?>
+<TemplafySlideTemplateConfiguration><![CDATA[{"slideVersion":1,"isValidatorEnabled":false,"isLocked":false,"elementsMetadata":[],"slideId":"637750113834267111","enableDocumentContentUpdater":true,"version":"2.0"}]]></TemplafySlideTemplateConfiguration>
+</file>
+
+<file path=customXml/item55.xml><?xml version="1.0" encoding="utf-8"?>
+<TemplafySlideTemplateConfiguration><![CDATA[{"slideVersion":1,"isValidatorEnabled":false,"isLocked":false,"elementsMetadata":[{"type":"shape","elementConfiguration":{"binding":"{{FormatDateTime(Form.Date,Translate(\"DateFormat\"),DocumentLanguage)}}","type":"text","disableUpdates":false}},{"type":"shape","elementConfiguration":{"width":"{{UserProfile.Department.REFDepartmentLogo.WidthPNGPPTFooter}}","height":"{{UserProfile.Department.REFDepartmentLogo.HeightPNGPPTFooter}}","image":"{{UserProfile.Department.REFDepartmentLogo.ImagePNG}}","visibility":"{{IfElse(Form.FooterLogo, VisibilityType.Visible,VisibilityType.Hidden)}}","type":"image","disableUpdates":false}},{"type":"shape","elementConfiguration":{"binding":"{{Form.Footer}}","type":"text","disableUpdates":false}},{"type":"shape","elementConfiguration":{"binding":"{{UserProfile.Department.DepartmentName}}","visibility":"{{IfElse(Form.FooterLogo, VisibilityType.Hidden,VisibilityType.Visible)}}","type":"text","disableUpdates":false}}],"slideId":"637750113834264450","enableDocumentContentUpdater":true,"version":"2.0"}]]></TemplafySlideTemplateConfiguration>
+</file>
+
+<file path=customXml/item6.xml><?xml version="1.0" encoding="utf-8"?>
+<TemplafySlideTemplateConfiguration><![CDATA[{"slideVersion":1,"isValidatorEnabled":false,"isLocked":false,"elementsMetadata":[{"type":"shape","elementConfiguration":{"binding":"{{FormatDateTime(Form.Date,Translate(\"DateFormat\"),DocumentLanguage)}}","type":"text","disableUpdates":false}},{"type":"shape","elementConfiguration":{"width":"{{UserProfile.Department.REFDepartmentLogo.WidthPNGPPTFooter}}","height":"{{UserProfile.Department.REFDepartmentLogo.HeightPNGPPTFooter}}","image":"{{UserProfile.Department.REFDepartmentLogo.ImagePNG}}","visibility":"{{IfElse(Form.FooterLogo, VisibilityType.Visible,VisibilityType.Hidden)}}","type":"image","disableUpdates":false}},{"type":"shape","elementConfiguration":{"binding":"{{Form.Footer}}","type":"text","disableUpdates":false}},{"type":"shape","elementConfiguration":{"binding":"{{UserProfile.Department.DepartmentName}}","visibility":"{{IfElse(Form.FooterLogo, VisibilityType.Hidden,VisibilityType.Visible)}}","type":"text","disableUpdates":false}}],"slideId":"637750113834269210","enableDocumentContentUpdater":true,"version":"2.0"}]]></TemplafySlideTemplateConfiguration>
+</file>
+
+<file path=customXml/item7.xml><?xml version="1.0" encoding="utf-8"?>
+<TemplafySlideFormConfiguration><![CDATA[{"formFields":[{"required":true,"shareValue":false,"type":"datePicker","name":"Date","label":"Datum"},{"required":false,"placeholder":"","lines":1,"shareValue":false,"type":"textBox","name":"Footer","label":"Fusszeile"},{"defaultValue":{"fixedValue":true},"shareValue":false,"type":"checkBox","name":"FooterLogo","label":"mit Logo in der Fusszeile"}],"formDataEntries":[]}]]></TemplafySlideFormConfiguration>
+</file>
+
+<file path=customXml/item8.xml><?xml version="1.0" encoding="utf-8"?>
+<TemplafySlideTemplateConfiguration><![CDATA[{"slideVersion":1,"isValidatorEnabled":false,"isLocked":false,"elementsMetadata":[{"type":"shape","elementConfiguration":{"binding":"{{FormatDateTime(Form.Date,Translate(\"DateFormat\"),DocumentLanguage)}}","type":"text","disableUpdates":false}},{"type":"shape","elementConfiguration":{"width":"{{UserProfile.Department.REFDepartmentLogo.WidthPNGPPTFooter}}","height":"{{UserProfile.Department.REFDepartmentLogo.HeightPNGPPTFooter}}","image":"{{UserProfile.Department.REFDepartmentLogo.ImagePNG}}","visibility":"{{IfElse(Form.FooterLogo, VisibilityType.Visible,VisibilityType.Hidden)}}","type":"image","disableUpdates":false}},{"type":"shape","elementConfiguration":{"binding":"{{Form.Footer}}","type":"text","disableUpdates":false}},{"type":"shape","elementConfiguration":{"binding":"{{UserProfile.Department.DepartmentName}}","visibility":"{{IfElse(Form.FooterLogo, VisibilityType.Hidden,VisibilityType.Visible)}}","type":"text","disableUpdates":false}}],"slideId":"637750113834195832","enableDocumentContentUpdater":true,"version":"2.0"}]]></TemplafySlideTemplateConfiguration>
+</file>
+
+<file path=customXml/item9.xml><?xml version="1.0" encoding="utf-8"?>
 <TemplafySlideFormConfiguration><![CDATA[{"formFields":[],"formDataEntries":[]}]]></TemplafySlideFormConfiguration>
 </file>
 
-<file path=customXml/item54.xml><?xml version="1.0" encoding="utf-8"?>
-<TemplafySlideFormConfiguration><![CDATA[{"formFields":[],"formDataEntries":[]}]]></TemplafySlideFormConfiguration>
-</file>
-
-<file path=customXml/item55.xml><?xml version="1.0" encoding="utf-8"?>
-<TemplafySlideFormConfiguration><![CDATA[{"formFields":[{"required":true,"shareValue":false,"type":"datePicker","name":"Date","label":"Datum"},{"required":false,"placeholder":"","lines":1,"shareValue":false,"type":"textBox","name":"Footer","label":"Fusszeile"},{"defaultValue":{"fixedValue":true},"shareValue":false,"type":"checkBox","name":"FooterLogo","label":"mit Logo in der Fusszeile"}],"formDataEntries":[]}]]></TemplafySlideFormConfiguration>
-</file>
-
-<file path=customXml/item6.xml><?xml version="1.0" encoding="utf-8"?>
-<TemplafySlideTemplateConfiguration><![CDATA[{"slideVersion":1,"isValidatorEnabled":false,"isLocked":false,"elementsMetadata":[{"type":"shape","elementConfiguration":{"binding":"{{FormatDateTime(Form.Date,Translate(\"DateFormat\"),DocumentLanguage)}}","type":"text","disableUpdates":false}},{"type":"shape","elementConfiguration":{"width":"{{UserProfile.Department.REFDepartmentLogo.WidthPNGPPTFooter}}","height":"{{UserProfile.Department.REFDepartmentLogo.HeightPNGPPTFooter}}","image":"{{UserProfile.Department.REFDepartmentLogo.ImagePNG}}","visibility":"{{IfElse(Form.FooterLogo, VisibilityType.Visible,VisibilityType.Hidden)}}","type":"image","disableUpdates":false}},{"type":"shape","elementConfiguration":{"binding":"{{Form.Footer}}","type":"text","disableUpdates":false}},{"type":"shape","elementConfiguration":{"binding":"{{UserProfile.Department.DepartmentName}}","visibility":"{{IfElse(Form.FooterLogo, VisibilityType.Hidden,VisibilityType.Visible)}}","type":"text","disableUpdates":false}}],"slideId":"637750113834279331","enableDocumentContentUpdater":true,"version":"2.0"}]]></TemplafySlideTemplateConfiguration>
-</file>
-
-<file path=customXml/item7.xml><?xml version="1.0" encoding="utf-8"?>
-<TemplafySlideTemplateConfiguration><![CDATA[{"slideVersion":1,"isValidatorEnabled":false,"isLocked":false,"elementsMetadata":[],"slideId":"637750113834253485","enableDocumentContentUpdater":true,"version":"2.0"}]]></TemplafySlideTemplateConfiguration>
-</file>
-
-<file path=customXml/item8.xml><?xml version="1.0" encoding="utf-8"?>
-<TemplafySlideFormConfiguration><![CDATA[{"formFields":[{"required":true,"shareValue":false,"type":"datePicker","name":"Date","label":"Datum"},{"required":false,"placeholder":"","lines":1,"shareValue":false,"type":"textBox","name":"Footer","label":"Fusszeile"},{"defaultValue":{"fixedValue":true},"shareValue":false,"type":"checkBox","name":"FooterLogo","label":"mit Logo in der Fusszeile"}],"formDataEntries":[]}]]></TemplafySlideFormConfiguration>
-</file>
-
-<file path=customXml/item9.xml><?xml version="1.0" encoding="utf-8"?>
-<TemplafySlideFormConfiguration><![CDATA[{"formFields":[{"required":true,"shareValue":false,"type":"datePicker","name":"Date","label":"Datum"},{"required":false,"placeholder":"","lines":1,"shareValue":false,"type":"textBox","name":"Footer","label":"Fusszeile"},{"defaultValue":{"fixedValue":true},"shareValue":false,"type":"checkBox","name":"FooterLogo","label":"mit Logo in der Fusszeile"}],"formDataEntries":[]}]]></TemplafySlideFormConfiguration>
-</file>
-
 <file path=customXml/itemProps1.xml><?xml version="1.0" encoding="utf-8"?>
+<ds:datastoreItem xmlns:ds="http://schemas.openxmlformats.org/officeDocument/2006/customXml" ds:itemID="{90BBE109-2328-4050-BC2C-A7208F976826}">
+  <ds:schemaRefs/>
+</ds:datastoreItem>
+</file>
+
+<file path=customXml/itemProps10.xml><?xml version="1.0" encoding="utf-8"?>
+<ds:datastoreItem xmlns:ds="http://schemas.openxmlformats.org/officeDocument/2006/customXml" ds:itemID="{664F7CED-B0DA-429D-9A7F-4CBF61D24C26}">
+  <ds:schemaRefs/>
+</ds:datastoreItem>
+</file>
+
+<file path=customXml/itemProps11.xml><?xml version="1.0" encoding="utf-8"?>
+<ds:datastoreItem xmlns:ds="http://schemas.openxmlformats.org/officeDocument/2006/customXml" ds:itemID="{6567BD5C-CC0C-4648-BED2-6CE28F06E5A9}">
+  <ds:schemaRefs>
+    <ds:schemaRef ds:uri="http://schemas.microsoft.com/office/2006/metadata/properties"/>
+    <ds:schemaRef ds:uri="http://www.w3.org/XML/1998/namespace"/>
+    <ds:schemaRef ds:uri="http://purl.org/dc/elements/1.1/"/>
+    <ds:schemaRef ds:uri="http://purl.org/dc/terms/"/>
+    <ds:schemaRef ds:uri="http://purl.org/dc/dcmitype/"/>
+    <ds:schemaRef ds:uri="71d337dc-809a-4269-a690-d6cd31b4acd0"/>
+    <ds:schemaRef ds:uri="http://schemas.microsoft.com/office/infopath/2007/PartnerControls"/>
+    <ds:schemaRef ds:uri="http://schemas.microsoft.com/office/2006/documentManagement/types"/>
+    <ds:schemaRef ds:uri="http://schemas.openxmlformats.org/package/2006/metadata/core-properties"/>
+    <ds:schemaRef ds:uri="07c8a24f-8b40-44ca-950f-ae5db2c4fa23"/>
+  </ds:schemaRefs>
+</ds:datastoreItem>
+</file>
+
+<file path=customXml/itemProps12.xml><?xml version="1.0" encoding="utf-8"?>
+<ds:datastoreItem xmlns:ds="http://schemas.openxmlformats.org/officeDocument/2006/customXml" ds:itemID="{10DF96B0-5AB8-4312-B635-364A70A3CD64}">
+  <ds:schemaRefs/>
+</ds:datastoreItem>
+</file>
+
+<file path=customXml/itemProps13.xml><?xml version="1.0" encoding="utf-8"?>
+<ds:datastoreItem xmlns:ds="http://schemas.openxmlformats.org/officeDocument/2006/customXml" ds:itemID="{F0F415B7-3B60-D646-8E61-195FAF28F2E9}">
+  <ds:schemaRefs/>
+</ds:datastoreItem>
+</file>
+
+<file path=customXml/itemProps14.xml><?xml version="1.0" encoding="utf-8"?>
+<ds:datastoreItem xmlns:ds="http://schemas.openxmlformats.org/officeDocument/2006/customXml" ds:itemID="{9B272F4A-5C95-4892-AAD9-D7AEF7A26919}">
+  <ds:schemaRefs/>
+</ds:datastoreItem>
+</file>
+
+<file path=customXml/itemProps15.xml><?xml version="1.0" encoding="utf-8"?>
+<ds:datastoreItem xmlns:ds="http://schemas.openxmlformats.org/officeDocument/2006/customXml" ds:itemID="{3DAEF0AC-8F99-434C-A5E8-5F51192FBC2E}">
+  <ds:schemaRefs/>
+</ds:datastoreItem>
+</file>
+
+<file path=customXml/itemProps16.xml><?xml version="1.0" encoding="utf-8"?>
+<ds:datastoreItem xmlns:ds="http://schemas.openxmlformats.org/officeDocument/2006/customXml" ds:itemID="{46D5571C-37EA-4B1A-965C-D1FF428CABBA}">
+  <ds:schemaRefs/>
+</ds:datastoreItem>
+</file>
+
+<file path=customXml/itemProps17.xml><?xml version="1.0" encoding="utf-8"?>
+<ds:datastoreItem xmlns:ds="http://schemas.openxmlformats.org/officeDocument/2006/customXml" ds:itemID="{7DDF22D5-378F-4B43-9E2C-6011B6850318}">
+  <ds:schemaRefs/>
+</ds:datastoreItem>
+</file>
+
+<file path=customXml/itemProps18.xml><?xml version="1.0" encoding="utf-8"?>
+<ds:datastoreItem xmlns:ds="http://schemas.openxmlformats.org/officeDocument/2006/customXml" ds:itemID="{9BA6235D-7E1A-4B9C-ADE5-24E162A87D03}">
+  <ds:schemaRefs/>
+</ds:datastoreItem>
+</file>
+
+<file path=customXml/itemProps19.xml><?xml version="1.0" encoding="utf-8"?>
+<ds:datastoreItem xmlns:ds="http://schemas.openxmlformats.org/officeDocument/2006/customXml" ds:itemID="{BE973802-FCC6-412D-B906-CC95D3BA7379}">
+  <ds:schemaRefs/>
+</ds:datastoreItem>
+</file>
+
+<file path=customXml/itemProps2.xml><?xml version="1.0" encoding="utf-8"?>
+<ds:datastoreItem xmlns:ds="http://schemas.openxmlformats.org/officeDocument/2006/customXml" ds:itemID="{DCBF58FE-EC78-4FA4-A4AD-8EA1AF6C427F}">
+  <ds:schemaRefs/>
+</ds:datastoreItem>
+</file>
+
+<file path=customXml/itemProps20.xml><?xml version="1.0" encoding="utf-8"?>
+<ds:datastoreItem xmlns:ds="http://schemas.openxmlformats.org/officeDocument/2006/customXml" ds:itemID="{0AF5DDBE-5E75-48FC-BA21-32ACE2374F30}">
+  <ds:schemaRefs/>
+</ds:datastoreItem>
+</file>
+
+<file path=customXml/itemProps21.xml><?xml version="1.0" encoding="utf-8"?>
+<ds:datastoreItem xmlns:ds="http://schemas.openxmlformats.org/officeDocument/2006/customXml" ds:itemID="{A1DE4887-2FA9-49BA-B8BF-E79FB8D56958}">
+  <ds:schemaRefs/>
+</ds:datastoreItem>
+</file>
+
+<file path=customXml/itemProps22.xml><?xml version="1.0" encoding="utf-8"?>
+<ds:datastoreItem xmlns:ds="http://schemas.openxmlformats.org/officeDocument/2006/customXml" ds:itemID="{1EEB1A81-9962-42B8-BE89-F24FBB4418EA}">
+  <ds:schemaRefs/>
+</ds:datastoreItem>
+</file>
+
+<file path=customXml/itemProps23.xml><?xml version="1.0" encoding="utf-8"?>
+<ds:datastoreItem xmlns:ds="http://schemas.openxmlformats.org/officeDocument/2006/customXml" ds:itemID="{DE9A5BE9-B208-45C2-93C1-997B1E18C5E8}">
+  <ds:schemaRefs/>
+</ds:datastoreItem>
+</file>
+
+<file path=customXml/itemProps24.xml><?xml version="1.0" encoding="utf-8"?>
+<ds:datastoreItem xmlns:ds="http://schemas.openxmlformats.org/officeDocument/2006/customXml" ds:itemID="{84926F0E-4CF9-4868-9C6A-F4B02CC81AC4}">
+  <ds:schemaRefs/>
+</ds:datastoreItem>
+</file>
+
+<file path=customXml/itemProps25.xml><?xml version="1.0" encoding="utf-8"?>
+<ds:datastoreItem xmlns:ds="http://schemas.openxmlformats.org/officeDocument/2006/customXml" ds:itemID="{17B6E611-A877-40D8-9669-147A1865FF06}">
+  <ds:schemaRefs/>
+</ds:datastoreItem>
+</file>
+
+<file path=customXml/itemProps26.xml><?xml version="1.0" encoding="utf-8"?>
+<ds:datastoreItem xmlns:ds="http://schemas.openxmlformats.org/officeDocument/2006/customXml" ds:itemID="{10CA47D5-62BF-412C-82C9-AD9C9628E81D}">
+  <ds:schemaRefs/>
+</ds:datastoreItem>
+</file>
+
+<file path=customXml/itemProps27.xml><?xml version="1.0" encoding="utf-8"?>
 <ds:datastoreItem xmlns:ds="http://schemas.openxmlformats.org/officeDocument/2006/customXml" ds:itemID="{5CDA3866-4191-4ABE-B434-81C70850BD71}">
   <ds:schemaRefs/>
 </ds:datastoreItem>
 </file>
 
-<file path=customXml/itemProps10.xml><?xml version="1.0" encoding="utf-8"?>
+<file path=customXml/itemProps28.xml><?xml version="1.0" encoding="utf-8"?>
+<ds:datastoreItem xmlns:ds="http://schemas.openxmlformats.org/officeDocument/2006/customXml" ds:itemID="{66FA18C0-85E2-48F7-961D-7BE01285C862}">
+  <ds:schemaRefs/>
+</ds:datastoreItem>
+</file>
+
+<file path=customXml/itemProps29.xml><?xml version="1.0" encoding="utf-8"?>
+<ds:datastoreItem xmlns:ds="http://schemas.openxmlformats.org/officeDocument/2006/customXml" ds:itemID="{187CDBC8-4301-CA40-9C1E-C2AAF09F8BBD}">
+  <ds:schemaRefs/>
+</ds:datastoreItem>
+</file>
+
+<file path=customXml/itemProps3.xml><?xml version="1.0" encoding="utf-8"?>
+<ds:datastoreItem xmlns:ds="http://schemas.openxmlformats.org/officeDocument/2006/customXml" ds:itemID="{765EC35B-8AF2-40F0-BFE1-C19B71F66BB7}">
+  <ds:schemaRefs/>
+</ds:datastoreItem>
+</file>
+
+<file path=customXml/itemProps30.xml><?xml version="1.0" encoding="utf-8"?>
+<ds:datastoreItem xmlns:ds="http://schemas.openxmlformats.org/officeDocument/2006/customXml" ds:itemID="{4CA08EE0-6BFF-42CE-9AEB-A2BB1FFE120F}">
+  <ds:schemaRefs/>
+</ds:datastoreItem>
+</file>
+
+<file path=customXml/itemProps31.xml><?xml version="1.0" encoding="utf-8"?>
+<ds:datastoreItem xmlns:ds="http://schemas.openxmlformats.org/officeDocument/2006/customXml" ds:itemID="{45B06F8E-AA4D-4F38-9B8B-099300ECC694}">
+  <ds:schemaRefs/>
+</ds:datastoreItem>
+</file>
+
+<file path=customXml/itemProps32.xml><?xml version="1.0" encoding="utf-8"?>
+<ds:datastoreItem xmlns:ds="http://schemas.openxmlformats.org/officeDocument/2006/customXml" ds:itemID="{2754228B-0BD8-45C5-B5EB-94306059B5EC}">
+  <ds:schemaRefs/>
+</ds:datastoreItem>
+</file>
+
+<file path=customXml/itemProps33.xml><?xml version="1.0" encoding="utf-8"?>
+<ds:datastoreItem xmlns:ds="http://schemas.openxmlformats.org/officeDocument/2006/customXml" ds:itemID="{A35AE265-4942-487E-9782-B0313E5BE5BA}">
+  <ds:schemaRefs/>
+</ds:datastoreItem>
+</file>
+
+<file path=customXml/itemProps34.xml><?xml version="1.0" encoding="utf-8"?>
 <ds:datastoreItem xmlns:ds="http://schemas.openxmlformats.org/officeDocument/2006/customXml" ds:itemID="{4907208B-9EFE-4124-A198-13AD782B858C}">
   <ds:schemaRefs/>
 </ds:datastoreItem>
 </file>
 
-<file path=customXml/itemProps11.xml><?xml version="1.0" encoding="utf-8"?>
-<ds:datastoreItem xmlns:ds="http://schemas.openxmlformats.org/officeDocument/2006/customXml" ds:itemID="{DCBF58FE-EC78-4FA4-A4AD-8EA1AF6C427F}">
+<file path=customXml/itemProps35.xml><?xml version="1.0" encoding="utf-8"?>
+<ds:datastoreItem xmlns:ds="http://schemas.openxmlformats.org/officeDocument/2006/customXml" ds:itemID="{B0437DFC-C606-441B-B8FC-7769CEA71C34}">
   <ds:schemaRefs/>
 </ds:datastoreItem>
 </file>
 
-<file path=customXml/itemProps12.xml><?xml version="1.0" encoding="utf-8"?>
-<ds:datastoreItem xmlns:ds="http://schemas.openxmlformats.org/officeDocument/2006/customXml" ds:itemID="{9BA6235D-7E1A-4B9C-ADE5-24E162A87D03}">
+<file path=customXml/itemProps36.xml><?xml version="1.0" encoding="utf-8"?>
+<ds:datastoreItem xmlns:ds="http://schemas.openxmlformats.org/officeDocument/2006/customXml" ds:itemID="{600482A4-E9CD-4DA2-AD6D-ED3DAAC7A90E}">
   <ds:schemaRefs/>
 </ds:datastoreItem>
 </file>
 
-<file path=customXml/itemProps13.xml><?xml version="1.0" encoding="utf-8"?>
+<file path=customXml/itemProps37.xml><?xml version="1.0" encoding="utf-8"?>
+<ds:datastoreItem xmlns:ds="http://schemas.openxmlformats.org/officeDocument/2006/customXml" ds:itemID="{EF9A843C-DEE1-4221-96D6-063228FC0A5C}">
+  <ds:schemaRefs/>
+</ds:datastoreItem>
+</file>
+
+<file path=customXml/itemProps38.xml><?xml version="1.0" encoding="utf-8"?>
+<ds:datastoreItem xmlns:ds="http://schemas.openxmlformats.org/officeDocument/2006/customXml" ds:itemID="{7D15E2AB-9AA3-4994-B62A-3E2F5C1A2EC4}">
+  <ds:schemaRefs/>
+</ds:datastoreItem>
+</file>
+
+<file path=customXml/itemProps39.xml><?xml version="1.0" encoding="utf-8"?>
+<ds:datastoreItem xmlns:ds="http://schemas.openxmlformats.org/officeDocument/2006/customXml" ds:itemID="{22F15940-6A24-4FEF-A717-C5EC22A291A1}">
+  <ds:schemaRefs/>
+</ds:datastoreItem>
+</file>
+
+<file path=customXml/itemProps4.xml><?xml version="1.0" encoding="utf-8"?>
+<ds:datastoreItem xmlns:ds="http://schemas.openxmlformats.org/officeDocument/2006/customXml" ds:itemID="{708F14FE-66F6-4744-AD1D-7632167C0D90}">
+  <ds:schemaRefs/>
+</ds:datastoreItem>
+</file>
+
+<file path=customXml/itemProps40.xml><?xml version="1.0" encoding="utf-8"?>
 <ds:datastoreItem xmlns:ds="http://schemas.openxmlformats.org/officeDocument/2006/customXml" ds:itemID="{8AA700CF-41AC-4CCC-923C-17ED3F632772}">
   <ds:schemaRefs/>
 </ds:datastoreItem>
 </file>
 
-<file path=customXml/itemProps14.xml><?xml version="1.0" encoding="utf-8"?>
-<ds:datastoreItem xmlns:ds="http://schemas.openxmlformats.org/officeDocument/2006/customXml" ds:itemID="{C9933F99-DED2-42B9-8123-10C71C06D0F5}">
-  <ds:schemaRefs/>
-</ds:datastoreItem>
-</file>
-
-<file path=customXml/itemProps15.xml><?xml version="1.0" encoding="utf-8"?>
-<ds:datastoreItem xmlns:ds="http://schemas.openxmlformats.org/officeDocument/2006/customXml" ds:itemID="{187CDBC8-4301-CA40-9C1E-C2AAF09F8BBD}">
-  <ds:schemaRefs/>
-</ds:datastoreItem>
-</file>
-
-<file path=customXml/itemProps16.xml><?xml version="1.0" encoding="utf-8"?>
-<ds:datastoreItem xmlns:ds="http://schemas.openxmlformats.org/officeDocument/2006/customXml" ds:itemID="{90BBE109-2328-4050-BC2C-A7208F976826}">
-  <ds:schemaRefs/>
-</ds:datastoreItem>
-</file>
-
-<file path=customXml/itemProps17.xml><?xml version="1.0" encoding="utf-8"?>
-<ds:datastoreItem xmlns:ds="http://schemas.openxmlformats.org/officeDocument/2006/customXml" ds:itemID="{BE973802-FCC6-412D-B906-CC95D3BA7379}">
-  <ds:schemaRefs/>
-</ds:datastoreItem>
-</file>
-
-<file path=customXml/itemProps18.xml><?xml version="1.0" encoding="utf-8"?>
+<file path=customXml/itemProps41.xml><?xml version="1.0" encoding="utf-8"?>
 <ds:datastoreItem xmlns:ds="http://schemas.openxmlformats.org/officeDocument/2006/customXml" ds:itemID="{D4F2BED0-C414-46BA-AF63-E57A81C2B9FC}">
   <ds:schemaRefs/>
 </ds:datastoreItem>
 </file>
 
-<file path=customXml/itemProps19.xml><?xml version="1.0" encoding="utf-8"?>
-<ds:datastoreItem xmlns:ds="http://schemas.openxmlformats.org/officeDocument/2006/customXml" ds:itemID="{FFAB5E35-3CC7-4E36-92C6-6DCD3F34D8CF}">
+<file path=customXml/itemProps42.xml><?xml version="1.0" encoding="utf-8"?>
+<ds:datastoreItem xmlns:ds="http://schemas.openxmlformats.org/officeDocument/2006/customXml" ds:itemID="{BA2D1F52-F0AD-4181-AA76-1D6F58ED2D3E}">
   <ds:schemaRefs/>
 </ds:datastoreItem>
 </file>
 
-<file path=customXml/itemProps2.xml><?xml version="1.0" encoding="utf-8"?>
+<file path=customXml/itemProps43.xml><?xml version="1.0" encoding="utf-8"?>
+<ds:datastoreItem xmlns:ds="http://schemas.openxmlformats.org/officeDocument/2006/customXml" ds:itemID="{AB24DB1C-E169-480A-9390-B8AAE56F6957}">
+  <ds:schemaRefs/>
+</ds:datastoreItem>
+</file>
+
+<file path=customXml/itemProps44.xml><?xml version="1.0" encoding="utf-8"?>
+<ds:datastoreItem xmlns:ds="http://schemas.openxmlformats.org/officeDocument/2006/customXml" ds:itemID="{DC466C4A-550D-4144-830C-62BC000CB329}">
+  <ds:schemaRefs/>
+</ds:datastoreItem>
+</file>
+
+<file path=customXml/itemProps45.xml><?xml version="1.0" encoding="utf-8"?>
+<ds:datastoreItem xmlns:ds="http://schemas.openxmlformats.org/officeDocument/2006/customXml" ds:itemID="{55868A80-4CEC-40D9-B298-8CDA543EF6B4}">
+  <ds:schemaRefs/>
+</ds:datastoreItem>
+</file>
+
+<file path=customXml/itemProps46.xml><?xml version="1.0" encoding="utf-8"?>
+<ds:datastoreItem xmlns:ds="http://schemas.openxmlformats.org/officeDocument/2006/customXml" ds:itemID="{7F01121C-13E9-483A-B7E6-46DD03B75200}">
+  <ds:schemaRefs/>
+</ds:datastoreItem>
+</file>
+
+<file path=customXml/itemProps47.xml><?xml version="1.0" encoding="utf-8"?>
 <ds:datastoreItem xmlns:ds="http://schemas.openxmlformats.org/officeDocument/2006/customXml" ds:itemID="{ED2A37DE-9640-4BAD-87EB-02349D3561C8}">
   <ds:schemaRefs>
     <ds:schemaRef ds:uri="http://schemas.microsoft.com/sharepoint/v3/contenttype/forms"/>
@@ -13495,31 +14158,13 @@
 </ds:datastoreItem>
 </file>
 
-<file path=customXml/itemProps20.xml><?xml version="1.0" encoding="utf-8"?>
-<ds:datastoreItem xmlns:ds="http://schemas.openxmlformats.org/officeDocument/2006/customXml" ds:itemID="{84926F0E-4CF9-4868-9C6A-F4B02CC81AC4}">
+<file path=customXml/itemProps48.xml><?xml version="1.0" encoding="utf-8"?>
+<ds:datastoreItem xmlns:ds="http://schemas.openxmlformats.org/officeDocument/2006/customXml" ds:itemID="{357320CA-212D-4182-9447-766838BC3644}">
   <ds:schemaRefs/>
 </ds:datastoreItem>
 </file>
 
-<file path=customXml/itemProps21.xml><?xml version="1.0" encoding="utf-8"?>
-<ds:datastoreItem xmlns:ds="http://schemas.openxmlformats.org/officeDocument/2006/customXml" ds:itemID="{DD23DDCC-ABAF-42D1-9CB2-07E72D883C32}">
-  <ds:schemaRefs/>
-</ds:datastoreItem>
-</file>
-
-<file path=customXml/itemProps22.xml><?xml version="1.0" encoding="utf-8"?>
-<ds:datastoreItem xmlns:ds="http://schemas.openxmlformats.org/officeDocument/2006/customXml" ds:itemID="{552033E5-1422-443A-ABA7-A9FA421D7629}">
-  <ds:schemaRefs/>
-</ds:datastoreItem>
-</file>
-
-<file path=customXml/itemProps23.xml><?xml version="1.0" encoding="utf-8"?>
-<ds:datastoreItem xmlns:ds="http://schemas.openxmlformats.org/officeDocument/2006/customXml" ds:itemID="{4CA08EE0-6BFF-42CE-9AEB-A2BB1FFE120F}">
-  <ds:schemaRefs/>
-</ds:datastoreItem>
-</file>
-
-<file path=customXml/itemProps24.xml><?xml version="1.0" encoding="utf-8"?>
+<file path=customXml/itemProps49.xml><?xml version="1.0" encoding="utf-8"?>
 <ds:datastoreItem xmlns:ds="http://schemas.openxmlformats.org/officeDocument/2006/customXml" ds:itemID="{329B48A9-5067-463C-80F4-7C90FDDEC242}">
   <ds:schemaRefs>
     <ds:schemaRef ds:uri="http://schemas.microsoft.com/office/2006/metadata/contentType"/>
@@ -13538,241 +14183,68 @@
 </ds:datastoreItem>
 </file>
 
-<file path=customXml/itemProps25.xml><?xml version="1.0" encoding="utf-8"?>
-<ds:datastoreItem xmlns:ds="http://schemas.openxmlformats.org/officeDocument/2006/customXml" ds:itemID="{0AF5DDBE-5E75-48FC-BA21-32ACE2374F30}">
+<file path=customXml/itemProps5.xml><?xml version="1.0" encoding="utf-8"?>
+<ds:datastoreItem xmlns:ds="http://schemas.openxmlformats.org/officeDocument/2006/customXml" ds:itemID="{B77E3FB8-6B77-4C09-82A2-9AF5ACD3601A}">
   <ds:schemaRefs/>
 </ds:datastoreItem>
 </file>
 
-<file path=customXml/itemProps26.xml><?xml version="1.0" encoding="utf-8"?>
+<file path=customXml/itemProps50.xml><?xml version="1.0" encoding="utf-8"?>
+<ds:datastoreItem xmlns:ds="http://schemas.openxmlformats.org/officeDocument/2006/customXml" ds:itemID="{57D5D086-3D49-4363-99E9-93FB10F7001F}">
+  <ds:schemaRefs/>
+</ds:datastoreItem>
+</file>
+
+<file path=customXml/itemProps51.xml><?xml version="1.0" encoding="utf-8"?>
+<ds:datastoreItem xmlns:ds="http://schemas.openxmlformats.org/officeDocument/2006/customXml" ds:itemID="{A435609F-4C76-4415-A5FC-BB21AE5C4FD2}">
+  <ds:schemaRefs/>
+</ds:datastoreItem>
+</file>
+
+<file path=customXml/itemProps52.xml><?xml version="1.0" encoding="utf-8"?>
 <ds:datastoreItem xmlns:ds="http://schemas.openxmlformats.org/officeDocument/2006/customXml" ds:itemID="{5F64DE57-8A63-47CA-A8AA-FC8E23CF697A}">
   <ds:schemaRefs/>
 </ds:datastoreItem>
 </file>
 
-<file path=customXml/itemProps27.xml><?xml version="1.0" encoding="utf-8"?>
-<ds:datastoreItem xmlns:ds="http://schemas.openxmlformats.org/officeDocument/2006/customXml" ds:itemID="{664F7CED-B0DA-429D-9A7F-4CBF61D24C26}">
+<file path=customXml/itemProps53.xml><?xml version="1.0" encoding="utf-8"?>
+<ds:datastoreItem xmlns:ds="http://schemas.openxmlformats.org/officeDocument/2006/customXml" ds:itemID="{DD23DDCC-ABAF-42D1-9CB2-07E72D883C32}">
   <ds:schemaRefs/>
 </ds:datastoreItem>
 </file>
 
-<file path=customXml/itemProps28.xml><?xml version="1.0" encoding="utf-8"?>
-<ds:datastoreItem xmlns:ds="http://schemas.openxmlformats.org/officeDocument/2006/customXml" ds:itemID="{45B06F8E-AA4D-4F38-9B8B-099300ECC694}">
-  <ds:schemaRefs/>
-</ds:datastoreItem>
-</file>
-
-<file path=customXml/itemProps29.xml><?xml version="1.0" encoding="utf-8"?>
-<ds:datastoreItem xmlns:ds="http://schemas.openxmlformats.org/officeDocument/2006/customXml" ds:itemID="{357320CA-212D-4182-9447-766838BC3644}">
-  <ds:schemaRefs/>
-</ds:datastoreItem>
-</file>
-
-<file path=customXml/itemProps3.xml><?xml version="1.0" encoding="utf-8"?>
-<ds:datastoreItem xmlns:ds="http://schemas.openxmlformats.org/officeDocument/2006/customXml" ds:itemID="{7DDF22D5-378F-4B43-9E2C-6011B6850318}">
-  <ds:schemaRefs/>
-</ds:datastoreItem>
-</file>
-
-<file path=customXml/itemProps30.xml><?xml version="1.0" encoding="utf-8"?>
-<ds:datastoreItem xmlns:ds="http://schemas.openxmlformats.org/officeDocument/2006/customXml" ds:itemID="{6567BD5C-CC0C-4648-BED2-6CE28F06E5A9}">
-  <ds:schemaRefs>
-    <ds:schemaRef ds:uri="http://schemas.microsoft.com/office/2006/metadata/properties"/>
-    <ds:schemaRef ds:uri="http://www.w3.org/XML/1998/namespace"/>
-    <ds:schemaRef ds:uri="http://purl.org/dc/elements/1.1/"/>
-    <ds:schemaRef ds:uri="http://purl.org/dc/terms/"/>
-    <ds:schemaRef ds:uri="http://purl.org/dc/dcmitype/"/>
-    <ds:schemaRef ds:uri="71d337dc-809a-4269-a690-d6cd31b4acd0"/>
-    <ds:schemaRef ds:uri="http://schemas.microsoft.com/office/infopath/2007/PartnerControls"/>
-    <ds:schemaRef ds:uri="http://schemas.microsoft.com/office/2006/documentManagement/types"/>
-    <ds:schemaRef ds:uri="http://schemas.openxmlformats.org/package/2006/metadata/core-properties"/>
-    <ds:schemaRef ds:uri="07c8a24f-8b40-44ca-950f-ae5db2c4fa23"/>
-  </ds:schemaRefs>
-</ds:datastoreItem>
-</file>
-
-<file path=customXml/itemProps31.xml><?xml version="1.0" encoding="utf-8"?>
-<ds:datastoreItem xmlns:ds="http://schemas.openxmlformats.org/officeDocument/2006/customXml" ds:itemID="{B0437DFC-C606-441B-B8FC-7769CEA71C34}">
-  <ds:schemaRefs/>
-</ds:datastoreItem>
-</file>
-
-<file path=customXml/itemProps32.xml><?xml version="1.0" encoding="utf-8"?>
-<ds:datastoreItem xmlns:ds="http://schemas.openxmlformats.org/officeDocument/2006/customXml" ds:itemID="{765EC35B-8AF2-40F0-BFE1-C19B71F66BB7}">
-  <ds:schemaRefs/>
-</ds:datastoreItem>
-</file>
-
-<file path=customXml/itemProps33.xml><?xml version="1.0" encoding="utf-8"?>
-<ds:datastoreItem xmlns:ds="http://schemas.openxmlformats.org/officeDocument/2006/customXml" ds:itemID="{A1DE4887-2FA9-49BA-B8BF-E79FB8D56958}">
-  <ds:schemaRefs/>
-</ds:datastoreItem>
-</file>
-
-<file path=customXml/itemProps34.xml><?xml version="1.0" encoding="utf-8"?>
-<ds:datastoreItem xmlns:ds="http://schemas.openxmlformats.org/officeDocument/2006/customXml" ds:itemID="{AB24DB1C-E169-480A-9390-B8AAE56F6957}">
-  <ds:schemaRefs/>
-</ds:datastoreItem>
-</file>
-
-<file path=customXml/itemProps35.xml><?xml version="1.0" encoding="utf-8"?>
-<ds:datastoreItem xmlns:ds="http://schemas.openxmlformats.org/officeDocument/2006/customXml" ds:itemID="{10DF96B0-5AB8-4312-B635-364A70A3CD64}">
-  <ds:schemaRefs/>
-</ds:datastoreItem>
-</file>
-
-<file path=customXml/itemProps36.xml><?xml version="1.0" encoding="utf-8"?>
-<ds:datastoreItem xmlns:ds="http://schemas.openxmlformats.org/officeDocument/2006/customXml" ds:itemID="{2754228B-0BD8-45C5-B5EB-94306059B5EC}">
-  <ds:schemaRefs/>
-</ds:datastoreItem>
-</file>
-
-<file path=customXml/itemProps37.xml><?xml version="1.0" encoding="utf-8"?>
-<ds:datastoreItem xmlns:ds="http://schemas.openxmlformats.org/officeDocument/2006/customXml" ds:itemID="{708F14FE-66F6-4744-AD1D-7632167C0D90}">
-  <ds:schemaRefs/>
-</ds:datastoreItem>
-</file>
-
-<file path=customXml/itemProps38.xml><?xml version="1.0" encoding="utf-8"?>
-<ds:datastoreItem xmlns:ds="http://schemas.openxmlformats.org/officeDocument/2006/customXml" ds:itemID="{1EEB1A81-9962-42B8-BE89-F24FBB4418EA}">
-  <ds:schemaRefs/>
-</ds:datastoreItem>
-</file>
-
-<file path=customXml/itemProps39.xml><?xml version="1.0" encoding="utf-8"?>
-<ds:datastoreItem xmlns:ds="http://schemas.openxmlformats.org/officeDocument/2006/customXml" ds:itemID="{BA2D1F52-F0AD-4181-AA76-1D6F58ED2D3E}">
-  <ds:schemaRefs/>
-</ds:datastoreItem>
-</file>
-
-<file path=customXml/itemProps4.xml><?xml version="1.0" encoding="utf-8"?>
-<ds:datastoreItem xmlns:ds="http://schemas.openxmlformats.org/officeDocument/2006/customXml" ds:itemID="{7D15E2AB-9AA3-4994-B62A-3E2F5C1A2EC4}">
-  <ds:schemaRefs/>
-</ds:datastoreItem>
-</file>
-
-<file path=customXml/itemProps40.xml><?xml version="1.0" encoding="utf-8"?>
-<ds:datastoreItem xmlns:ds="http://schemas.openxmlformats.org/officeDocument/2006/customXml" ds:itemID="{57D5D086-3D49-4363-99E9-93FB10F7001F}">
-  <ds:schemaRefs/>
-</ds:datastoreItem>
-</file>
-
-<file path=customXml/itemProps41.xml><?xml version="1.0" encoding="utf-8"?>
-<ds:datastoreItem xmlns:ds="http://schemas.openxmlformats.org/officeDocument/2006/customXml" ds:itemID="{17B6E611-A877-40D8-9669-147A1865FF06}">
-  <ds:schemaRefs/>
-</ds:datastoreItem>
-</file>
-
-<file path=customXml/itemProps42.xml><?xml version="1.0" encoding="utf-8"?>
+<file path=customXml/itemProps54.xml><?xml version="1.0" encoding="utf-8"?>
 <ds:datastoreItem xmlns:ds="http://schemas.openxmlformats.org/officeDocument/2006/customXml" ds:itemID="{FCB61E48-E0AD-4F83-9AA4-8AC901918564}">
   <ds:schemaRefs/>
 </ds:datastoreItem>
 </file>
 
-<file path=customXml/itemProps43.xml><?xml version="1.0" encoding="utf-8"?>
-<ds:datastoreItem xmlns:ds="http://schemas.openxmlformats.org/officeDocument/2006/customXml" ds:itemID="{F0F415B7-3B60-D646-8E61-195FAF28F2E9}">
-  <ds:schemaRefs/>
-</ds:datastoreItem>
-</file>
-
-<file path=customXml/itemProps44.xml><?xml version="1.0" encoding="utf-8"?>
-<ds:datastoreItem xmlns:ds="http://schemas.openxmlformats.org/officeDocument/2006/customXml" ds:itemID="{600482A4-E9CD-4DA2-AD6D-ED3DAAC7A90E}">
-  <ds:schemaRefs/>
-</ds:datastoreItem>
-</file>
-
-<file path=customXml/itemProps45.xml><?xml version="1.0" encoding="utf-8"?>
-<ds:datastoreItem xmlns:ds="http://schemas.openxmlformats.org/officeDocument/2006/customXml" ds:itemID="{A435609F-4C76-4415-A5FC-BB21AE5C4FD2}">
-  <ds:schemaRefs/>
-</ds:datastoreItem>
-</file>
-
-<file path=customXml/itemProps46.xml><?xml version="1.0" encoding="utf-8"?>
-<ds:datastoreItem xmlns:ds="http://schemas.openxmlformats.org/officeDocument/2006/customXml" ds:itemID="{DE9A5BE9-B208-45C2-93C1-997B1E18C5E8}">
-  <ds:schemaRefs/>
-</ds:datastoreItem>
-</file>
-
-<file path=customXml/itemProps47.xml><?xml version="1.0" encoding="utf-8"?>
+<file path=customXml/itemProps55.xml><?xml version="1.0" encoding="utf-8"?>
 <ds:datastoreItem xmlns:ds="http://schemas.openxmlformats.org/officeDocument/2006/customXml" ds:itemID="{0D0AC32F-64CA-4FED-863B-4E0877612F21}">
   <ds:schemaRefs/>
 </ds:datastoreItem>
 </file>
 
-<file path=customXml/itemProps48.xml><?xml version="1.0" encoding="utf-8"?>
-<ds:datastoreItem xmlns:ds="http://schemas.openxmlformats.org/officeDocument/2006/customXml" ds:itemID="{9B272F4A-5C95-4892-AAD9-D7AEF7A26919}">
-  <ds:schemaRefs/>
-</ds:datastoreItem>
-</file>
-
-<file path=customXml/itemProps49.xml><?xml version="1.0" encoding="utf-8"?>
-<ds:datastoreItem xmlns:ds="http://schemas.openxmlformats.org/officeDocument/2006/customXml" ds:itemID="{A35AE265-4942-487E-9782-B0313E5BE5BA}">
-  <ds:schemaRefs/>
-</ds:datastoreItem>
-</file>
-
-<file path=customXml/itemProps5.xml><?xml version="1.0" encoding="utf-8"?>
+<file path=customXml/itemProps6.xml><?xml version="1.0" encoding="utf-8"?>
 <ds:datastoreItem xmlns:ds="http://schemas.openxmlformats.org/officeDocument/2006/customXml" ds:itemID="{DCC1EDEA-6109-42CD-9115-6BD85EF38642}">
   <ds:schemaRefs/>
 </ds:datastoreItem>
 </file>
 
-<file path=customXml/itemProps50.xml><?xml version="1.0" encoding="utf-8"?>
-<ds:datastoreItem xmlns:ds="http://schemas.openxmlformats.org/officeDocument/2006/customXml" ds:itemID="{DC466C4A-550D-4144-830C-62BC000CB329}">
+<file path=customXml/itemProps7.xml><?xml version="1.0" encoding="utf-8"?>
+<ds:datastoreItem xmlns:ds="http://schemas.openxmlformats.org/officeDocument/2006/customXml" ds:itemID="{FFAB5E35-3CC7-4E36-92C6-6DCD3F34D8CF}">
   <ds:schemaRefs/>
 </ds:datastoreItem>
 </file>
 
-<file path=customXml/itemProps51.xml><?xml version="1.0" encoding="utf-8"?>
-<ds:datastoreItem xmlns:ds="http://schemas.openxmlformats.org/officeDocument/2006/customXml" ds:itemID="{46D5571C-37EA-4B1A-965C-D1FF428CABBA}">
+<file path=customXml/itemProps8.xml><?xml version="1.0" encoding="utf-8"?>
+<ds:datastoreItem xmlns:ds="http://schemas.openxmlformats.org/officeDocument/2006/customXml" ds:itemID="{C9933F99-DED2-42B9-8123-10C71C06D0F5}">
   <ds:schemaRefs/>
 </ds:datastoreItem>
 </file>
 
-<file path=customXml/itemProps52.xml><?xml version="1.0" encoding="utf-8"?>
-<ds:datastoreItem xmlns:ds="http://schemas.openxmlformats.org/officeDocument/2006/customXml" ds:itemID="{EF9A843C-DEE1-4221-96D6-063228FC0A5C}">
-  <ds:schemaRefs/>
-</ds:datastoreItem>
-</file>
-
-<file path=customXml/itemProps53.xml><?xml version="1.0" encoding="utf-8"?>
-<ds:datastoreItem xmlns:ds="http://schemas.openxmlformats.org/officeDocument/2006/customXml" ds:itemID="{B77E3FB8-6B77-4C09-82A2-9AF5ACD3601A}">
-  <ds:schemaRefs/>
-</ds:datastoreItem>
-</file>
-
-<file path=customXml/itemProps54.xml><?xml version="1.0" encoding="utf-8"?>
-<ds:datastoreItem xmlns:ds="http://schemas.openxmlformats.org/officeDocument/2006/customXml" ds:itemID="{10CA47D5-62BF-412C-82C9-AD9C9628E81D}">
-  <ds:schemaRefs/>
-</ds:datastoreItem>
-</file>
-
-<file path=customXml/itemProps55.xml><?xml version="1.0" encoding="utf-8"?>
-<ds:datastoreItem xmlns:ds="http://schemas.openxmlformats.org/officeDocument/2006/customXml" ds:itemID="{55868A80-4CEC-40D9-B298-8CDA543EF6B4}">
-  <ds:schemaRefs/>
-</ds:datastoreItem>
-</file>
-
-<file path=customXml/itemProps6.xml><?xml version="1.0" encoding="utf-8"?>
-<ds:datastoreItem xmlns:ds="http://schemas.openxmlformats.org/officeDocument/2006/customXml" ds:itemID="{66FA18C0-85E2-48F7-961D-7BE01285C862}">
-  <ds:schemaRefs/>
-</ds:datastoreItem>
-</file>
-
-<file path=customXml/itemProps7.xml><?xml version="1.0" encoding="utf-8"?>
-<ds:datastoreItem xmlns:ds="http://schemas.openxmlformats.org/officeDocument/2006/customXml" ds:itemID="{7F01121C-13E9-483A-B7E6-46DD03B75200}">
-  <ds:schemaRefs/>
-</ds:datastoreItem>
-</file>
-
-<file path=customXml/itemProps8.xml><?xml version="1.0" encoding="utf-8"?>
-<ds:datastoreItem xmlns:ds="http://schemas.openxmlformats.org/officeDocument/2006/customXml" ds:itemID="{3DAEF0AC-8F99-434C-A5E8-5F51192FBC2E}">
-  <ds:schemaRefs/>
-</ds:datastoreItem>
-</file>
-
 <file path=customXml/itemProps9.xml><?xml version="1.0" encoding="utf-8"?>
-<ds:datastoreItem xmlns:ds="http://schemas.openxmlformats.org/officeDocument/2006/customXml" ds:itemID="{22F15940-6A24-4FEF-A717-C5EC22A291A1}">
+<ds:datastoreItem xmlns:ds="http://schemas.openxmlformats.org/officeDocument/2006/customXml" ds:itemID="{552033E5-1422-443A-ABA7-A9FA421D7629}">
   <ds:schemaRefs/>
 </ds:datastoreItem>
 </file>

--- a/docs/presentation/cryptoflow.pptx
+++ b/docs/presentation/cryptoflow.pptx
@@ -1057,7 +1057,7 @@
           <a:p>
             <a:fld id="{EF76BEFE-BF9F-47C0-9B2B-37E6860B00C1}" type="slidenum">
               <a:rPr lang="de-CH" smtClean="0"/>
-              <a:t>‹Nr.›</a:t>
+              <a:t>‹#›</a:t>
             </a:fld>
             <a:endParaRPr lang="de-CH"/>
           </a:p>
@@ -1315,7 +1315,7 @@
           <a:p>
             <a:fld id="{19EFE3F1-1C0D-4780-BCDC-4F7033F6C9E1}" type="slidenum">
               <a:rPr lang="de-CH" smtClean="0"/>
-              <a:t>‹Nr.›</a:t>
+              <a:t>‹#›</a:t>
             </a:fld>
             <a:endParaRPr lang="de-CH"/>
           </a:p>
@@ -3494,7 +3494,7 @@
           <a:p>
             <a:fld id="{7559FC98-AF75-4A00-A03C-DF9FEBF6BCB9}" type="slidenum">
               <a:rPr lang="en-GB" smtClean="0"/>
-              <a:t>‹Nr.›</a:t>
+              <a:t>‹#›</a:t>
             </a:fld>
             <a:endParaRPr lang="en-GB"/>
           </a:p>
@@ -4063,7 +4063,7 @@
           <a:p>
             <a:fld id="{7559FC98-AF75-4A00-A03C-DF9FEBF6BCB9}" type="slidenum">
               <a:rPr lang="en-GB" smtClean="0"/>
-              <a:t>‹Nr.›</a:t>
+              <a:t>‹#›</a:t>
             </a:fld>
             <a:endParaRPr lang="en-GB"/>
           </a:p>
@@ -5739,7 +5739,7 @@
           <a:p>
             <a:fld id="{7559FC98-AF75-4A00-A03C-DF9FEBF6BCB9}" type="slidenum">
               <a:rPr lang="en-GB" smtClean="0"/>
-              <a:t>‹Nr.›</a:t>
+              <a:t>‹#›</a:t>
             </a:fld>
             <a:endParaRPr lang="en-GB"/>
           </a:p>
@@ -6269,7 +6269,7 @@
           <a:p>
             <a:fld id="{7559FC98-AF75-4A00-A03C-DF9FEBF6BCB9}" type="slidenum">
               <a:rPr lang="en-GB" smtClean="0"/>
-              <a:t>‹Nr.›</a:t>
+              <a:t>‹#›</a:t>
             </a:fld>
             <a:endParaRPr lang="en-GB"/>
           </a:p>
@@ -7376,7 +7376,7 @@
             <a:fld id="{7559FC98-AF75-4A00-A03C-DF9FEBF6BCB9}" type="slidenum">
               <a:rPr lang="en-GB" smtClean="0"/>
               <a:pPr/>
-              <a:t>‹Nr.›</a:t>
+              <a:t>‹#›</a:t>
             </a:fld>
             <a:endParaRPr lang="en-GB" dirty="0"/>
           </a:p>
@@ -8458,7 +8458,7 @@
             <a:fld id="{7559FC98-AF75-4A00-A03C-DF9FEBF6BCB9}" type="slidenum">
               <a:rPr lang="en-GB" smtClean="0"/>
               <a:pPr/>
-              <a:t>‹Nr.›</a:t>
+              <a:t>‹#›</a:t>
             </a:fld>
             <a:endParaRPr lang="en-GB" dirty="0"/>
           </a:p>
@@ -8920,7 +8920,7 @@
             <a:fld id="{7559FC98-AF75-4A00-A03C-DF9FEBF6BCB9}" type="slidenum">
               <a:rPr lang="en-GB" smtClean="0"/>
               <a:pPr/>
-              <a:t>‹Nr.›</a:t>
+              <a:t>‹#›</a:t>
             </a:fld>
             <a:endParaRPr lang="en-GB" dirty="0"/>
           </a:p>
@@ -9304,7 +9304,7 @@
           <a:p>
             <a:fld id="{7559FC98-AF75-4A00-A03C-DF9FEBF6BCB9}" type="slidenum">
               <a:rPr lang="en-GB" smtClean="0"/>
-              <a:t>‹Nr.›</a:t>
+              <a:t>‹#›</a:t>
             </a:fld>
             <a:endParaRPr lang="en-GB"/>
           </a:p>
@@ -9843,7 +9843,7 @@
             <a:fld id="{7559FC98-AF75-4A00-A03C-DF9FEBF6BCB9}" type="slidenum">
               <a:rPr lang="en-GB" smtClean="0"/>
               <a:pPr/>
-              <a:t>‹Nr.›</a:t>
+              <a:t>‹#›</a:t>
             </a:fld>
             <a:endParaRPr lang="en-GB" dirty="0"/>
           </a:p>
@@ -11165,7 +11165,7 @@
         <p:spPr/>
         <p:txBody>
           <a:bodyPr wrap="square">
-            <a:normAutofit/>
+            <a:normAutofit fontScale="92500" lnSpcReduction="10000"/>
           </a:bodyPr>
           <a:lstStyle/>
           <a:p>
@@ -11174,7 +11174,7 @@
               <a:buChar char="•"/>
             </a:pPr>
             <a:r>
-              <a:rPr lang="en-US" sz="1400" b="1">
+              <a:rPr lang="en-US" sz="1400" b="1" dirty="0">
                 <a:solidFill>
                   <a:srgbClr val="00802E"/>
                 </a:solidFill>
@@ -11188,18 +11188,18 @@
               <a:buChar char="•"/>
             </a:pPr>
             <a:r>
-              <a:rPr lang="en-US" sz="1200" err="1"/>
+              <a:rPr lang="en-US" sz="1200" dirty="0" err="1"/>
               <a:t>processed_transaction</a:t>
             </a:r>
             <a:r>
-              <a:rPr lang="en-US" sz="1200"/>
+              <a:rPr lang="en-US" sz="1200" dirty="0"/>
               <a:t> UNIQUE constraint on </a:t>
             </a:r>
             <a:r>
-              <a:rPr lang="en-US" sz="1200" err="1"/>
+              <a:rPr lang="en-US" sz="1200" dirty="0" err="1"/>
               <a:t>transactionId</a:t>
             </a:r>
-            <a:endParaRPr lang="en-US" sz="1200"/>
+            <a:endParaRPr lang="en-US" sz="1200" dirty="0"/>
           </a:p>
           <a:p>
             <a:pPr marL="465750" lvl="1" indent="-285750">
@@ -11207,7 +11207,7 @@
               <a:buChar char="•"/>
             </a:pPr>
             <a:r>
-              <a:rPr lang="en-US" sz="1200"/>
+              <a:rPr lang="en-US" sz="1200" dirty="0"/>
               <a:t>found during integration: 2 BTC order → 4 BTC in portfolio</a:t>
             </a:r>
           </a:p>
@@ -11215,7 +11215,7 @@
             <a:pPr lvl="1" indent="0">
               <a:buNone/>
             </a:pPr>
-            <a:endParaRPr lang="en-US" sz="1200"/>
+            <a:endParaRPr lang="en-US" sz="1200" dirty="0"/>
           </a:p>
           <a:p>
             <a:pPr marL="285750" indent="-285750">
@@ -11223,7 +11223,7 @@
               <a:buChar char="•"/>
             </a:pPr>
             <a:r>
-              <a:rPr lang="en-US" sz="1600" b="1">
+              <a:rPr lang="en-US" sz="1600" b="1" dirty="0">
                 <a:solidFill>
                   <a:srgbClr val="00802E"/>
                 </a:solidFill>
@@ -11231,12 +11231,42 @@
               <a:t>ECST</a:t>
             </a:r>
             <a:r>
-              <a:rPr lang="en-US" sz="1600"/>
-              <a:t>: event carried state transfer for compensation in Onboarding</a:t>
-            </a:r>
-          </a:p>
-          <a:p>
-            <a:endParaRPr lang="en-US" sz="1600"/>
+              <a:rPr lang="en-US" sz="1600" dirty="0"/>
+              <a:t>: </a:t>
+            </a:r>
+          </a:p>
+          <a:p>
+            <a:pPr marL="465750" lvl="1" indent="-285750">
+              <a:buFont typeface="Arial" panose="020B0604020202020204" pitchFamily="34" charset="0"/>
+              <a:buChar char="•"/>
+            </a:pPr>
+            <a:r>
+              <a:rPr lang="en-US" sz="1200" dirty="0"/>
+              <a:t>event carried state transfer for compensation in Onboarding</a:t>
+            </a:r>
+          </a:p>
+          <a:p>
+            <a:pPr marL="465750" lvl="1" indent="-285750">
+              <a:buFont typeface="Arial" panose="020B0604020202020204" pitchFamily="34" charset="0"/>
+              <a:buChar char="•"/>
+            </a:pPr>
+            <a:r>
+              <a:rPr lang="en-US" sz="1200" dirty="0"/>
+              <a:t>Portfolio updates after order approval</a:t>
+            </a:r>
+          </a:p>
+          <a:p>
+            <a:pPr marL="465750" lvl="1" indent="-285750">
+              <a:buFont typeface="Arial" panose="020B0604020202020204" pitchFamily="34" charset="0"/>
+              <a:buChar char="•"/>
+            </a:pPr>
+            <a:r>
+              <a:rPr lang="en-US" sz="1200" dirty="0"/>
+              <a:t>…</a:t>
+            </a:r>
+          </a:p>
+          <a:p>
+            <a:endParaRPr lang="en-US" sz="1600" dirty="0"/>
           </a:p>
           <a:p>
             <a:pPr marL="285750" indent="-285750">
@@ -11244,7 +11274,7 @@
               <a:buChar char="•"/>
             </a:pPr>
             <a:r>
-              <a:rPr lang="en-US" sz="1400" b="1">
+              <a:rPr lang="en-US" sz="1400" b="1" dirty="0">
                 <a:solidFill>
                   <a:srgbClr val="00802E"/>
                 </a:solidFill>
@@ -11258,7 +11288,7 @@
               <a:buChar char="•"/>
             </a:pPr>
             <a:r>
-              <a:rPr lang="en-US" sz="1200"/>
+              <a:rPr lang="en-US" sz="1200" dirty="0"/>
               <a:t>Approval + outbox row in one DB transaction</a:t>
             </a:r>
           </a:p>
@@ -11268,7 +11298,7 @@
               <a:buChar char="•"/>
             </a:pPr>
             <a:r>
-              <a:rPr lang="en-US" sz="1200"/>
+              <a:rPr lang="en-US" sz="1200" dirty="0"/>
               <a:t>Scheduler republishes stale rows after crashes</a:t>
             </a:r>
           </a:p>
@@ -11276,7 +11306,7 @@
             <a:pPr lvl="1" indent="0">
               <a:buNone/>
             </a:pPr>
-            <a:endParaRPr lang="en-US" sz="1200"/>
+            <a:endParaRPr lang="en-US" sz="1200" dirty="0"/>
           </a:p>
           <a:p>
             <a:pPr marL="285750" indent="-285750">
@@ -11284,7 +11314,7 @@
               <a:buChar char="•"/>
             </a:pPr>
             <a:r>
-              <a:rPr lang="en-US" sz="1400" b="1">
+              <a:rPr lang="en-US" sz="1400" b="1" dirty="0">
                 <a:solidFill>
                   <a:srgbClr val="00802E"/>
                 </a:solidFill>
@@ -11298,7 +11328,7 @@
               <a:buChar char="•"/>
             </a:pPr>
             <a:r>
-              <a:rPr lang="en-US" sz="1200"/>
+              <a:rPr lang="en-US" sz="1200" dirty="0"/>
               <a:t>Deterministic failures throw typed BPMN errors</a:t>
             </a:r>
           </a:p>
@@ -11308,20 +11338,20 @@
               <a:buChar char="•"/>
             </a:pPr>
             <a:r>
-              <a:rPr lang="en-US" sz="1200"/>
+              <a:rPr lang="en-US" sz="1200" dirty="0"/>
               <a:t>Boundary events route to ops user task in </a:t>
             </a:r>
             <a:r>
-              <a:rPr lang="en-US" sz="1200" err="1"/>
+              <a:rPr lang="en-US" sz="1200" dirty="0" err="1"/>
               <a:t>Tasklist</a:t>
             </a:r>
-            <a:endParaRPr lang="en-US" sz="1200"/>
-          </a:p>
-          <a:p>
-            <a:endParaRPr lang="en-US" sz="1600"/>
-          </a:p>
-          <a:p>
-            <a:endParaRPr lang="en-US" sz="1600"/>
+            <a:endParaRPr lang="en-US" sz="1200" dirty="0"/>
+          </a:p>
+          <a:p>
+            <a:endParaRPr lang="en-US" sz="1600" dirty="0"/>
+          </a:p>
+          <a:p>
+            <a:endParaRPr lang="en-US" sz="1600" dirty="0"/>
           </a:p>
         </p:txBody>
       </p:sp>
@@ -13989,7 +14019,7 @@
           <a:lstStyle/>
           <a:p>
             <a:r>
-              <a:rPr b="1">
+              <a:rPr b="1" dirty="0">
                 <a:solidFill>
                   <a:srgbClr val="00802E"/>
                 </a:solidFill>
@@ -13997,7 +14027,7 @@
               <a:t>Why Camunda 8 </a:t>
             </a:r>
             <a:r>
-              <a:rPr lang="de-CH" b="1">
+              <a:rPr lang="de-CH" b="1" dirty="0">
                 <a:solidFill>
                   <a:srgbClr val="00802E"/>
                 </a:solidFill>
@@ -14005,7 +14035,7 @@
               <a:t>/ </a:t>
             </a:r>
             <a:r>
-              <a:rPr b="1" err="1">
+              <a:rPr b="1" dirty="0" err="1">
                 <a:solidFill>
                   <a:srgbClr val="00802E"/>
                 </a:solidFill>
@@ -14013,7 +14043,7 @@
               <a:t>Zeebe</a:t>
             </a:r>
             <a:r>
-              <a:rPr b="1">
+              <a:rPr b="1" dirty="0">
                 <a:solidFill>
                   <a:srgbClr val="00802E"/>
                 </a:solidFill>
@@ -16058,34 +16088,6 @@
 </file>
 
 <file path=customXml/item1.xml><?xml version="1.0" encoding="utf-8"?>
-<TemplafySlideFormConfiguration><![CDATA[{"formFields":[{"required":true,"shareValue":false,"type":"datePicker","name":"Date","label":"Datum"},{"required":false,"placeholder":"","lines":1,"shareValue":false,"type":"textBox","name":"Footer","label":"Fusszeile"},{"defaultValue":{"fixedValue":true},"shareValue":false,"type":"checkBox","name":"FooterLogo","label":"mit Logo in der Fusszeile"}],"formDataEntries":[]}]]></TemplafySlideFormConfiguration>
-</file>
-
-<file path=customXml/item10.xml><?xml version="1.0" encoding="utf-8"?>
-<TemplafySlideTemplateConfiguration><![CDATA[{"slideVersion":1,"isValidatorEnabled":false,"isLocked":false,"elementsMetadata":[{"type":"shape","elementConfiguration":{"binding":"{{FormatDateTime(Form.Date,Translate(\"DateFormat\"),DocumentLanguage)}}","type":"text","disableUpdates":false}},{"type":"shape","elementConfiguration":{"width":"{{UserProfile.Department.REFDepartmentLogo.WidthPNGPPTFooter}}","height":"{{UserProfile.Department.REFDepartmentLogo.HeightPNGPPTFooter}}","image":"{{UserProfile.Department.REFDepartmentLogo.ImagePNG}}","visibility":"{{IfElse(Form.FooterLogo, VisibilityType.Visible,VisibilityType.Hidden)}}","type":"image","disableUpdates":false}},{"type":"shape","elementConfiguration":{"binding":"{{Form.Footer}}","type":"text","disableUpdates":false}},{"type":"shape","elementConfiguration":{"binding":"{{UserProfile.Department.DepartmentName}}","visibility":"{{IfElse(Form.FooterLogo, VisibilityType.Hidden,VisibilityType.Visible)}}","type":"text","disableUpdates":false}}],"slideId":"637750113834257356","enableDocumentContentUpdater":true,"version":"2.0"}]]></TemplafySlideTemplateConfiguration>
-</file>
-
-<file path=customXml/item11.xml><?xml version="1.0" encoding="utf-8"?>
-<TemplafySlideTemplateConfiguration><![CDATA[{"slideVersion":1,"isValidatorEnabled":false,"isLocked":false,"elementsMetadata":[],"slideId":"637750113834120761","enableDocumentContentUpdater":true,"version":"2.0"}]]></TemplafySlideTemplateConfiguration>
-</file>
-
-<file path=customXml/item12.xml><?xml version="1.0" encoding="utf-8"?>
-<TemplafySlideTemplateConfiguration><![CDATA[{"slideVersion":1,"isValidatorEnabled":false,"isLocked":false,"elementsMetadata":[],"slideId":"637750113834125595","enableDocumentContentUpdater":true,"version":"2.0"}]]></TemplafySlideTemplateConfiguration>
-</file>
-
-<file path=customXml/item13.xml><?xml version="1.0" encoding="utf-8"?>
-<TemplafySlideFormConfiguration><![CDATA[{"formFields":[],"formDataEntries":[]}]]></TemplafySlideFormConfiguration>
-</file>
-
-<file path=customXml/item14.xml><?xml version="1.0" encoding="utf-8"?>
-<TemplafySlideTemplateConfiguration><![CDATA[{"slideVersion":1,"isValidatorEnabled":false,"isLocked":false,"elementsMetadata":[],"slideId":"637750113834130535","enableDocumentContentUpdater":true,"version":"2.0"}]]></TemplafySlideTemplateConfiguration>
-</file>
-
-<file path=customXml/item15.xml><?xml version="1.0" encoding="utf-8"?>
-<TemplafySlideFormConfiguration><![CDATA[{"formFields":[],"formDataEntries":[]}]]></TemplafySlideFormConfiguration>
-</file>
-
-<file path=customXml/item16.xml><?xml version="1.0" encoding="utf-8"?>
 <ct:contentTypeSchema xmlns:ct="http://schemas.microsoft.com/office/2006/metadata/contentType" xmlns:ma="http://schemas.microsoft.com/office/2006/metadata/properties/metaAttributes" ct:_="" ma:_="" ma:contentTypeName="Document" ma:contentTypeID="0x01010034C2EED3AEDAB24AB48AF05A7A255DF4" ma:contentTypeVersion="21" ma:contentTypeDescription="Create a new document." ma:contentTypeScope="" ma:versionID="274d9017fadbcc8b67afbe4b22a55600">
   <xsd:schema xmlns:xsd="http://www.w3.org/2001/XMLSchema" xmlns:xs="http://www.w3.org/2001/XMLSchema" xmlns:p="http://schemas.microsoft.com/office/2006/metadata/properties" xmlns:ns2="07c8a24f-8b40-44ca-950f-ae5db2c4fa23" xmlns:ns3="71d337dc-809a-4269-a690-d6cd31b4acd0" targetNamespace="http://schemas.microsoft.com/office/2006/metadata/properties" ma:root="true" ma:fieldsID="0b58614a3de855f8a451fa93eb2e43b4" ns2:_="" ns3:_="">
     <xsd:import namespace="07c8a24f-8b40-44ca-950f-ae5db2c4fa23"/>
@@ -16334,51 +16336,7 @@
 </ct:contentTypeSchema>
 </file>
 
-<file path=customXml/item17.xml><?xml version="1.0" encoding="utf-8"?>
-<TemplafySlideFormConfiguration><![CDATA[{"formFields":[{"required":true,"shareValue":false,"type":"datePicker","name":"Date","label":"Datum"},{"required":false,"placeholder":"","lines":1,"shareValue":false,"type":"textBox","name":"Footer","label":"Fusszeile"},{"defaultValue":{"fixedValue":true},"shareValue":false,"type":"checkBox","name":"FooterLogo","label":"mit Logo in der Fusszeile"}],"formDataEntries":[]}]]></TemplafySlideFormConfiguration>
-</file>
-
-<file path=customXml/item18.xml><?xml version="1.0" encoding="utf-8"?>
-<TemplafySlideFormConfiguration><![CDATA[{"formFields":[{"required":true,"shareValue":false,"type":"datePicker","name":"Date","label":"Datum"},{"required":false,"placeholder":"","lines":1,"shareValue":false,"type":"textBox","name":"Footer","label":"Fusszeile"},{"defaultValue":{"fixedValue":true},"shareValue":false,"type":"checkBox","name":"FooterLogo","label":"mit Logo in der Fusszeile"}],"formDataEntries":[]}]]></TemplafySlideFormConfiguration>
-</file>
-
-<file path=customXml/item19.xml><?xml version="1.0" encoding="utf-8"?>
-<TemplafySlideTemplateConfiguration><![CDATA[{"slideVersion":1,"isValidatorEnabled":false,"isLocked":false,"elementsMetadata":[{"type":"shape","elementConfiguration":{"width":"{{UserProfile.Department.REFDepartmentLogo.WidthPNGPPT}}","height":"{{UserProfile.Department.REFDepartmentLogo.HeightPNGPPT}}","image":"{{UserProfile.Department.REFDepartmentLogo.ImagePNG}}","type":"image","disableUpdates":false}}],"slideId":"637750113834107008","enableDocumentContentUpdater":true,"version":"2.0"}]]></TemplafySlideTemplateConfiguration>
-</file>
-
-<file path=customXml/item2.xml><?xml version="1.0" encoding="utf-8"?>
-<TemplafySlideFormConfiguration><![CDATA[{"formFields":[{"required":true,"shareValue":false,"type":"datePicker","name":"Date","label":"Datum"},{"required":false,"placeholder":"","lines":1,"shareValue":false,"type":"textBox","name":"Footer","label":"Fusszeile"},{"defaultValue":{"fixedValue":true},"shareValue":false,"type":"checkBox","name":"FooterLogo","label":"mit Logo in der Fusszeile"}],"formDataEntries":[]}]]></TemplafySlideFormConfiguration>
-</file>
-
-<file path=customXml/item20.xml><?xml version="1.0" encoding="utf-8"?>
-<TemplafyTemplateConfiguration><![CDATA[{"elementsMetadata":[{"type":"shape","id":"56ce75b3-422e-4bea-941a-dc00172cd73f","elementConfiguration":{"binding":"{{FormatDateTime(Form.Date,Translate(\"DateFormat\"),DocumentLanguage)}}","type":"text","disableUpdates":false}},{"type":"shape","id":"ff4a6372-22c5-4dd4-8428-3be358c8e860","elementConfiguration":{"width":"{{UserProfile.Department.REFDepartmentLogo.WidthPNGPPTFooter}}","height":"{{UserProfile.Department.REFDepartmentLogo.HeightPNGPPTFooter}}","image":"{{UserProfile.Department.REFDepartmentLogo.ImagePNG}}","visibility":"{{IfElse(Form.FooterLogo, VisibilityType.Visible,VisibilityType.Hidden)}}","type":"image","disableUpdates":false}},{"type":"shape","id":"802336ec-566b-4a3d-896e-7cccb9fe246d","elementConfiguration":{"binding":"{{Form.Footer}}","type":"text","disableUpdates":false}},{"type":"shape","id":"a2d41398-5271-4cc9-b1dd-66e099bdef04","elementConfiguration":{"binding":"{{UserProfile.Department.DepartmentName}}","visibility":"{{IfElse(Form.FooterLogo, VisibilityType.Hidden,VisibilityType.Visible)}}","type":"text","disableUpdates":false}},{"type":"shape","id":"a40dda36-18a9-40da-9166-9a47a867251f","elementConfiguration":{"width":"{{UserProfile.Department.REFDepartmentLogo.WidthPNGPPT}}","height":"{{UserProfile.Department.REFDepartmentLogo.HeightPNGPPT}}","image":"{{UserProfile.Department.REFDepartmentLogo.ImagePNG}}","type":"image","disableUpdates":false}},{"type":"shape","id":"239d4f55-1bac-4607-8b11-947c6c77cd46","elementConfiguration":{"binding":"{{UserProfile.Department.DepartmentName}} \n{{UserProfile.Department.DepartmentStreet}} {{UserProfile.Department.DepartmentStreetNumber}} \n{{UserProfile.Department.DepartmentPOBox}} {{UserProfile.Department.DepartmentCity}} \n{{UserProfile.Department.DepartmentCountry}} \n{{UserProfile.Department.DepartmentWebsite}}","type":"text","disableUpdates":false}},{"type":"shape","id":"4e7e3c8a-6e06-4468-a348-0ba7b10c4800","elementConfiguration":{"width":"{{UserProfile.Department.REFDepartmentLogo.WidthPNGPPT}}","height":"{{UserProfile.Department.REFDepartmentLogo.HeightPNGPPT}}","image":"{{UserProfile.Department.REFDepartmentLogo.ImagePNG}}","type":"image","disableUpdates":false}},{"type":"shape","id":"843f5766-31d9-4280-a669-00226bb12ba8","elementConfiguration":{"binding":"{{FormatDateTime(Form.Date,Translate(\"DateFormat\"),DocumentLanguage)}}","type":"text","disableUpdates":false}},{"type":"shape","id":"9b9e4f3c-de31-4236-8ed4-5b99f4d3cf2e","elementConfiguration":{"width":"{{UserProfile.Department.REFDepartmentLogo.WidthPNGPPTFooter}}","height":"{{UserProfile.Department.REFDepartmentLogo.HeightPNGPPTFooter}}","image":"{{UserProfile.Department.REFDepartmentLogo.ImagePNG}}","visibility":"{{IfElse(Form.FooterLogo, VisibilityType.Visible,VisibilityType.Hidden)}}","type":"image","disableUpdates":false}},{"type":"shape","id":"75162e3e-ae53-4b5e-99da-7a45748d34cc","elementConfiguration":{"binding":"{{Form.Footer}}","type":"text","disableUpdates":false}},{"type":"shape","id":"4b457ff6-1749-4ff7-9ec1-d06b95bd97c4","elementConfiguration":{"binding":"{{UserProfile.Department.DepartmentName}}","visibility":"{{IfElse(Form.FooterLogo, VisibilityType.Hidden,VisibilityType.Visible)}}","type":"text","disableUpdates":false}},{"type":"shape","id":"595e50e6-f562-4e70-8412-9b3e58d54d40","elementConfiguration":{"width":"{{UserProfile.Department.REFDepartmentLogo.WidthPNGPPT}}","height":"{{UserProfile.Department.REFDepartmentLogo.HeightPNGPPT}}","image":"{{UserProfile.Department.REFDepartmentLogo.ImagePNG}}","type":"image","disableUpdates":false}},{"type":"shape","id":"987706d0-0020-48f8-abb7-fa71e92ba907","elementConfiguration":{"binding":"{{FormatDateTime(Form.Date,Translate(\"DateFormat\"),DocumentLanguage)}}","type":"text","disableUpdates":false}},{"type":"shape","id":"18680601-61d8-4c65-b887-d43faff0f7e7","elementConfiguration":{"width":"{{UserProfile.Department.REFDepartmentLogo.WidthPNGPPT}}","height":"{{UserProfile.Department.REFDepartmentLogo.HeightPNGPPT}}","image":"{{UserProfile.Department.REFDepartmentLogo.ImagePNG}}","type":"image","disableUpdates":false}},{"type":"shape","id":"889eed5e-adc6-4545-a320-e60e7fe89049","elementConfiguration":{"binding":"{{FormatDateTime(Form.Date,Translate(\"DateFormat\"),DocumentLanguage)}}","type":"text","disableUpdates":false}},{"type":"shape","id":"3f852e2a-90cd-405b-aa63-881f2da03bb5","elementConfiguration":{"width":"{{UserProfile.Department.REFDepartmentLogo.WidthPNGPPTFooter}}","height":"{{UserProfile.Department.REFDepartmentLogo.HeightPNGPPTFooter}}","image":"{{UserProfile.Department.REFDepartmentLogo.ImagePNG}}","visibility":"{{IfElse(Form.FooterLogo, VisibilityType.Visible,VisibilityType.Hidden)}}","type":"image","disableUpdates":false}},{"type":"shape","id":"a606881e-514e-4f57-b14a-3e310a69b4b5","elementConfiguration":{"binding":"{{Form.Footer}}","type":"text","disableUpdates":false}},{"type":"shape","id":"d89fcdf5-4b31-4eed-a6ec-a34b7588e3dc","elementConfiguration":{"binding":"{{UserProfile.Department.DepartmentName}}","visibility":"{{IfElse(Form.FooterLogo, VisibilityType.Hidden,VisibilityType.Visible)}}","type":"text","disableUpdates":false}},{"type":"shape","id":"e4895852-1c5c-4754-a233-3eec028fd2a8","elementConfiguration":{"binding":"{{FormatDateTime(Form.Date,Translate(\"DateFormat\"),DocumentLanguage)}}","type":"text","disableUpdates":false}},{"type":"shape","id":"d621d8b6-cd2e-463b-982e-d95c5f8a82fb","elementConfiguration":{"width":"{{UserProfile.Department.REFDepartmentLogo.WidthPNGPPTFooter}}","height":"{{UserProfile.Department.REFDepartmentLogo.HeightPNGPPTFooter}}","image":"{{UserProfile.Department.REFDepartmentLogo.ImagePNG}}","visibility":"{{IfElse(Form.FooterLogo, VisibilityType.Visible,VisibilityType.Hidden)}}","type":"image","disableUpdates":false}},{"type":"shape","id":"65b937f8-b6ed-482d-9fcb-89e2ad98182a","elementConfiguration":{"binding":"{{Form.Footer}}","type":"text","disableUpdates":false}},{"type":"shape","id":"8e41931c-7f95-42d4-bfa3-9c5f04293069","elementConfiguration":{"binding":"{{UserProfile.Department.DepartmentName}}","visibility":"{{IfElse(Form.FooterLogo, VisibilityType.Hidden,VisibilityType.Visible)}}","type":"text","disableUpdates":false}},{"type":"shape","id":"313b8357-6b18-490c-9533-a6c0ee071962","elementConfiguration":{"binding":"{{FormatDateTime(Form.Date,Translate(\"DateFormat\"),DocumentLanguage)}}","type":"text","disableUpdates":false}},{"type":"shape","id":"69582c92-e5c7-4749-97ef-47cc4b58fa8b","elementConfiguration":{"binding":"{{FormatDateTime(Form.Date,Translate(\"DateFormat\"),DocumentLanguage)}}","type":"text","disableUpdates":false}},{"type":"shape","id":"4ee707e9-0b9f-42e6-bfac-8cfa418e9d62","elementConfiguration":{"binding":"{{Form.Footer}}","type":"text","disableUpdates":false}},{"type":"shape","id":"b710521b-d63f-429f-a075-a52a6cb7c897","elementConfiguration":{"width":"{{UserProfile.Department.REFDepartmentLogo.WidthPNGPPTFooter}}","height":"{{UserProfile.Department.REFDepartmentLogo.HeightPNGPPTFooter}}","image":"{{UserProfile.Department.REFDepartmentLogo.ImagePNG}}","visibility":"{{IfElse(Form.FooterLogo, VisibilityType.Visible,VisibilityType.Hidden)}}","type":"image","disableUpdates":false}},{"type":"shape","id":"4c8a9ee4-f540-4aa0-9380-f692b4e2dcc6","elementConfiguration":{"binding":"{{UserProfile.Department.DepartmentName}}","visibility":"{{IfElse(Form.FooterLogo, VisibilityType.Hidden,VisibilityType.Visible)}}","type":"text","disableUpdates":false}},{"type":"shape","id":"9c2bec1f-485e-44d6-987c-4c2a62826230","elementConfiguration":{"binding":"{{FormatDateTime(Form.Date,Translate(\"DateFormat\"),DocumentLanguage)}}","type":"text","disableUpdates":false}},{"type":"shape","id":"965f1849-534b-4cf0-ad65-b946ad9126d8","elementConfiguration":{"width":"{{UserProfile.Department.REFDepartmentLogo.WidthPNGPPTFooter}}","height":"{{UserProfile.Department.REFDepartmentLogo.HeightPNGPPTFooter}}","image":"{{UserProfile.Department.REFDepartmentLogo.ImagePNG}}","visibility":"{{IfElse(Form.FooterLogo, VisibilityType.Visible,VisibilityType.Hidden)}}","type":"image","disableUpdates":false}},{"type":"shape","id":"73b120c8-aa6c-4644-86bc-360261a349b9","elementConfiguration":{"binding":"{{Form.Footer}}","type":"text","disableUpdates":false}},{"type":"shape","id":"297fab75-6aaa-4b1a-95bb-193250870530","elementConfiguration":{"binding":"{{UserProfile.Department.DepartmentName}}","visibility":"{{IfElse(Form.FooterLogo, VisibilityType.Hidden,VisibilityType.Visible)}}","type":"text","disableUpdates":false}}],"transformationConfigurations":[{"language":"{{UserProfile.DocumentLanguage.Language}}","disableUpdates":false,"type":"proofingLanguage"},{"propertyName":"creator","propertyValue":"{{UserProfile.FirstName}} {{UserProfile.LastName}}","disableUpdates":false,"type":"documentProperty"},{"propertyName":"title","propertyValue":"Presentation - University of St.Gallen","disableUpdates":false,"type":"documentProperty"}],"templateName":"UNISG Präsentation","templateDescription":"","enableDocumentContentUpdater":true,"version":"2.0"}]]></TemplafyTemplateConfiguration>
-</file>
-
-<file path=customXml/item21.xml><?xml version="1.0" encoding="utf-8"?>
-<TemplafySlideFormConfiguration><![CDATA[{"formFields":[],"formDataEntries":[]}]]></TemplafySlideFormConfiguration>
-</file>
-
-<file path=customXml/item22.xml><?xml version="1.0" encoding="utf-8"?>
-<TemplafySlideFormConfiguration><![CDATA[{"formFields":[{"required":true,"shareValue":false,"type":"datePicker","name":"Date","label":"Datum"},{"required":false,"placeholder":"","lines":1,"shareValue":false,"type":"textBox","name":"Footer","label":"Fusszeile"},{"defaultValue":{"fixedValue":true},"shareValue":false,"type":"checkBox","name":"FooterLogo","label":"mit Logo in der Fusszeile"}],"formDataEntries":[]}]]></TemplafySlideFormConfiguration>
-</file>
-
-<file path=customXml/item23.xml><?xml version="1.0" encoding="utf-8"?>
-<TemplafySlideTemplateConfiguration><![CDATA[{"slideVersion":1,"isValidatorEnabled":false,"isLocked":false,"elementsMetadata":[{"type":"shape","elementConfiguration":{"width":"{{UserProfile.Department.REFDepartmentLogo.WidthPNGPPT}}","height":"{{UserProfile.Department.REFDepartmentLogo.HeightPNGPPT}}","image":"{{UserProfile.Department.REFDepartmentLogo.ImagePNG}}","type":"image","disableUpdates":false}},{"type":"shape","elementConfiguration":{"binding":"{{UserProfile.Department.DepartmentName}} \n{{UserProfile.Department.DepartmentStreet}} {{UserProfile.Department.DepartmentStreetNumber}} \n{{UserProfile.Department.DepartmentPOBox}} {{UserProfile.Department.DepartmentCity}} \n{{UserProfile.Department.DepartmentCountry}} \n{{UserProfile.Department.DepartmentWebsite}}","type":"text","disableUpdates":false}}],"slideId":"637750113834283378","enableDocumentContentUpdater":true,"version":"2.0"}]]></TemplafySlideTemplateConfiguration>
-</file>
-
-<file path=customXml/item24.xml><?xml version="1.0" encoding="utf-8"?>
-<TemplafySlideTemplateConfiguration><![CDATA[{"slideVersion":1,"isValidatorEnabled":false,"isLocked":false,"elementsMetadata":[],"slideId":"637750113834254135","enableDocumentContentUpdater":true,"version":"2.0"}]]></TemplafySlideTemplateConfiguration>
-</file>
-
-<file path=customXml/item25.xml><?xml version="1.0" encoding="utf-8"?>
-<TemplafySlideFormConfiguration><![CDATA[{"formFields":[{"required":true,"shareValue":false,"type":"datePicker","name":"Date","label":"Datum"},{"required":false,"placeholder":"","lines":1,"shareValue":false,"type":"textBox","name":"Footer","label":"Fusszeile"},{"defaultValue":{"fixedValue":true},"shareValue":false,"type":"checkBox","name":"FooterLogo","label":"mit Logo in der Fusszeile"}],"formDataEntries":[]}]]></TemplafySlideFormConfiguration>
-</file>
-
-<file path=customXml/item26.xml><?xml version="1.0" encoding="utf-8"?>
-<TemplafySlideFormConfiguration><![CDATA[{"formFields":[],"formDataEntries":[]}]]></TemplafySlideFormConfiguration>
-</file>
-
-<file path=customXml/item27.xml><?xml version="1.0" encoding="utf-8"?>
+<file path=customXml/item10.xml><?xml version="1.0" encoding="utf-8"?>
 <?mso-contentType ?>
 <FormTemplates xmlns="http://schemas.microsoft.com/sharepoint/v3/contenttype/forms">
   <Display>DocumentLibraryForm</Display>
@@ -16387,31 +16345,51 @@
 </FormTemplates>
 </file>
 
-<file path=customXml/item28.xml><?xml version="1.0" encoding="utf-8"?>
-<TemplafySlideFormConfiguration><![CDATA[{"formFields":[],"formDataEntries":[]}]]></TemplafySlideFormConfiguration>
-</file>
-
-<file path=customXml/item29.xml><?xml version="1.0" encoding="utf-8"?>
+<file path=customXml/item11.xml><?xml version="1.0" encoding="utf-8"?>
+<TemplafySlideTemplateConfiguration><![CDATA[{"slideVersion":1,"isValidatorEnabled":false,"isLocked":false,"elementsMetadata":[],"slideId":"637750113834122525","enableDocumentContentUpdater":true,"version":"2.0"}]]></TemplafySlideTemplateConfiguration>
+</file>
+
+<file path=customXml/item12.xml><?xml version="1.0" encoding="utf-8"?>
 <TemplafySlideFormConfiguration><![CDATA[{"formFields":[{"required":true,"shareValue":false,"type":"datePicker","name":"Date","label":"Datum"},{"required":false,"placeholder":"","lines":1,"shareValue":false,"type":"textBox","name":"Footer","label":"Fusszeile"},{"defaultValue":{"fixedValue":true},"shareValue":false,"type":"checkBox","name":"FooterLogo","label":"mit Logo in der Fusszeile"}],"formDataEntries":[]}]]></TemplafySlideFormConfiguration>
 </file>
 
-<file path=customXml/item3.xml><?xml version="1.0" encoding="utf-8"?>
+<file path=customXml/item13.xml><?xml version="1.0" encoding="utf-8"?>
+<TemplafySlideTemplateConfiguration><![CDATA[{"slideVersion":1,"isValidatorEnabled":false,"isLocked":false,"elementsMetadata":[{"type":"shape","elementConfiguration":{"binding":"{{FormatDateTime(Form.Date,Translate(\"DateFormat\"),DocumentLanguage)}}","type":"text","disableUpdates":false}},{"type":"shape","elementConfiguration":{"width":"{{UserProfile.Department.REFDepartmentLogo.WidthPNGPPTFooter}}","height":"{{UserProfile.Department.REFDepartmentLogo.HeightPNGPPTFooter}}","image":"{{UserProfile.Department.REFDepartmentLogo.ImagePNG}}","visibility":"{{IfElse(Form.FooterLogo, VisibilityType.Visible,VisibilityType.Hidden)}}","type":"image","disableUpdates":false}},{"type":"shape","elementConfiguration":{"binding":"{{Form.Footer}}","type":"text","disableUpdates":false}},{"type":"shape","elementConfiguration":{"binding":"{{UserProfile.Department.DepartmentName}}","visibility":"{{IfElse(Form.FooterLogo, VisibilityType.Hidden,VisibilityType.Visible)}}","type":"text","disableUpdates":false}}],"slideId":"637750113834237210","enableDocumentContentUpdater":true,"version":"2.0"}]]></TemplafySlideTemplateConfiguration>
+</file>
+
+<file path=customXml/item14.xml><?xml version="1.0" encoding="utf-8"?>
 <TemplafySlideFormConfiguration><![CDATA[{"formFields":[{"required":true,"shareValue":false,"type":"datePicker","name":"Date","label":"Datum"},{"required":false,"placeholder":"","lines":1,"shareValue":false,"type":"textBox","name":"Footer","label":"Fusszeile"},{"defaultValue":{"fixedValue":true},"shareValue":false,"type":"checkBox","name":"FooterLogo","label":"mit Logo in der Fusszeile"}],"formDataEntries":[]}]]></TemplafySlideFormConfiguration>
 </file>
 
-<file path=customXml/item30.xml><?xml version="1.0" encoding="utf-8"?>
-<TemplafySlideTemplateConfiguration><![CDATA[{"slideVersion":1,"isValidatorEnabled":false,"isLocked":false,"elementsMetadata":[],"slideId":"637750113834122525","enableDocumentContentUpdater":true,"version":"2.0"}]]></TemplafySlideTemplateConfiguration>
-</file>
-
-<file path=customXml/item31.xml><?xml version="1.0" encoding="utf-8"?>
-<TemplafySlideFormConfiguration><![CDATA[{"formFields":[],"formDataEntries":[]}]]></TemplafySlideFormConfiguration>
-</file>
-
-<file path=customXml/item32.xml><?xml version="1.0" encoding="utf-8"?>
-<TemplafySlideTemplateConfiguration><![CDATA[{"slideVersion":1,"isValidatorEnabled":false,"isLocked":false,"elementsMetadata":[{"type":"shape","elementConfiguration":{"binding":"{{FormatDateTime(Form.Date,Translate(\"DateFormat\"),DocumentLanguage)}}","type":"text","disableUpdates":false}},{"type":"shape","elementConfiguration":{"width":"{{UserProfile.Department.REFDepartmentLogo.WidthPNGPPTFooter}}","height":"{{UserProfile.Department.REFDepartmentLogo.HeightPNGPPTFooter}}","image":"{{UserProfile.Department.REFDepartmentLogo.ImagePNG}}","visibility":"{{IfElse(Form.FooterLogo, VisibilityType.Visible,VisibilityType.Hidden)}}","type":"image","disableUpdates":false}},{"type":"shape","elementConfiguration":{"binding":"{{Form.Footer}}","type":"text","disableUpdates":false}},{"type":"shape","elementConfiguration":{"binding":"{{UserProfile.Department.DepartmentName}}","visibility":"{{IfElse(Form.FooterLogo, VisibilityType.Hidden,VisibilityType.Visible)}}","type":"text","disableUpdates":false}}],"slideId":"637750113834231105","enableDocumentContentUpdater":true,"version":"2.0"}]]></TemplafySlideTemplateConfiguration>
-</file>
-
-<file path=customXml/item33.xml><?xml version="1.0" encoding="utf-8"?>
+<file path=customXml/item15.xml><?xml version="1.0" encoding="utf-8"?>
+<TemplafySlideFormConfiguration><![CDATA[{"formFields":[{"required":true,"shareValue":false,"type":"datePicker","name":"Date","label":"Datum"},{"required":false,"placeholder":"","lines":1,"shareValue":false,"type":"textBox","name":"Footer","label":"Fusszeile"},{"defaultValue":{"fixedValue":true},"shareValue":false,"type":"checkBox","name":"FooterLogo","label":"mit Logo in der Fusszeile"}],"formDataEntries":[]}]]></TemplafySlideFormConfiguration>
+</file>
+
+<file path=customXml/item16.xml><?xml version="1.0" encoding="utf-8"?>
+<TemplafySlideTemplateConfiguration><![CDATA[{"slideVersion":1,"isValidatorEnabled":false,"isLocked":false,"elementsMetadata":[{"type":"shape","elementConfiguration":{"binding":"{{FormatDateTime(Form.Date,Translate(\"DateFormat\"),DocumentLanguage)}}","type":"text","disableUpdates":false}},{"type":"shape","elementConfiguration":{"width":"{{UserProfile.Department.REFDepartmentLogo.WidthPNGPPTFooter}}","height":"{{UserProfile.Department.REFDepartmentLogo.HeightPNGPPTFooter}}","image":"{{UserProfile.Department.REFDepartmentLogo.ImagePNG}}","visibility":"{{IfElse(Form.FooterLogo, VisibilityType.Visible,VisibilityType.Hidden)}}","type":"image","disableUpdates":false}},{"type":"shape","elementConfiguration":{"binding":"{{Form.Footer}}","type":"text","disableUpdates":false}},{"type":"shape","elementConfiguration":{"binding":"{{UserProfile.Department.DepartmentName}}","visibility":"{{IfElse(Form.FooterLogo, VisibilityType.Hidden,VisibilityType.Visible)}}","type":"text","disableUpdates":false}}],"slideId":"637750113834135648","enableDocumentContentUpdater":true,"version":"2.0"}]]></TemplafySlideTemplateConfiguration>
+</file>
+
+<file path=customXml/item17.xml><?xml version="1.0" encoding="utf-8"?>
+<TemplafySlideFormConfiguration><![CDATA[{"formFields":[{"required":true,"shareValue":false,"type":"datePicker","name":"Date","label":"Datum"},{"required":false,"placeholder":"","lines":1,"shareValue":false,"type":"textBox","name":"Footer","label":"Fusszeile"},{"defaultValue":{"fixedValue":true},"shareValue":false,"type":"checkBox","name":"FooterLogo","label":"mit Logo in der Fusszeile"}],"formDataEntries":[]}]]></TemplafySlideFormConfiguration>
+</file>
+
+<file path=customXml/item18.xml><?xml version="1.0" encoding="utf-8"?>
+<TemplafySlideTemplateConfiguration><![CDATA[{"slideVersion":1,"isValidatorEnabled":false,"isLocked":false,"elementsMetadata":[],"slideId":"637750113834125595","enableDocumentContentUpdater":true,"version":"2.0"}]]></TemplafySlideTemplateConfiguration>
+</file>
+
+<file path=customXml/item19.xml><?xml version="1.0" encoding="utf-8"?>
+<TemplafySlideFormConfiguration><![CDATA[{"formFields":[{"required":true,"shareValue":false,"type":"datePicker","name":"Date","label":"Datum"},{"required":false,"placeholder":"","lines":1,"shareValue":false,"type":"textBox","name":"Footer","label":"Fusszeile"},{"defaultValue":{"fixedValue":true},"shareValue":false,"type":"checkBox","name":"FooterLogo","label":"mit Logo in der Fusszeile"}],"formDataEntries":[]}]]></TemplafySlideFormConfiguration>
+</file>
+
+<file path=customXml/item2.xml><?xml version="1.0" encoding="utf-8"?>
+<TemplafySlideTemplateConfiguration><![CDATA[{"slideVersion":1,"isValidatorEnabled":false,"isLocked":false,"elementsMetadata":[],"slideId":"637750113834120761","enableDocumentContentUpdater":true,"version":"2.0"}]]></TemplafySlideTemplateConfiguration>
+</file>
+
+<file path=customXml/item20.xml><?xml version="1.0" encoding="utf-8"?>
+<TemplafySlideFormConfiguration><![CDATA[{"formFields":[{"required":true,"shareValue":false,"type":"datePicker","name":"Date","label":"Datum"},{"required":false,"placeholder":"","lines":1,"shareValue":false,"type":"textBox","name":"Footer","label":"Fusszeile"},{"defaultValue":{"fixedValue":true},"shareValue":false,"type":"checkBox","name":"FooterLogo","label":"mit Logo in der Fusszeile"}],"formDataEntries":[]}]]></TemplafySlideFormConfiguration>
+</file>
+
+<file path=customXml/item21.xml><?xml version="1.0" encoding="utf-8"?>
 <p:properties xmlns:p="http://schemas.microsoft.com/office/2006/metadata/properties" xmlns:xsi="http://www.w3.org/2001/XMLSchema-instance" xmlns:pc="http://schemas.microsoft.com/office/infopath/2007/PartnerControls">
   <documentManagement>
     <lcf76f155ced4ddcb4097134ff3c332f xmlns="07c8a24f-8b40-44ca-950f-ae5db2c4fa23">
@@ -16422,32 +16400,84 @@
 </p:properties>
 </file>
 
+<file path=customXml/item22.xml><?xml version="1.0" encoding="utf-8"?>
+<TemplafySlideTemplateConfiguration><![CDATA[{"slideVersion":1,"isValidatorEnabled":false,"isLocked":false,"elementsMetadata":[{"type":"shape","elementConfiguration":{"binding":"{{FormatDateTime(Form.Date,Translate(\"DateFormat\"),DocumentLanguage)}}","type":"text","disableUpdates":false}},{"type":"shape","elementConfiguration":{"width":"{{UserProfile.Department.REFDepartmentLogo.WidthPNGPPTFooter}}","height":"{{UserProfile.Department.REFDepartmentLogo.HeightPNGPPTFooter}}","image":"{{UserProfile.Department.REFDepartmentLogo.ImagePNG}}","visibility":"{{IfElse(Form.FooterLogo, VisibilityType.Visible,VisibilityType.Hidden)}}","type":"image","disableUpdates":false}},{"type":"shape","elementConfiguration":{"binding":"{{Form.Footer}}","type":"text","disableUpdates":false}},{"type":"shape","elementConfiguration":{"binding":"{{UserProfile.Department.DepartmentName}}","visibility":"{{IfElse(Form.FooterLogo, VisibilityType.Hidden,VisibilityType.Visible)}}","type":"text","disableUpdates":false}}],"slideId":"637750113834156510","enableDocumentContentUpdater":true,"version":"2.0"}]]></TemplafySlideTemplateConfiguration>
+</file>
+
+<file path=customXml/item23.xml><?xml version="1.0" encoding="utf-8"?>
+<TemplafySlideTemplateConfiguration><![CDATA[{"slideVersion":1,"isValidatorEnabled":false,"isLocked":false,"elementsMetadata":[{"type":"shape","elementConfiguration":{"width":"{{UserProfile.Department.REFDepartmentLogo.WidthPNGPPT}}","height":"{{UserProfile.Department.REFDepartmentLogo.HeightPNGPPT}}","image":"{{UserProfile.Department.REFDepartmentLogo.ImagePNG}}","type":"image","disableUpdates":false}}],"slideId":"637750113834107608","enableDocumentContentUpdater":true,"version":"2.0"}]]></TemplafySlideTemplateConfiguration>
+</file>
+
+<file path=customXml/item24.xml><?xml version="1.0" encoding="utf-8"?>
+<TemplafyTemplateConfiguration><![CDATA[{"elementsMetadata":[{"type":"shape","id":"56ce75b3-422e-4bea-941a-dc00172cd73f","elementConfiguration":{"binding":"{{FormatDateTime(Form.Date,Translate(\"DateFormat\"),DocumentLanguage)}}","type":"text","disableUpdates":false}},{"type":"shape","id":"ff4a6372-22c5-4dd4-8428-3be358c8e860","elementConfiguration":{"width":"{{UserProfile.Department.REFDepartmentLogo.WidthPNGPPTFooter}}","height":"{{UserProfile.Department.REFDepartmentLogo.HeightPNGPPTFooter}}","image":"{{UserProfile.Department.REFDepartmentLogo.ImagePNG}}","visibility":"{{IfElse(Form.FooterLogo, VisibilityType.Visible,VisibilityType.Hidden)}}","type":"image","disableUpdates":false}},{"type":"shape","id":"802336ec-566b-4a3d-896e-7cccb9fe246d","elementConfiguration":{"binding":"{{Form.Footer}}","type":"text","disableUpdates":false}},{"type":"shape","id":"a2d41398-5271-4cc9-b1dd-66e099bdef04","elementConfiguration":{"binding":"{{UserProfile.Department.DepartmentName}}","visibility":"{{IfElse(Form.FooterLogo, VisibilityType.Hidden,VisibilityType.Visible)}}","type":"text","disableUpdates":false}},{"type":"shape","id":"a40dda36-18a9-40da-9166-9a47a867251f","elementConfiguration":{"width":"{{UserProfile.Department.REFDepartmentLogo.WidthPNGPPT}}","height":"{{UserProfile.Department.REFDepartmentLogo.HeightPNGPPT}}","image":"{{UserProfile.Department.REFDepartmentLogo.ImagePNG}}","type":"image","disableUpdates":false}},{"type":"shape","id":"239d4f55-1bac-4607-8b11-947c6c77cd46","elementConfiguration":{"binding":"{{UserProfile.Department.DepartmentName}} \n{{UserProfile.Department.DepartmentStreet}} {{UserProfile.Department.DepartmentStreetNumber}} \n{{UserProfile.Department.DepartmentPOBox}} {{UserProfile.Department.DepartmentCity}} \n{{UserProfile.Department.DepartmentCountry}} \n{{UserProfile.Department.DepartmentWebsite}}","type":"text","disableUpdates":false}},{"type":"shape","id":"4e7e3c8a-6e06-4468-a348-0ba7b10c4800","elementConfiguration":{"width":"{{UserProfile.Department.REFDepartmentLogo.WidthPNGPPT}}","height":"{{UserProfile.Department.REFDepartmentLogo.HeightPNGPPT}}","image":"{{UserProfile.Department.REFDepartmentLogo.ImagePNG}}","type":"image","disableUpdates":false}},{"type":"shape","id":"843f5766-31d9-4280-a669-00226bb12ba8","elementConfiguration":{"binding":"{{FormatDateTime(Form.Date,Translate(\"DateFormat\"),DocumentLanguage)}}","type":"text","disableUpdates":false}},{"type":"shape","id":"9b9e4f3c-de31-4236-8ed4-5b99f4d3cf2e","elementConfiguration":{"width":"{{UserProfile.Department.REFDepartmentLogo.WidthPNGPPTFooter}}","height":"{{UserProfile.Department.REFDepartmentLogo.HeightPNGPPTFooter}}","image":"{{UserProfile.Department.REFDepartmentLogo.ImagePNG}}","visibility":"{{IfElse(Form.FooterLogo, VisibilityType.Visible,VisibilityType.Hidden)}}","type":"image","disableUpdates":false}},{"type":"shape","id":"75162e3e-ae53-4b5e-99da-7a45748d34cc","elementConfiguration":{"binding":"{{Form.Footer}}","type":"text","disableUpdates":false}},{"type":"shape","id":"4b457ff6-1749-4ff7-9ec1-d06b95bd97c4","elementConfiguration":{"binding":"{{UserProfile.Department.DepartmentName}}","visibility":"{{IfElse(Form.FooterLogo, VisibilityType.Hidden,VisibilityType.Visible)}}","type":"text","disableUpdates":false}},{"type":"shape","id":"595e50e6-f562-4e70-8412-9b3e58d54d40","elementConfiguration":{"width":"{{UserProfile.Department.REFDepartmentLogo.WidthPNGPPT}}","height":"{{UserProfile.Department.REFDepartmentLogo.HeightPNGPPT}}","image":"{{UserProfile.Department.REFDepartmentLogo.ImagePNG}}","type":"image","disableUpdates":false}},{"type":"shape","id":"987706d0-0020-48f8-abb7-fa71e92ba907","elementConfiguration":{"binding":"{{FormatDateTime(Form.Date,Translate(\"DateFormat\"),DocumentLanguage)}}","type":"text","disableUpdates":false}},{"type":"shape","id":"18680601-61d8-4c65-b887-d43faff0f7e7","elementConfiguration":{"width":"{{UserProfile.Department.REFDepartmentLogo.WidthPNGPPT}}","height":"{{UserProfile.Department.REFDepartmentLogo.HeightPNGPPT}}","image":"{{UserProfile.Department.REFDepartmentLogo.ImagePNG}}","type":"image","disableUpdates":false}},{"type":"shape","id":"889eed5e-adc6-4545-a320-e60e7fe89049","elementConfiguration":{"binding":"{{FormatDateTime(Form.Date,Translate(\"DateFormat\"),DocumentLanguage)}}","type":"text","disableUpdates":false}},{"type":"shape","id":"3f852e2a-90cd-405b-aa63-881f2da03bb5","elementConfiguration":{"width":"{{UserProfile.Department.REFDepartmentLogo.WidthPNGPPTFooter}}","height":"{{UserProfile.Department.REFDepartmentLogo.HeightPNGPPTFooter}}","image":"{{UserProfile.Department.REFDepartmentLogo.ImagePNG}}","visibility":"{{IfElse(Form.FooterLogo, VisibilityType.Visible,VisibilityType.Hidden)}}","type":"image","disableUpdates":false}},{"type":"shape","id":"a606881e-514e-4f57-b14a-3e310a69b4b5","elementConfiguration":{"binding":"{{Form.Footer}}","type":"text","disableUpdates":false}},{"type":"shape","id":"d89fcdf5-4b31-4eed-a6ec-a34b7588e3dc","elementConfiguration":{"binding":"{{UserProfile.Department.DepartmentName}}","visibility":"{{IfElse(Form.FooterLogo, VisibilityType.Hidden,VisibilityType.Visible)}}","type":"text","disableUpdates":false}},{"type":"shape","id":"e4895852-1c5c-4754-a233-3eec028fd2a8","elementConfiguration":{"binding":"{{FormatDateTime(Form.Date,Translate(\"DateFormat\"),DocumentLanguage)}}","type":"text","disableUpdates":false}},{"type":"shape","id":"d621d8b6-cd2e-463b-982e-d95c5f8a82fb","elementConfiguration":{"width":"{{UserProfile.Department.REFDepartmentLogo.WidthPNGPPTFooter}}","height":"{{UserProfile.Department.REFDepartmentLogo.HeightPNGPPTFooter}}","image":"{{UserProfile.Department.REFDepartmentLogo.ImagePNG}}","visibility":"{{IfElse(Form.FooterLogo, VisibilityType.Visible,VisibilityType.Hidden)}}","type":"image","disableUpdates":false}},{"type":"shape","id":"65b937f8-b6ed-482d-9fcb-89e2ad98182a","elementConfiguration":{"binding":"{{Form.Footer}}","type":"text","disableUpdates":false}},{"type":"shape","id":"8e41931c-7f95-42d4-bfa3-9c5f04293069","elementConfiguration":{"binding":"{{UserProfile.Department.DepartmentName}}","visibility":"{{IfElse(Form.FooterLogo, VisibilityType.Hidden,VisibilityType.Visible)}}","type":"text","disableUpdates":false}},{"type":"shape","id":"313b8357-6b18-490c-9533-a6c0ee071962","elementConfiguration":{"binding":"{{FormatDateTime(Form.Date,Translate(\"DateFormat\"),DocumentLanguage)}}","type":"text","disableUpdates":false}},{"type":"shape","id":"69582c92-e5c7-4749-97ef-47cc4b58fa8b","elementConfiguration":{"binding":"{{FormatDateTime(Form.Date,Translate(\"DateFormat\"),DocumentLanguage)}}","type":"text","disableUpdates":false}},{"type":"shape","id":"4ee707e9-0b9f-42e6-bfac-8cfa418e9d62","elementConfiguration":{"binding":"{{Form.Footer}}","type":"text","disableUpdates":false}},{"type":"shape","id":"b710521b-d63f-429f-a075-a52a6cb7c897","elementConfiguration":{"width":"{{UserProfile.Department.REFDepartmentLogo.WidthPNGPPTFooter}}","height":"{{UserProfile.Department.REFDepartmentLogo.HeightPNGPPTFooter}}","image":"{{UserProfile.Department.REFDepartmentLogo.ImagePNG}}","visibility":"{{IfElse(Form.FooterLogo, VisibilityType.Visible,VisibilityType.Hidden)}}","type":"image","disableUpdates":false}},{"type":"shape","id":"4c8a9ee4-f540-4aa0-9380-f692b4e2dcc6","elementConfiguration":{"binding":"{{UserProfile.Department.DepartmentName}}","visibility":"{{IfElse(Form.FooterLogo, VisibilityType.Hidden,VisibilityType.Visible)}}","type":"text","disableUpdates":false}},{"type":"shape","id":"9c2bec1f-485e-44d6-987c-4c2a62826230","elementConfiguration":{"binding":"{{FormatDateTime(Form.Date,Translate(\"DateFormat\"),DocumentLanguage)}}","type":"text","disableUpdates":false}},{"type":"shape","id":"965f1849-534b-4cf0-ad65-b946ad9126d8","elementConfiguration":{"width":"{{UserProfile.Department.REFDepartmentLogo.WidthPNGPPTFooter}}","height":"{{UserProfile.Department.REFDepartmentLogo.HeightPNGPPTFooter}}","image":"{{UserProfile.Department.REFDepartmentLogo.ImagePNG}}","visibility":"{{IfElse(Form.FooterLogo, VisibilityType.Visible,VisibilityType.Hidden)}}","type":"image","disableUpdates":false}},{"type":"shape","id":"73b120c8-aa6c-4644-86bc-360261a349b9","elementConfiguration":{"binding":"{{Form.Footer}}","type":"text","disableUpdates":false}},{"type":"shape","id":"297fab75-6aaa-4b1a-95bb-193250870530","elementConfiguration":{"binding":"{{UserProfile.Department.DepartmentName}}","visibility":"{{IfElse(Form.FooterLogo, VisibilityType.Hidden,VisibilityType.Visible)}}","type":"text","disableUpdates":false}}],"transformationConfigurations":[{"language":"{{UserProfile.DocumentLanguage.Language}}","disableUpdates":false,"type":"proofingLanguage"},{"propertyName":"creator","propertyValue":"{{UserProfile.FirstName}} {{UserProfile.LastName}}","disableUpdates":false,"type":"documentProperty"},{"propertyName":"title","propertyValue":"Presentation - University of St.Gallen","disableUpdates":false,"type":"documentProperty"}],"templateName":"UNISG Präsentation","templateDescription":"","enableDocumentContentUpdater":true,"version":"2.0"}]]></TemplafyTemplateConfiguration>
+</file>
+
+<file path=customXml/item25.xml><?xml version="1.0" encoding="utf-8"?>
+<TemplafySlideTemplateConfiguration><![CDATA[{"slideVersion":1,"isValidatorEnabled":false,"isLocked":false,"elementsMetadata":[],"slideId":"637750113834253485","enableDocumentContentUpdater":true,"version":"2.0"}]]></TemplafySlideTemplateConfiguration>
+</file>
+
+<file path=customXml/item26.xml><?xml version="1.0" encoding="utf-8"?>
+<TemplafySlideTemplateConfiguration><![CDATA[{"slideVersion":1,"isValidatorEnabled":false,"isLocked":false,"elementsMetadata":[{"type":"shape","elementConfiguration":{"binding":"{{FormatDateTime(Form.Date,Translate(\"DateFormat\"),DocumentLanguage)}}","type":"text","disableUpdates":false}},{"type":"shape","elementConfiguration":{"width":"{{UserProfile.Department.REFDepartmentLogo.WidthPNGPPTFooter}}","height":"{{UserProfile.Department.REFDepartmentLogo.HeightPNGPPTFooter}}","image":"{{UserProfile.Department.REFDepartmentLogo.ImagePNG}}","visibility":"{{IfElse(Form.FooterLogo, VisibilityType.Visible,VisibilityType.Hidden)}}","type":"image","disableUpdates":false}},{"type":"shape","elementConfiguration":{"binding":"{{Form.Footer}}","type":"text","disableUpdates":false}},{"type":"shape","elementConfiguration":{"binding":"{{UserProfile.Department.DepartmentName}}","visibility":"{{IfElse(Form.FooterLogo, VisibilityType.Hidden,VisibilityType.Visible)}}","type":"text","disableUpdates":false}}],"slideId":"637750113834113416","enableDocumentContentUpdater":true,"version":"2.0"}]]></TemplafySlideTemplateConfiguration>
+</file>
+
+<file path=customXml/item27.xml><?xml version="1.0" encoding="utf-8"?>
+<TemplafySlideFormConfiguration><![CDATA[{"formFields":[{"required":true,"shareValue":false,"type":"datePicker","name":"Date","label":"Datum"},{"required":false,"placeholder":"","lines":1,"shareValue":false,"type":"textBox","name":"Footer","label":"Fusszeile"},{"defaultValue":{"fixedValue":true},"shareValue":false,"type":"checkBox","name":"FooterLogo","label":"mit Logo in der Fusszeile"}],"formDataEntries":[]}]]></TemplafySlideFormConfiguration>
+</file>
+
+<file path=customXml/item28.xml><?xml version="1.0" encoding="utf-8"?>
+<TemplafySlideFormConfiguration><![CDATA[{"formFields":[],"formDataEntries":[]}]]></TemplafySlideFormConfiguration>
+</file>
+
+<file path=customXml/item29.xml><?xml version="1.0" encoding="utf-8"?>
+<TemplafySlideFormConfiguration><![CDATA[{"formFields":[],"formDataEntries":[]}]]></TemplafySlideFormConfiguration>
+</file>
+
+<file path=customXml/item3.xml><?xml version="1.0" encoding="utf-8"?>
+<TemplafySlideTemplateConfiguration><![CDATA[{"slideVersion":1,"isValidatorEnabled":false,"isLocked":false,"elementsMetadata":[{"type":"shape","elementConfiguration":{"binding":"{{FormatDateTime(Form.Date,Translate(\"DateFormat\"),DocumentLanguage)}}","type":"text","disableUpdates":false}},{"type":"shape","elementConfiguration":{"width":"{{UserProfile.Department.REFDepartmentLogo.WidthPNGPPTFooter}}","height":"{{UserProfile.Department.REFDepartmentLogo.HeightPNGPPTFooter}}","image":"{{UserProfile.Department.REFDepartmentLogo.ImagePNG}}","visibility":"{{IfElse(Form.FooterLogo, VisibilityType.Visible,VisibilityType.Hidden)}}","type":"image","disableUpdates":false}},{"type":"shape","elementConfiguration":{"binding":"{{Form.Footer}}","type":"text","disableUpdates":false}},{"type":"shape","elementConfiguration":{"binding":"{{UserProfile.Department.DepartmentName}}","visibility":"{{IfElse(Form.FooterLogo, VisibilityType.Hidden,VisibilityType.Visible)}}","type":"text","disableUpdates":false}}],"slideId":"637750113834231105","enableDocumentContentUpdater":true,"version":"2.0"}]]></TemplafySlideTemplateConfiguration>
+</file>
+
+<file path=customXml/item30.xml><?xml version="1.0" encoding="utf-8"?>
+<TemplafySlideTemplateConfiguration><![CDATA[{"slideVersion":1,"isValidatorEnabled":false,"isLocked":false,"elementsMetadata":[{"type":"shape","elementConfiguration":{"width":"{{UserProfile.Department.REFDepartmentLogo.WidthPNGPPT}}","height":"{{UserProfile.Department.REFDepartmentLogo.HeightPNGPPT}}","image":"{{UserProfile.Department.REFDepartmentLogo.ImagePNG}}","type":"image","disableUpdates":false}},{"type":"shape","elementConfiguration":{"binding":"{{UserProfile.Department.DepartmentName}} \n{{UserProfile.Department.DepartmentStreet}} {{UserProfile.Department.DepartmentStreetNumber}} \n{{UserProfile.Department.DepartmentPOBox}} {{UserProfile.Department.DepartmentCity}} \n{{UserProfile.Department.DepartmentCountry}} \n{{UserProfile.Department.DepartmentWebsite}}","type":"text","disableUpdates":false}}],"slideId":"637750113834283378","enableDocumentContentUpdater":true,"version":"2.0"}]]></TemplafySlideTemplateConfiguration>
+</file>
+
+<file path=customXml/item31.xml><?xml version="1.0" encoding="utf-8"?>
+<TemplafySlideFormConfiguration><![CDATA[{"formFields":[],"formDataEntries":[]}]]></TemplafySlideFormConfiguration>
+</file>
+
+<file path=customXml/item32.xml><?xml version="1.0" encoding="utf-8"?>
+<TemplafySlideTemplateConfiguration><![CDATA[{"slideVersion":1,"isValidatorEnabled":false,"isLocked":false,"elementsMetadata":[{"type":"shape","elementConfiguration":{"width":"{{UserProfile.Department.REFDepartmentLogo.WidthPNGPPT}}","height":"{{UserProfile.Department.REFDepartmentLogo.HeightPNGPPT}}","image":"{{UserProfile.Department.REFDepartmentLogo.ImagePNG}}","type":"image","disableUpdates":false}}],"slideId":"637750113834106457","enableDocumentContentUpdater":true,"version":"2.0"}]]></TemplafySlideTemplateConfiguration>
+</file>
+
+<file path=customXml/item33.xml><?xml version="1.0" encoding="utf-8"?>
+<TemplafySlideTemplateConfiguration><![CDATA[{"slideVersion":1,"isValidatorEnabled":false,"isLocked":false,"elementsMetadata":[{"type":"shape","elementConfiguration":{"binding":"{{FormatDateTime(Form.Date,Translate(\"DateFormat\"),DocumentLanguage)}}","type":"text","disableUpdates":false}},{"type":"shape","elementConfiguration":{"width":"{{UserProfile.Department.REFDepartmentLogo.WidthPNGPPTFooter}}","height":"{{UserProfile.Department.REFDepartmentLogo.HeightPNGPPTFooter}}","image":"{{UserProfile.Department.REFDepartmentLogo.ImagePNG}}","visibility":"{{IfElse(Form.FooterLogo, VisibilityType.Visible,VisibilityType.Hidden)}}","type":"image","disableUpdates":false}},{"type":"shape","elementConfiguration":{"binding":"{{Form.Footer}}","type":"text","disableUpdates":false}},{"type":"shape","elementConfiguration":{"binding":"{{UserProfile.Department.DepartmentName}}","visibility":"{{IfElse(Form.FooterLogo, VisibilityType.Hidden,VisibilityType.Visible)}}","type":"text","disableUpdates":false}}],"slideId":"637750113834261908","enableDocumentContentUpdater":true,"version":"2.0"}]]></TemplafySlideTemplateConfiguration>
+</file>
+
 <file path=customXml/item34.xml><?xml version="1.0" encoding="utf-8"?>
+<TemplafySlideTemplateConfiguration><![CDATA[{"slideVersion":1,"isValidatorEnabled":false,"isLocked":false,"elementsMetadata":[{"type":"shape","elementConfiguration":{"binding":"{{FormatDateTime(Form.Date,Translate(\"DateFormat\"),DocumentLanguage)}}","type":"text","disableUpdates":false}},{"type":"shape","elementConfiguration":{"width":"{{UserProfile.Department.REFDepartmentLogo.WidthPNGPPTFooter}}","height":"{{UserProfile.Department.REFDepartmentLogo.HeightPNGPPTFooter}}","image":"{{UserProfile.Department.REFDepartmentLogo.ImagePNG}}","visibility":"{{IfElse(Form.FooterLogo, VisibilityType.Visible,VisibilityType.Hidden)}}","type":"image","disableUpdates":false}},{"type":"shape","elementConfiguration":{"binding":"{{Form.Footer}}","type":"text","disableUpdates":false}},{"type":"shape","elementConfiguration":{"binding":"{{UserProfile.Department.DepartmentName}}","visibility":"{{IfElse(Form.FooterLogo, VisibilityType.Hidden,VisibilityType.Visible)}}","type":"text","disableUpdates":false}}],"slideId":"637750113834257356","enableDocumentContentUpdater":true,"version":"2.0"}]]></TemplafySlideTemplateConfiguration>
+</file>
+
+<file path=customXml/item35.xml><?xml version="1.0" encoding="utf-8"?>
 <TemplafySlideFormConfiguration><![CDATA[{"formFields":[],"formDataEntries":[]}]]></TemplafySlideFormConfiguration>
 </file>
 
-<file path=customXml/item35.xml><?xml version="1.0" encoding="utf-8"?>
+<file path=customXml/item36.xml><?xml version="1.0" encoding="utf-8"?>
+<TemplafySlideTemplateConfiguration><![CDATA[{"slideVersion":1,"isValidatorEnabled":false,"isLocked":false,"elementsMetadata":[],"slideId":"637750113834267111","enableDocumentContentUpdater":true,"version":"2.0"}]]></TemplafySlideTemplateConfiguration>
+</file>
+
+<file path=customXml/item37.xml><?xml version="1.0" encoding="utf-8"?>
+<TemplafySlideFormConfiguration><![CDATA[{"formFields":[],"formDataEntries":[]}]]></TemplafySlideFormConfiguration>
+</file>
+
+<file path=customXml/item38.xml><?xml version="1.0" encoding="utf-8"?>
+<TemplafySlideFormConfiguration><![CDATA[{"formFields":[],"formDataEntries":[]}]]></TemplafySlideFormConfiguration>
+</file>
+
+<file path=customXml/item39.xml><?xml version="1.0" encoding="utf-8"?>
+<TemplafyFormConfiguration><![CDATA[{"formFields":[{"required":true,"shareValue":false,"type":"datePicker","name":"Date","label":"Datum"},{"required":false,"placeholder":"","lines":1,"shareValue":false,"type":"textBox","name":"Footer","label":"Fusszeile"},{"defaultValue":{"fixedValue":true},"shareValue":false,"type":"checkBox","name":"FooterLogo","label":"mit Logo in der Fusszeile"}],"formDataEntries":[{"name":"Date","value":"+Z5Mp3YA6oBTYCzRQ9X9ow=="},{"name":"FooterLogo","value":"iTzqZGj1P6MRGUQq8ahlhA=="}]}]]></TemplafyFormConfiguration>
+</file>
+
+<file path=customXml/item4.xml><?xml version="1.0" encoding="utf-8"?>
 <TemplafySlideFormConfiguration><![CDATA[{"formFields":[{"required":true,"shareValue":false,"type":"datePicker","name":"Date","label":"Datum"},{"required":false,"placeholder":"","lines":1,"shareValue":false,"type":"textBox","name":"Footer","label":"Fusszeile"},{"defaultValue":{"fixedValue":true},"shareValue":false,"type":"checkBox","name":"FooterLogo","label":"mit Logo in der Fusszeile"}],"formDataEntries":[]}]]></TemplafySlideFormConfiguration>
-</file>
-
-<file path=customXml/item36.xml><?xml version="1.0" encoding="utf-8"?>
-<TemplafySlideTemplateConfiguration><![CDATA[{"slideVersion":1,"isValidatorEnabled":false,"isLocked":false,"elementsMetadata":[{"type":"shape","elementConfiguration":{"width":"{{UserProfile.Department.REFDepartmentLogo.WidthPNGPPT}}","height":"{{UserProfile.Department.REFDepartmentLogo.HeightPNGPPT}}","image":"{{UserProfile.Department.REFDepartmentLogo.ImagePNG}}","type":"image","disableUpdates":false}}],"slideId":"637750113834106457","enableDocumentContentUpdater":true,"version":"2.0"}]]></TemplafySlideTemplateConfiguration>
-</file>
-
-<file path=customXml/item37.xml><?xml version="1.0" encoding="utf-8"?>
-<TemplafySlideFormConfiguration><![CDATA[{"formFields":[{"required":true,"shareValue":false,"type":"datePicker","name":"Date","label":"Datum"},{"required":false,"placeholder":"","lines":1,"shareValue":false,"type":"textBox","name":"Footer","label":"Fusszeile"},{"defaultValue":{"fixedValue":true},"shareValue":false,"type":"checkBox","name":"FooterLogo","label":"mit Logo in der Fusszeile"}],"formDataEntries":[]}]]></TemplafySlideFormConfiguration>
-</file>
-
-<file path=customXml/item38.xml><?xml version="1.0" encoding="utf-8"?>
-<TemplafySlideTemplateConfiguration><![CDATA[{"slideVersion":1,"isValidatorEnabled":false,"isLocked":false,"elementsMetadata":[{"type":"shape","elementConfiguration":{"binding":"{{FormatDateTime(Form.Date,Translate(\"DateFormat\"),DocumentLanguage)}}","type":"text","disableUpdates":false}},{"type":"shape","elementConfiguration":{"width":"{{UserProfile.Department.REFDepartmentLogo.WidthPNGPPTFooter}}","height":"{{UserProfile.Department.REFDepartmentLogo.HeightPNGPPTFooter}}","image":"{{UserProfile.Department.REFDepartmentLogo.ImagePNG}}","visibility":"{{IfElse(Form.FooterLogo, VisibilityType.Visible,VisibilityType.Hidden)}}","type":"image","disableUpdates":false}},{"type":"shape","elementConfiguration":{"binding":"{{Form.Footer}}","type":"text","disableUpdates":false}},{"type":"shape","elementConfiguration":{"binding":"{{UserProfile.Department.DepartmentName}}","visibility":"{{IfElse(Form.FooterLogo, VisibilityType.Hidden,VisibilityType.Visible)}}","type":"text","disableUpdates":false}}],"slideId":"637750113834156510","enableDocumentContentUpdater":true,"version":"2.0"}]]></TemplafySlideTemplateConfiguration>
-</file>
-
-<file path=customXml/item39.xml><?xml version="1.0" encoding="utf-8"?>
-<TemplafySlideTemplateConfiguration><![CDATA[{"slideVersion":1,"isValidatorEnabled":false,"isLocked":false,"elementsMetadata":[{"type":"shape","elementConfiguration":{"binding":"{{FormatDateTime(Form.Date,Translate(\"DateFormat\"),DocumentLanguage)}}","type":"text","disableUpdates":false}},{"type":"shape","elementConfiguration":{"width":"{{UserProfile.Department.REFDepartmentLogo.WidthPNGPPTFooter}}","height":"{{UserProfile.Department.REFDepartmentLogo.HeightPNGPPTFooter}}","image":"{{UserProfile.Department.REFDepartmentLogo.ImagePNG}}","visibility":"{{IfElse(Form.FooterLogo, VisibilityType.Visible,VisibilityType.Hidden)}}","type":"image","disableUpdates":false}},{"type":"shape","elementConfiguration":{"binding":"{{Form.Footer}}","type":"text","disableUpdates":false}},{"type":"shape","elementConfiguration":{"binding":"{{UserProfile.Department.DepartmentName}}","visibility":"{{IfElse(Form.FooterLogo, VisibilityType.Hidden,VisibilityType.Visible)}}","type":"text","disableUpdates":false}}],"slideId":"637750113834279331","enableDocumentContentUpdater":true,"version":"2.0"}]]></TemplafySlideTemplateConfiguration>
-</file>
-
-<file path=customXml/item4.xml><?xml version="1.0" encoding="utf-8"?>
-<TemplafySlideFormConfiguration><![CDATA[{"formFields":[],"formDataEntries":[]}]]></TemplafySlideFormConfiguration>
 </file>
 
 <file path=customXml/item40.xml><?xml version="1.0" encoding="utf-8"?>
@@ -16455,31 +16485,31 @@
 </file>
 
 <file path=customXml/item41.xml><?xml version="1.0" encoding="utf-8"?>
-<TemplafySlideTemplateConfiguration><![CDATA[{"slideVersion":1,"isValidatorEnabled":false,"isLocked":false,"elementsMetadata":[],"slideId":"637750113834253485","enableDocumentContentUpdater":true,"version":"2.0"}]]></TemplafySlideTemplateConfiguration>
+<TemplafySlideFormConfiguration><![CDATA[{"formFields":[{"required":true,"shareValue":false,"type":"datePicker","name":"Date","label":"Datum"},{"required":false,"placeholder":"","lines":1,"shareValue":false,"type":"textBox","name":"Footer","label":"Fusszeile"},{"defaultValue":{"fixedValue":true},"shareValue":false,"type":"checkBox","name":"FooterLogo","label":"mit Logo in der Fusszeile"}],"formDataEntries":[]}]]></TemplafySlideFormConfiguration>
 </file>
 
 <file path=customXml/item42.xml><?xml version="1.0" encoding="utf-8"?>
+<TemplafySlideTemplateConfiguration><![CDATA[{"slideVersion":1,"isValidatorEnabled":false,"isLocked":false,"elementsMetadata":[{"type":"shape","elementConfiguration":{"binding":"{{FormatDateTime(Form.Date,Translate(\"DateFormat\"),DocumentLanguage)}}","type":"text","disableUpdates":false}},{"type":"shape","elementConfiguration":{"width":"{{UserProfile.Department.REFDepartmentLogo.WidthPNGPPTFooter}}","height":"{{UserProfile.Department.REFDepartmentLogo.HeightPNGPPTFooter}}","image":"{{UserProfile.Department.REFDepartmentLogo.ImagePNG}}","visibility":"{{IfElse(Form.FooterLogo, VisibilityType.Visible,VisibilityType.Hidden)}}","type":"image","disableUpdates":false}},{"type":"shape","elementConfiguration":{"binding":"{{Form.Footer}}","type":"text","disableUpdates":false}},{"type":"shape","elementConfiguration":{"binding":"{{UserProfile.Department.DepartmentName}}","visibility":"{{IfElse(Form.FooterLogo, VisibilityType.Hidden,VisibilityType.Visible)}}","type":"text","disableUpdates":false}}],"slideId":"637750113834279331","enableDocumentContentUpdater":true,"version":"2.0"}]]></TemplafySlideTemplateConfiguration>
+</file>
+
+<file path=customXml/item43.xml><?xml version="1.0" encoding="utf-8"?>
+<TemplafySlideFormConfiguration><![CDATA[{"formFields":[],"formDataEntries":[]}]]></TemplafySlideFormConfiguration>
+</file>
+
+<file path=customXml/item44.xml><?xml version="1.0" encoding="utf-8"?>
+<TemplafySlideTemplateConfiguration><![CDATA[{"slideVersion":1,"isValidatorEnabled":false,"isLocked":false,"elementsMetadata":[{"type":"shape","elementConfiguration":{"binding":"{{FormatDateTime(Form.Date,Translate(\"DateFormat\"),DocumentLanguage)}}","type":"text","disableUpdates":false}},{"type":"shape","elementConfiguration":{"width":"{{UserProfile.Department.REFDepartmentLogo.WidthPNGPPTFooter}}","height":"{{UserProfile.Department.REFDepartmentLogo.HeightPNGPPTFooter}}","image":"{{UserProfile.Department.REFDepartmentLogo.ImagePNG}}","visibility":"{{IfElse(Form.FooterLogo, VisibilityType.Visible,VisibilityType.Hidden)}}","type":"image","disableUpdates":false}},{"type":"shape","elementConfiguration":{"binding":"{{Form.Footer}}","type":"text","disableUpdates":false}},{"type":"shape","elementConfiguration":{"binding":"{{UserProfile.Department.DepartmentName}}","visibility":"{{IfElse(Form.FooterLogo, VisibilityType.Hidden,VisibilityType.Visible)}}","type":"text","disableUpdates":false}}],"slideId":"637750113834249425","enableDocumentContentUpdater":true,"version":"2.0"}]]></TemplafySlideTemplateConfiguration>
+</file>
+
+<file path=customXml/item45.xml><?xml version="1.0" encoding="utf-8"?>
+<TemplafySlideTemplateConfiguration><![CDATA[{"slideVersion":1,"isValidatorEnabled":false,"isLocked":false,"elementsMetadata":[{"type":"shape","elementConfiguration":{"binding":"{{FormatDateTime(Form.Date,Translate(\"DateFormat\"),DocumentLanguage)}}","type":"text","disableUpdates":false}},{"type":"shape","elementConfiguration":{"width":"{{UserProfile.Department.REFDepartmentLogo.WidthPNGPPTFooter}}","height":"{{UserProfile.Department.REFDepartmentLogo.HeightPNGPPTFooter}}","image":"{{UserProfile.Department.REFDepartmentLogo.ImagePNG}}","visibility":"{{IfElse(Form.FooterLogo, VisibilityType.Visible,VisibilityType.Hidden)}}","type":"image","disableUpdates":false}},{"type":"shape","elementConfiguration":{"binding":"{{Form.Footer}}","type":"text","disableUpdates":false}},{"type":"shape","elementConfiguration":{"binding":"{{UserProfile.Department.DepartmentName}}","visibility":"{{IfElse(Form.FooterLogo, VisibilityType.Hidden,VisibilityType.Visible)}}","type":"text","disableUpdates":false}}],"slideId":"637750113834269210","enableDocumentContentUpdater":true,"version":"2.0"}]]></TemplafySlideTemplateConfiguration>
+</file>
+
+<file path=customXml/item46.xml><?xml version="1.0" encoding="utf-8"?>
+<TemplafySlideTemplateConfiguration><![CDATA[{"slideVersion":1,"isValidatorEnabled":false,"isLocked":false,"elementsMetadata":[{"type":"shape","elementConfiguration":{"binding":"{{FormatDateTime(Form.Date,Translate(\"DateFormat\"),DocumentLanguage)}}","type":"text","disableUpdates":false}},{"type":"shape","elementConfiguration":{"binding":"{{Form.Footer}}","type":"text","disableUpdates":false}},{"type":"shape","elementConfiguration":{"width":"{{UserProfile.Department.REFDepartmentLogo.WidthPNGPPTFooter}}","height":"{{UserProfile.Department.REFDepartmentLogo.HeightPNGPPTFooter}}","image":"{{UserProfile.Department.REFDepartmentLogo.ImagePNG}}","visibility":"{{IfElse(Form.FooterLogo, VisibilityType.Visible,VisibilityType.Hidden)}}","type":"image","disableUpdates":false}},{"type":"shape","elementConfiguration":{"binding":"{{UserProfile.Department.DepartmentName}}","visibility":"{{IfElse(Form.FooterLogo, VisibilityType.Hidden,VisibilityType.Visible)}}","type":"text","disableUpdates":false}}],"slideId":"637750113834107890","enableDocumentContentUpdater":true,"version":"2.0"}]]></TemplafySlideTemplateConfiguration>
+</file>
+
+<file path=customXml/item47.xml><?xml version="1.0" encoding="utf-8"?>
 <TemplafySlideFormConfiguration><![CDATA[{"formFields":[{"required":true,"shareValue":false,"type":"datePicker","name":"Date","label":"Datum"},{"required":false,"placeholder":"","lines":1,"shareValue":false,"type":"textBox","name":"Footer","label":"Fusszeile"},{"defaultValue":{"fixedValue":true},"shareValue":false,"type":"checkBox","name":"FooterLogo","label":"mit Logo in der Fusszeile"}],"formDataEntries":[]}]]></TemplafySlideFormConfiguration>
-</file>
-
-<file path=customXml/item43.xml><?xml version="1.0" encoding="utf-8"?>
-<TemplafySlideTemplateConfiguration><![CDATA[{"slideVersion":1,"isValidatorEnabled":false,"isLocked":false,"elementsMetadata":[{"type":"shape","elementConfiguration":{"binding":"{{FormatDateTime(Form.Date,Translate(\"DateFormat\"),DocumentLanguage)}}","type":"text","disableUpdates":false}},{"type":"shape","elementConfiguration":{"width":"{{UserProfile.Department.REFDepartmentLogo.WidthPNGPPTFooter}}","height":"{{UserProfile.Department.REFDepartmentLogo.HeightPNGPPTFooter}}","image":"{{UserProfile.Department.REFDepartmentLogo.ImagePNG}}","visibility":"{{IfElse(Form.FooterLogo, VisibilityType.Visible,VisibilityType.Hidden)}}","type":"image","disableUpdates":false}},{"type":"shape","elementConfiguration":{"binding":"{{Form.Footer}}","type":"text","disableUpdates":false}},{"type":"shape","elementConfiguration":{"binding":"{{UserProfile.Department.DepartmentName}}","visibility":"{{IfElse(Form.FooterLogo, VisibilityType.Hidden,VisibilityType.Visible)}}","type":"text","disableUpdates":false}}],"slideId":"637750113834237210","enableDocumentContentUpdater":true,"version":"2.0"}]]></TemplafySlideTemplateConfiguration>
-</file>
-
-<file path=customXml/item44.xml><?xml version="1.0" encoding="utf-8"?>
-<TemplafySlideTemplateConfiguration><![CDATA[{"slideVersion":1,"isValidatorEnabled":false,"isLocked":false,"elementsMetadata":[],"slideId":"637750113834267111","enableDocumentContentUpdater":true,"version":"2.0"}]]></TemplafySlideTemplateConfiguration>
-</file>
-
-<file path=customXml/item45.xml><?xml version="1.0" encoding="utf-8"?>
-<TemplafySlideFormConfiguration><![CDATA[{"formFields":[],"formDataEntries":[]}]]></TemplafySlideFormConfiguration>
-</file>
-
-<file path=customXml/item46.xml><?xml version="1.0" encoding="utf-8"?>
-<TemplafySlideTemplateConfiguration><![CDATA[{"slideVersion":1,"isValidatorEnabled":false,"isLocked":false,"elementsMetadata":[{"type":"shape","elementConfiguration":{"width":"{{UserProfile.Department.REFDepartmentLogo.WidthPNGPPT}}","height":"{{UserProfile.Department.REFDepartmentLogo.HeightPNGPPT}}","image":"{{UserProfile.Department.REFDepartmentLogo.ImagePNG}}","type":"image","disableUpdates":false}}],"slideId":"637750113834107608","enableDocumentContentUpdater":true,"version":"2.0"}]]></TemplafySlideTemplateConfiguration>
-</file>
-
-<file path=customXml/item47.xml><?xml version="1.0" encoding="utf-8"?>
-<TemplafySlideTemplateConfiguration><![CDATA[{"slideVersion":1,"isValidatorEnabled":false,"isLocked":false,"elementsMetadata":[{"type":"shape","elementConfiguration":{"width":"{{UserProfile.Department.REFDepartmentLogo.WidthPNGPPT}}","height":"{{UserProfile.Department.REFDepartmentLogo.HeightPNGPPT}}","image":"{{UserProfile.Department.REFDepartmentLogo.ImagePNG}}","type":"image","disableUpdates":false}}],"slideId":"638097175473157463","enableDocumentContentUpdater":false,"version":"2.0"}]]></TemplafySlideTemplateConfiguration>
 </file>
 
 <file path=customXml/item48.xml><?xml version="1.0" encoding="utf-8"?>
@@ -16487,19 +16517,19 @@
 </file>
 
 <file path=customXml/item49.xml><?xml version="1.0" encoding="utf-8"?>
-<TemplafySlideTemplateConfiguration><![CDATA[{"slideVersion":1,"isValidatorEnabled":false,"isLocked":false,"elementsMetadata":[{"type":"shape","elementConfiguration":{"binding":"{{FormatDateTime(Form.Date,Translate(\"DateFormat\"),DocumentLanguage)}}","type":"text","disableUpdates":false}},{"type":"shape","elementConfiguration":{"width":"{{UserProfile.Department.REFDepartmentLogo.WidthPNGPPTFooter}}","height":"{{UserProfile.Department.REFDepartmentLogo.HeightPNGPPTFooter}}","image":"{{UserProfile.Department.REFDepartmentLogo.ImagePNG}}","visibility":"{{IfElse(Form.FooterLogo, VisibilityType.Visible,VisibilityType.Hidden)}}","type":"image","disableUpdates":false}},{"type":"shape","elementConfiguration":{"binding":"{{Form.Footer}}","type":"text","disableUpdates":false}},{"type":"shape","elementConfiguration":{"binding":"{{UserProfile.Department.DepartmentName}}","visibility":"{{IfElse(Form.FooterLogo, VisibilityType.Hidden,VisibilityType.Visible)}}","type":"text","disableUpdates":false}}],"slideId":"637750113834261908","enableDocumentContentUpdater":true,"version":"2.0"}]]></TemplafySlideTemplateConfiguration>
+<TemplafySlideTemplateConfiguration><![CDATA[{"slideVersion":1,"isValidatorEnabled":false,"isLocked":false,"elementsMetadata":[],"slideId":"637750113834254135","enableDocumentContentUpdater":true,"version":"2.0"}]]></TemplafySlideTemplateConfiguration>
 </file>
 
 <file path=customXml/item5.xml><?xml version="1.0" encoding="utf-8"?>
-<TemplafySlideTemplateConfiguration><![CDATA[{"slideVersion":1,"isValidatorEnabled":false,"isLocked":false,"elementsMetadata":[{"type":"shape","elementConfiguration":{"binding":"{{FormatDateTime(Form.Date,Translate(\"DateFormat\"),DocumentLanguage)}}","type":"text","disableUpdates":false}},{"type":"shape","elementConfiguration":{"width":"{{UserProfile.Department.REFDepartmentLogo.WidthPNGPPTFooter}}","height":"{{UserProfile.Department.REFDepartmentLogo.HeightPNGPPTFooter}}","image":"{{UserProfile.Department.REFDepartmentLogo.ImagePNG}}","visibility":"{{IfElse(Form.FooterLogo, VisibilityType.Visible,VisibilityType.Hidden)}}","type":"image","disableUpdates":false}},{"type":"shape","elementConfiguration":{"binding":"{{Form.Footer}}","type":"text","disableUpdates":false}},{"type":"shape","elementConfiguration":{"binding":"{{UserProfile.Department.DepartmentName}}","visibility":"{{IfElse(Form.FooterLogo, VisibilityType.Hidden,VisibilityType.Visible)}}","type":"text","disableUpdates":false}}],"slideId":"637750113834195832","enableDocumentContentUpdater":true,"version":"2.0"}]]></TemplafySlideTemplateConfiguration>
+<TemplafySlideTemplateConfiguration><![CDATA[{"slideVersion":1,"isValidatorEnabled":false,"isLocked":false,"elementsMetadata":[{"type":"shape","elementConfiguration":{"binding":"{{FormatDateTime(Form.Date,Translate(\"DateFormat\"),DocumentLanguage)}}","type":"text","disableUpdates":false}},{"type":"shape","elementConfiguration":{"width":"{{UserProfile.Department.REFDepartmentLogo.WidthPNGPPTFooter}}","height":"{{UserProfile.Department.REFDepartmentLogo.HeightPNGPPTFooter}}","image":"{{UserProfile.Department.REFDepartmentLogo.ImagePNG}}","visibility":"{{IfElse(Form.FooterLogo, VisibilityType.Visible,VisibilityType.Hidden)}}","type":"image","disableUpdates":false}},{"type":"shape","elementConfiguration":{"binding":"{{Form.Footer}}","type":"text","disableUpdates":false}},{"type":"shape","elementConfiguration":{"binding":"{{UserProfile.Department.DepartmentName}}","visibility":"{{IfElse(Form.FooterLogo, VisibilityType.Hidden,VisibilityType.Visible)}}","type":"text","disableUpdates":false}}],"slideId":"637750113834264450","enableDocumentContentUpdater":true,"version":"2.0"}]]></TemplafySlideTemplateConfiguration>
 </file>
 
 <file path=customXml/item50.xml><?xml version="1.0" encoding="utf-8"?>
-<TemplafySlideTemplateConfiguration><![CDATA[{"slideVersion":1,"isValidatorEnabled":false,"isLocked":false,"elementsMetadata":[{"type":"shape","elementConfiguration":{"binding":"{{FormatDateTime(Form.Date,Translate(\"DateFormat\"),DocumentLanguage)}}","type":"text","disableUpdates":false}},{"type":"shape","elementConfiguration":{"width":"{{UserProfile.Department.REFDepartmentLogo.WidthPNGPPTFooter}}","height":"{{UserProfile.Department.REFDepartmentLogo.HeightPNGPPTFooter}}","image":"{{UserProfile.Department.REFDepartmentLogo.ImagePNG}}","visibility":"{{IfElse(Form.FooterLogo, VisibilityType.Visible,VisibilityType.Hidden)}}","type":"image","disableUpdates":false}},{"type":"shape","elementConfiguration":{"binding":"{{Form.Footer}}","type":"text","disableUpdates":false}},{"type":"shape","elementConfiguration":{"binding":"{{UserProfile.Department.DepartmentName}}","visibility":"{{IfElse(Form.FooterLogo, VisibilityType.Hidden,VisibilityType.Visible)}}","type":"text","disableUpdates":false}}],"slideId":"637750113834249425","enableDocumentContentUpdater":true,"version":"2.0"}]]></TemplafySlideTemplateConfiguration>
+<TemplafySlideFormConfiguration><![CDATA[{"formFields":[],"formDataEntries":[]}]]></TemplafySlideFormConfiguration>
 </file>
 
 <file path=customXml/item51.xml><?xml version="1.0" encoding="utf-8"?>
-<TemplafySlideTemplateConfiguration><![CDATA[{"slideVersion":1,"isValidatorEnabled":false,"isLocked":false,"elementsMetadata":[{"type":"shape","elementConfiguration":{"binding":"{{FormatDateTime(Form.Date,Translate(\"DateFormat\"),DocumentLanguage)}}","type":"text","disableUpdates":false}},{"type":"shape","elementConfiguration":{"width":"{{UserProfile.Department.REFDepartmentLogo.WidthPNGPPTFooter}}","height":"{{UserProfile.Department.REFDepartmentLogo.HeightPNGPPTFooter}}","image":"{{UserProfile.Department.REFDepartmentLogo.ImagePNG}}","visibility":"{{IfElse(Form.FooterLogo, VisibilityType.Visible,VisibilityType.Hidden)}}","type":"image","disableUpdates":false}},{"type":"shape","elementConfiguration":{"binding":"{{Form.Footer}}","type":"text","disableUpdates":false}},{"type":"shape","elementConfiguration":{"binding":"{{UserProfile.Department.DepartmentName}}","visibility":"{{IfElse(Form.FooterLogo, VisibilityType.Hidden,VisibilityType.Visible)}}","type":"text","disableUpdates":false}}],"slideId":"637750113834135648","enableDocumentContentUpdater":true,"version":"2.0"}]]></TemplafySlideTemplateConfiguration>
+<TemplafySlideFormConfiguration><![CDATA[{"formFields":[],"formDataEntries":[]}]]></TemplafySlideFormConfiguration>
 </file>
 
 <file path=customXml/item52.xml><?xml version="1.0" encoding="utf-8"?>
@@ -16507,76 +16537,34 @@
 </file>
 
 <file path=customXml/item53.xml><?xml version="1.0" encoding="utf-8"?>
-<TemplafySlideTemplateConfiguration><![CDATA[{"slideVersion":1,"isValidatorEnabled":false,"isLocked":false,"elementsMetadata":[{"type":"shape","elementConfiguration":{"binding":"{{FormatDateTime(Form.Date,Translate(\"DateFormat\"),DocumentLanguage)}}","type":"text","disableUpdates":false}},{"type":"shape","elementConfiguration":{"width":"{{UserProfile.Department.REFDepartmentLogo.WidthPNGPPTFooter}}","height":"{{UserProfile.Department.REFDepartmentLogo.HeightPNGPPTFooter}}","image":"{{UserProfile.Department.REFDepartmentLogo.ImagePNG}}","visibility":"{{IfElse(Form.FooterLogo, VisibilityType.Visible,VisibilityType.Hidden)}}","type":"image","disableUpdates":false}},{"type":"shape","elementConfiguration":{"binding":"{{Form.Footer}}","type":"text","disableUpdates":false}},{"type":"shape","elementConfiguration":{"binding":"{{UserProfile.Department.DepartmentName}}","visibility":"{{IfElse(Form.FooterLogo, VisibilityType.Hidden,VisibilityType.Visible)}}","type":"text","disableUpdates":false}}],"slideId":"637750113834264450","enableDocumentContentUpdater":true,"version":"2.0"}]]></TemplafySlideTemplateConfiguration>
+<TemplafySlideFormConfiguration><![CDATA[{"formFields":[],"formDataEntries":[]}]]></TemplafySlideFormConfiguration>
 </file>
 
 <file path=customXml/item54.xml><?xml version="1.0" encoding="utf-8"?>
-<TemplafySlideTemplateConfiguration><![CDATA[{"slideVersion":1,"isValidatorEnabled":false,"isLocked":false,"elementsMetadata":[{"type":"shape","elementConfiguration":{"binding":"{{FormatDateTime(Form.Date,Translate(\"DateFormat\"),DocumentLanguage)}}","type":"text","disableUpdates":false}},{"type":"shape","elementConfiguration":{"width":"{{UserProfile.Department.REFDepartmentLogo.WidthPNGPPTFooter}}","height":"{{UserProfile.Department.REFDepartmentLogo.HeightPNGPPTFooter}}","image":"{{UserProfile.Department.REFDepartmentLogo.ImagePNG}}","visibility":"{{IfElse(Form.FooterLogo, VisibilityType.Visible,VisibilityType.Hidden)}}","type":"image","disableUpdates":false}},{"type":"shape","elementConfiguration":{"binding":"{{Form.Footer}}","type":"text","disableUpdates":false}},{"type":"shape","elementConfiguration":{"binding":"{{UserProfile.Department.DepartmentName}}","visibility":"{{IfElse(Form.FooterLogo, VisibilityType.Hidden,VisibilityType.Visible)}}","type":"text","disableUpdates":false}}],"slideId":"637750113834113416","enableDocumentContentUpdater":true,"version":"2.0"}]]></TemplafySlideTemplateConfiguration>
+<TemplafySlideFormConfiguration><![CDATA[{"formFields":[{"required":true,"shareValue":false,"type":"datePicker","name":"Date","label":"Datum"},{"required":false,"placeholder":"","lines":1,"shareValue":false,"type":"textBox","name":"Footer","label":"Fusszeile"},{"defaultValue":{"fixedValue":true},"shareValue":false,"type":"checkBox","name":"FooterLogo","label":"mit Logo in der Fusszeile"}],"formDataEntries":[]}]]></TemplafySlideFormConfiguration>
 </file>
 
 <file path=customXml/item55.xml><?xml version="1.0" encoding="utf-8"?>
-<TemplafySlideTemplateConfiguration><![CDATA[{"slideVersion":1,"isValidatorEnabled":false,"isLocked":false,"elementsMetadata":[{"type":"shape","elementConfiguration":{"binding":"{{FormatDateTime(Form.Date,Translate(\"DateFormat\"),DocumentLanguage)}}","type":"text","disableUpdates":false}},{"type":"shape","elementConfiguration":{"width":"{{UserProfile.Department.REFDepartmentLogo.WidthPNGPPTFooter}}","height":"{{UserProfile.Department.REFDepartmentLogo.HeightPNGPPTFooter}}","image":"{{UserProfile.Department.REFDepartmentLogo.ImagePNG}}","visibility":"{{IfElse(Form.FooterLogo, VisibilityType.Visible,VisibilityType.Hidden)}}","type":"image","disableUpdates":false}},{"type":"shape","elementConfiguration":{"binding":"{{Form.Footer}}","type":"text","disableUpdates":false}},{"type":"shape","elementConfiguration":{"binding":"{{UserProfile.Department.DepartmentName}}","visibility":"{{IfElse(Form.FooterLogo, VisibilityType.Hidden,VisibilityType.Visible)}}","type":"text","disableUpdates":false}}],"slideId":"637750113834269210","enableDocumentContentUpdater":true,"version":"2.0"}]]></TemplafySlideTemplateConfiguration>
+<TemplafySlideTemplateConfiguration><![CDATA[{"slideVersion":1,"isValidatorEnabled":false,"isLocked":false,"elementsMetadata":[{"type":"shape","elementConfiguration":{"width":"{{UserProfile.Department.REFDepartmentLogo.WidthPNGPPT}}","height":"{{UserProfile.Department.REFDepartmentLogo.HeightPNGPPT}}","image":"{{UserProfile.Department.REFDepartmentLogo.ImagePNG}}","type":"image","disableUpdates":false}}],"slideId":"638097175473157463","enableDocumentContentUpdater":false,"version":"2.0"}]]></TemplafySlideTemplateConfiguration>
 </file>
 
 <file path=customXml/item6.xml><?xml version="1.0" encoding="utf-8"?>
-<TemplafySlideFormConfiguration><![CDATA[{"formFields":[],"formDataEntries":[]}]]></TemplafySlideFormConfiguration>
+<TemplafySlideTemplateConfiguration><![CDATA[{"slideVersion":1,"isValidatorEnabled":false,"isLocked":false,"elementsMetadata":[{"type":"shape","elementConfiguration":{"binding":"{{FormatDateTime(Form.Date,Translate(\"DateFormat\"),DocumentLanguage)}}","type":"text","disableUpdates":false}},{"type":"shape","elementConfiguration":{"width":"{{UserProfile.Department.REFDepartmentLogo.WidthPNGPPTFooter}}","height":"{{UserProfile.Department.REFDepartmentLogo.HeightPNGPPTFooter}}","image":"{{UserProfile.Department.REFDepartmentLogo.ImagePNG}}","visibility":"{{IfElse(Form.FooterLogo, VisibilityType.Visible,VisibilityType.Hidden)}}","type":"image","disableUpdates":false}},{"type":"shape","elementConfiguration":{"binding":"{{Form.Footer}}","type":"text","disableUpdates":false}},{"type":"shape","elementConfiguration":{"binding":"{{UserProfile.Department.DepartmentName}}","visibility":"{{IfElse(Form.FooterLogo, VisibilityType.Hidden,VisibilityType.Visible)}}","type":"text","disableUpdates":false}}],"slideId":"637750113834195832","enableDocumentContentUpdater":true,"version":"2.0"}]]></TemplafySlideTemplateConfiguration>
 </file>
 
 <file path=customXml/item7.xml><?xml version="1.0" encoding="utf-8"?>
-<TemplafySlideTemplateConfiguration><![CDATA[{"slideVersion":1,"isValidatorEnabled":false,"isLocked":false,"elementsMetadata":[{"type":"shape","elementConfiguration":{"binding":"{{FormatDateTime(Form.Date,Translate(\"DateFormat\"),DocumentLanguage)}}","type":"text","disableUpdates":false}},{"type":"shape","elementConfiguration":{"binding":"{{Form.Footer}}","type":"text","disableUpdates":false}},{"type":"shape","elementConfiguration":{"width":"{{UserProfile.Department.REFDepartmentLogo.WidthPNGPPTFooter}}","height":"{{UserProfile.Department.REFDepartmentLogo.HeightPNGPPTFooter}}","image":"{{UserProfile.Department.REFDepartmentLogo.ImagePNG}}","visibility":"{{IfElse(Form.FooterLogo, VisibilityType.Visible,VisibilityType.Hidden)}}","type":"image","disableUpdates":false}},{"type":"shape","elementConfiguration":{"binding":"{{UserProfile.Department.DepartmentName}}","visibility":"{{IfElse(Form.FooterLogo, VisibilityType.Hidden,VisibilityType.Visible)}}","type":"text","disableUpdates":false}}],"slideId":"637750113834107890","enableDocumentContentUpdater":true,"version":"2.0"}]]></TemplafySlideTemplateConfiguration>
+<TemplafySlideTemplateConfiguration><![CDATA[{"slideVersion":1,"isValidatorEnabled":false,"isLocked":false,"elementsMetadata":[{"type":"shape","elementConfiguration":{"width":"{{UserProfile.Department.REFDepartmentLogo.WidthPNGPPT}}","height":"{{UserProfile.Department.REFDepartmentLogo.HeightPNGPPT}}","image":"{{UserProfile.Department.REFDepartmentLogo.ImagePNG}}","type":"image","disableUpdates":false}}],"slideId":"637750113834107008","enableDocumentContentUpdater":true,"version":"2.0"}]]></TemplafySlideTemplateConfiguration>
 </file>
 
 <file path=customXml/item8.xml><?xml version="1.0" encoding="utf-8"?>
+<TemplafySlideTemplateConfiguration><![CDATA[{"slideVersion":1,"isValidatorEnabled":false,"isLocked":false,"elementsMetadata":[],"slideId":"637750113834130535","enableDocumentContentUpdater":true,"version":"2.0"}]]></TemplafySlideTemplateConfiguration>
+</file>
+
+<file path=customXml/item9.xml><?xml version="1.0" encoding="utf-8"?>
 <TemplafySlideFormConfiguration><![CDATA[{"formFields":[{"required":true,"shareValue":false,"type":"datePicker","name":"Date","label":"Datum"},{"required":false,"placeholder":"","lines":1,"shareValue":false,"type":"textBox","name":"Footer","label":"Fusszeile"},{"defaultValue":{"fixedValue":true},"shareValue":false,"type":"checkBox","name":"FooterLogo","label":"mit Logo in der Fusszeile"}],"formDataEntries":[]}]]></TemplafySlideFormConfiguration>
 </file>
 
-<file path=customXml/item9.xml><?xml version="1.0" encoding="utf-8"?>
-<TemplafyFormConfiguration><![CDATA[{"formFields":[{"required":true,"shareValue":false,"type":"datePicker","name":"Date","label":"Datum"},{"required":false,"placeholder":"","lines":1,"shareValue":false,"type":"textBox","name":"Footer","label":"Fusszeile"},{"defaultValue":{"fixedValue":true},"shareValue":false,"type":"checkBox","name":"FooterLogo","label":"mit Logo in der Fusszeile"}],"formDataEntries":[{"name":"Date","value":"+Z5Mp3YA6oBTYCzRQ9X9ow=="},{"name":"FooterLogo","value":"iTzqZGj1P6MRGUQq8ahlhA=="}]}]]></TemplafyFormConfiguration>
-</file>
-
 <file path=customXml/itemProps1.xml><?xml version="1.0" encoding="utf-8"?>
-<ds:datastoreItem xmlns:ds="http://schemas.openxmlformats.org/officeDocument/2006/customXml" ds:itemID="{2754228B-0BD8-45C5-B5EB-94306059B5EC}">
-  <ds:schemaRefs/>
-</ds:datastoreItem>
-</file>
-
-<file path=customXml/itemProps10.xml><?xml version="1.0" encoding="utf-8"?>
-<ds:datastoreItem xmlns:ds="http://schemas.openxmlformats.org/officeDocument/2006/customXml" ds:itemID="{D4F2BED0-C414-46BA-AF63-E57A81C2B9FC}">
-  <ds:schemaRefs/>
-</ds:datastoreItem>
-</file>
-
-<file path=customXml/itemProps11.xml><?xml version="1.0" encoding="utf-8"?>
-<ds:datastoreItem xmlns:ds="http://schemas.openxmlformats.org/officeDocument/2006/customXml" ds:itemID="{10DF96B0-5AB8-4312-B635-364A70A3CD64}">
-  <ds:schemaRefs/>
-</ds:datastoreItem>
-</file>
-
-<file path=customXml/itemProps12.xml><?xml version="1.0" encoding="utf-8"?>
-<ds:datastoreItem xmlns:ds="http://schemas.openxmlformats.org/officeDocument/2006/customXml" ds:itemID="{4CA08EE0-6BFF-42CE-9AEB-A2BB1FFE120F}">
-  <ds:schemaRefs/>
-</ds:datastoreItem>
-</file>
-
-<file path=customXml/itemProps13.xml><?xml version="1.0" encoding="utf-8"?>
-<ds:datastoreItem xmlns:ds="http://schemas.openxmlformats.org/officeDocument/2006/customXml" ds:itemID="{A1DE4887-2FA9-49BA-B8BF-E79FB8D56958}">
-  <ds:schemaRefs/>
-</ds:datastoreItem>
-</file>
-
-<file path=customXml/itemProps14.xml><?xml version="1.0" encoding="utf-8"?>
-<ds:datastoreItem xmlns:ds="http://schemas.openxmlformats.org/officeDocument/2006/customXml" ds:itemID="{BA2D1F52-F0AD-4181-AA76-1D6F58ED2D3E}">
-  <ds:schemaRefs/>
-</ds:datastoreItem>
-</file>
-
-<file path=customXml/itemProps15.xml><?xml version="1.0" encoding="utf-8"?>
-<ds:datastoreItem xmlns:ds="http://schemas.openxmlformats.org/officeDocument/2006/customXml" ds:itemID="{DC466C4A-550D-4144-830C-62BC000CB329}">
-  <ds:schemaRefs/>
-</ds:datastoreItem>
-</file>
-
-<file path=customXml/itemProps16.xml><?xml version="1.0" encoding="utf-8"?>
 <ds:datastoreItem xmlns:ds="http://schemas.openxmlformats.org/officeDocument/2006/customXml" ds:itemID="{329B48A9-5067-463C-80F4-7C90FDDEC242}">
   <ds:schemaRefs>
     <ds:schemaRef ds:uri="http://schemas.microsoft.com/office/2006/metadata/contentType"/>
@@ -16595,73 +16583,7 @@
 </ds:datastoreItem>
 </file>
 
-<file path=customXml/itemProps17.xml><?xml version="1.0" encoding="utf-8"?>
-<ds:datastoreItem xmlns:ds="http://schemas.openxmlformats.org/officeDocument/2006/customXml" ds:itemID="{600482A4-E9CD-4DA2-AD6D-ED3DAAC7A90E}">
-  <ds:schemaRefs/>
-</ds:datastoreItem>
-</file>
-
-<file path=customXml/itemProps18.xml><?xml version="1.0" encoding="utf-8"?>
-<ds:datastoreItem xmlns:ds="http://schemas.openxmlformats.org/officeDocument/2006/customXml" ds:itemID="{A35AE265-4942-487E-9782-B0313E5BE5BA}">
-  <ds:schemaRefs/>
-</ds:datastoreItem>
-</file>
-
-<file path=customXml/itemProps19.xml><?xml version="1.0" encoding="utf-8"?>
-<ds:datastoreItem xmlns:ds="http://schemas.openxmlformats.org/officeDocument/2006/customXml" ds:itemID="{708F14FE-66F6-4744-AD1D-7632167C0D90}">
-  <ds:schemaRefs/>
-</ds:datastoreItem>
-</file>
-
-<file path=customXml/itemProps2.xml><?xml version="1.0" encoding="utf-8"?>
-<ds:datastoreItem xmlns:ds="http://schemas.openxmlformats.org/officeDocument/2006/customXml" ds:itemID="{3DAEF0AC-8F99-434C-A5E8-5F51192FBC2E}">
-  <ds:schemaRefs/>
-</ds:datastoreItem>
-</file>
-
-<file path=customXml/itemProps20.xml><?xml version="1.0" encoding="utf-8"?>
-<ds:datastoreItem xmlns:ds="http://schemas.openxmlformats.org/officeDocument/2006/customXml" ds:itemID="{DD23DDCC-ABAF-42D1-9CB2-07E72D883C32}">
-  <ds:schemaRefs/>
-</ds:datastoreItem>
-</file>
-
-<file path=customXml/itemProps21.xml><?xml version="1.0" encoding="utf-8"?>
-<ds:datastoreItem xmlns:ds="http://schemas.openxmlformats.org/officeDocument/2006/customXml" ds:itemID="{57D5D086-3D49-4363-99E9-93FB10F7001F}">
-  <ds:schemaRefs/>
-</ds:datastoreItem>
-</file>
-
-<file path=customXml/itemProps22.xml><?xml version="1.0" encoding="utf-8"?>
-<ds:datastoreItem xmlns:ds="http://schemas.openxmlformats.org/officeDocument/2006/customXml" ds:itemID="{B0437DFC-C606-441B-B8FC-7769CEA71C34}">
-  <ds:schemaRefs/>
-</ds:datastoreItem>
-</file>
-
-<file path=customXml/itemProps23.xml><?xml version="1.0" encoding="utf-8"?>
-<ds:datastoreItem xmlns:ds="http://schemas.openxmlformats.org/officeDocument/2006/customXml" ds:itemID="{5CDA3866-4191-4ABE-B434-81C70850BD71}">
-  <ds:schemaRefs/>
-</ds:datastoreItem>
-</file>
-
-<file path=customXml/itemProps24.xml><?xml version="1.0" encoding="utf-8"?>
-<ds:datastoreItem xmlns:ds="http://schemas.openxmlformats.org/officeDocument/2006/customXml" ds:itemID="{664F7CED-B0DA-429D-9A7F-4CBF61D24C26}">
-  <ds:schemaRefs/>
-</ds:datastoreItem>
-</file>
-
-<file path=customXml/itemProps25.xml><?xml version="1.0" encoding="utf-8"?>
-<ds:datastoreItem xmlns:ds="http://schemas.openxmlformats.org/officeDocument/2006/customXml" ds:itemID="{1EEB1A81-9962-42B8-BE89-F24FBB4418EA}">
-  <ds:schemaRefs/>
-</ds:datastoreItem>
-</file>
-
-<file path=customXml/itemProps26.xml><?xml version="1.0" encoding="utf-8"?>
-<ds:datastoreItem xmlns:ds="http://schemas.openxmlformats.org/officeDocument/2006/customXml" ds:itemID="{10CA47D5-62BF-412C-82C9-AD9C9628E81D}">
-  <ds:schemaRefs/>
-</ds:datastoreItem>
-</file>
-
-<file path=customXml/itemProps27.xml><?xml version="1.0" encoding="utf-8"?>
+<file path=customXml/itemProps10.xml><?xml version="1.0" encoding="utf-8"?>
 <ds:datastoreItem xmlns:ds="http://schemas.openxmlformats.org/officeDocument/2006/customXml" ds:itemID="{ED2A37DE-9640-4BAD-87EB-02349D3561C8}">
   <ds:schemaRefs>
     <ds:schemaRef ds:uri="http://schemas.microsoft.com/sharepoint/v3/contenttype/forms"/>
@@ -16669,43 +16591,73 @@
 </ds:datastoreItem>
 </file>
 
-<file path=customXml/itemProps28.xml><?xml version="1.0" encoding="utf-8"?>
-<ds:datastoreItem xmlns:ds="http://schemas.openxmlformats.org/officeDocument/2006/customXml" ds:itemID="{765EC35B-8AF2-40F0-BFE1-C19B71F66BB7}">
+<file path=customXml/itemProps11.xml><?xml version="1.0" encoding="utf-8"?>
+<ds:datastoreItem xmlns:ds="http://schemas.openxmlformats.org/officeDocument/2006/customXml" ds:itemID="{BE973802-FCC6-412D-B906-CC95D3BA7379}">
   <ds:schemaRefs/>
 </ds:datastoreItem>
 </file>
 
-<file path=customXml/itemProps29.xml><?xml version="1.0" encoding="utf-8"?>
-<ds:datastoreItem xmlns:ds="http://schemas.openxmlformats.org/officeDocument/2006/customXml" ds:itemID="{357320CA-212D-4182-9447-766838BC3644}">
+<file path=customXml/itemProps12.xml><?xml version="1.0" encoding="utf-8"?>
+<ds:datastoreItem xmlns:ds="http://schemas.openxmlformats.org/officeDocument/2006/customXml" ds:itemID="{22F15940-6A24-4FEF-A717-C5EC22A291A1}">
   <ds:schemaRefs/>
 </ds:datastoreItem>
 </file>
 
-<file path=customXml/itemProps3.xml><?xml version="1.0" encoding="utf-8"?>
+<file path=customXml/itemProps13.xml><?xml version="1.0" encoding="utf-8"?>
+<ds:datastoreItem xmlns:ds="http://schemas.openxmlformats.org/officeDocument/2006/customXml" ds:itemID="{0AF5DDBE-5E75-48FC-BA21-32ACE2374F30}">
+  <ds:schemaRefs/>
+</ds:datastoreItem>
+</file>
+
+<file path=customXml/itemProps14.xml><?xml version="1.0" encoding="utf-8"?>
+<ds:datastoreItem xmlns:ds="http://schemas.openxmlformats.org/officeDocument/2006/customXml" ds:itemID="{84926F0E-4CF9-4868-9C6A-F4B02CC81AC4}">
+  <ds:schemaRefs/>
+</ds:datastoreItem>
+</file>
+
+<file path=customXml/itemProps15.xml><?xml version="1.0" encoding="utf-8"?>
+<ds:datastoreItem xmlns:ds="http://schemas.openxmlformats.org/officeDocument/2006/customXml" ds:itemID="{A435609F-4C76-4415-A5FC-BB21AE5C4FD2}">
+  <ds:schemaRefs/>
+</ds:datastoreItem>
+</file>
+
+<file path=customXml/itemProps16.xml><?xml version="1.0" encoding="utf-8"?>
+<ds:datastoreItem xmlns:ds="http://schemas.openxmlformats.org/officeDocument/2006/customXml" ds:itemID="{7DDF22D5-378F-4B43-9E2C-6011B6850318}">
+  <ds:schemaRefs/>
+</ds:datastoreItem>
+</file>
+
+<file path=customXml/itemProps17.xml><?xml version="1.0" encoding="utf-8"?>
 <ds:datastoreItem xmlns:ds="http://schemas.openxmlformats.org/officeDocument/2006/customXml" ds:itemID="{9B272F4A-5C95-4892-AAD9-D7AEF7A26919}">
   <ds:schemaRefs/>
 </ds:datastoreItem>
 </file>
 
-<file path=customXml/itemProps30.xml><?xml version="1.0" encoding="utf-8"?>
-<ds:datastoreItem xmlns:ds="http://schemas.openxmlformats.org/officeDocument/2006/customXml" ds:itemID="{BE973802-FCC6-412D-B906-CC95D3BA7379}">
+<file path=customXml/itemProps18.xml><?xml version="1.0" encoding="utf-8"?>
+<ds:datastoreItem xmlns:ds="http://schemas.openxmlformats.org/officeDocument/2006/customXml" ds:itemID="{4CA08EE0-6BFF-42CE-9AEB-A2BB1FFE120F}">
   <ds:schemaRefs/>
 </ds:datastoreItem>
 </file>
 
-<file path=customXml/itemProps31.xml><?xml version="1.0" encoding="utf-8"?>
-<ds:datastoreItem xmlns:ds="http://schemas.openxmlformats.org/officeDocument/2006/customXml" ds:itemID="{B77E3FB8-6B77-4C09-82A2-9AF5ACD3601A}">
+<file path=customXml/itemProps19.xml><?xml version="1.0" encoding="utf-8"?>
+<ds:datastoreItem xmlns:ds="http://schemas.openxmlformats.org/officeDocument/2006/customXml" ds:itemID="{600482A4-E9CD-4DA2-AD6D-ED3DAAC7A90E}">
   <ds:schemaRefs/>
 </ds:datastoreItem>
 </file>
 
-<file path=customXml/itemProps32.xml><?xml version="1.0" encoding="utf-8"?>
-<ds:datastoreItem xmlns:ds="http://schemas.openxmlformats.org/officeDocument/2006/customXml" ds:itemID="{7D15E2AB-9AA3-4994-B62A-3E2F5C1A2EC4}">
+<file path=customXml/itemProps2.xml><?xml version="1.0" encoding="utf-8"?>
+<ds:datastoreItem xmlns:ds="http://schemas.openxmlformats.org/officeDocument/2006/customXml" ds:itemID="{10DF96B0-5AB8-4312-B635-364A70A3CD64}">
   <ds:schemaRefs/>
 </ds:datastoreItem>
 </file>
 
-<file path=customXml/itemProps33.xml><?xml version="1.0" encoding="utf-8"?>
+<file path=customXml/itemProps20.xml><?xml version="1.0" encoding="utf-8"?>
+<ds:datastoreItem xmlns:ds="http://schemas.openxmlformats.org/officeDocument/2006/customXml" ds:itemID="{1EEB1A81-9962-42B8-BE89-F24FBB4418EA}">
+  <ds:schemaRefs/>
+</ds:datastoreItem>
+</file>
+
+<file path=customXml/itemProps21.xml><?xml version="1.0" encoding="utf-8"?>
 <ds:datastoreItem xmlns:ds="http://schemas.openxmlformats.org/officeDocument/2006/customXml" ds:itemID="{6567BD5C-CC0C-4648-BED2-6CE28F06E5A9}">
   <ds:schemaRefs>
     <ds:schemaRef ds:uri="http://schemas.microsoft.com/office/2006/metadata/properties"/>
@@ -16722,170 +16674,248 @@
 </ds:datastoreItem>
 </file>
 
+<file path=customXml/itemProps22.xml><?xml version="1.0" encoding="utf-8"?>
+<ds:datastoreItem xmlns:ds="http://schemas.openxmlformats.org/officeDocument/2006/customXml" ds:itemID="{90BBE109-2328-4050-BC2C-A7208F976826}">
+  <ds:schemaRefs/>
+</ds:datastoreItem>
+</file>
+
+<file path=customXml/itemProps23.xml><?xml version="1.0" encoding="utf-8"?>
+<ds:datastoreItem xmlns:ds="http://schemas.openxmlformats.org/officeDocument/2006/customXml" ds:itemID="{46D5571C-37EA-4B1A-965C-D1FF428CABBA}">
+  <ds:schemaRefs/>
+</ds:datastoreItem>
+</file>
+
+<file path=customXml/itemProps24.xml><?xml version="1.0" encoding="utf-8"?>
+<ds:datastoreItem xmlns:ds="http://schemas.openxmlformats.org/officeDocument/2006/customXml" ds:itemID="{DD23DDCC-ABAF-42D1-9CB2-07E72D883C32}">
+  <ds:schemaRefs/>
+</ds:datastoreItem>
+</file>
+
+<file path=customXml/itemProps25.xml><?xml version="1.0" encoding="utf-8"?>
+<ds:datastoreItem xmlns:ds="http://schemas.openxmlformats.org/officeDocument/2006/customXml" ds:itemID="{7F01121C-13E9-483A-B7E6-46DD03B75200}">
+  <ds:schemaRefs/>
+</ds:datastoreItem>
+</file>
+
+<file path=customXml/itemProps26.xml><?xml version="1.0" encoding="utf-8"?>
+<ds:datastoreItem xmlns:ds="http://schemas.openxmlformats.org/officeDocument/2006/customXml" ds:itemID="{DCBF58FE-EC78-4FA4-A4AD-8EA1AF6C427F}">
+  <ds:schemaRefs/>
+</ds:datastoreItem>
+</file>
+
+<file path=customXml/itemProps27.xml><?xml version="1.0" encoding="utf-8"?>
+<ds:datastoreItem xmlns:ds="http://schemas.openxmlformats.org/officeDocument/2006/customXml" ds:itemID="{2754228B-0BD8-45C5-B5EB-94306059B5EC}">
+  <ds:schemaRefs/>
+</ds:datastoreItem>
+</file>
+
+<file path=customXml/itemProps28.xml><?xml version="1.0" encoding="utf-8"?>
+<ds:datastoreItem xmlns:ds="http://schemas.openxmlformats.org/officeDocument/2006/customXml" ds:itemID="{17B6E611-A877-40D8-9669-147A1865FF06}">
+  <ds:schemaRefs/>
+</ds:datastoreItem>
+</file>
+
+<file path=customXml/itemProps29.xml><?xml version="1.0" encoding="utf-8"?>
+<ds:datastoreItem xmlns:ds="http://schemas.openxmlformats.org/officeDocument/2006/customXml" ds:itemID="{DC466C4A-550D-4144-830C-62BC000CB329}">
+  <ds:schemaRefs/>
+</ds:datastoreItem>
+</file>
+
+<file path=customXml/itemProps3.xml><?xml version="1.0" encoding="utf-8"?>
+<ds:datastoreItem xmlns:ds="http://schemas.openxmlformats.org/officeDocument/2006/customXml" ds:itemID="{7D15E2AB-9AA3-4994-B62A-3E2F5C1A2EC4}">
+  <ds:schemaRefs/>
+</ds:datastoreItem>
+</file>
+
+<file path=customXml/itemProps30.xml><?xml version="1.0" encoding="utf-8"?>
+<ds:datastoreItem xmlns:ds="http://schemas.openxmlformats.org/officeDocument/2006/customXml" ds:itemID="{5CDA3866-4191-4ABE-B434-81C70850BD71}">
+  <ds:schemaRefs/>
+</ds:datastoreItem>
+</file>
+
+<file path=customXml/itemProps31.xml><?xml version="1.0" encoding="utf-8"?>
+<ds:datastoreItem xmlns:ds="http://schemas.openxmlformats.org/officeDocument/2006/customXml" ds:itemID="{765EC35B-8AF2-40F0-BFE1-C19B71F66BB7}">
+  <ds:schemaRefs/>
+</ds:datastoreItem>
+</file>
+
+<file path=customXml/itemProps32.xml><?xml version="1.0" encoding="utf-8"?>
+<ds:datastoreItem xmlns:ds="http://schemas.openxmlformats.org/officeDocument/2006/customXml" ds:itemID="{45B06F8E-AA4D-4F38-9B8B-099300ECC694}">
+  <ds:schemaRefs/>
+</ds:datastoreItem>
+</file>
+
+<file path=customXml/itemProps33.xml><?xml version="1.0" encoding="utf-8"?>
+<ds:datastoreItem xmlns:ds="http://schemas.openxmlformats.org/officeDocument/2006/customXml" ds:itemID="{5F64DE57-8A63-47CA-A8AA-FC8E23CF697A}">
+  <ds:schemaRefs/>
+</ds:datastoreItem>
+</file>
+
 <file path=customXml/itemProps34.xml><?xml version="1.0" encoding="utf-8"?>
+<ds:datastoreItem xmlns:ds="http://schemas.openxmlformats.org/officeDocument/2006/customXml" ds:itemID="{D4F2BED0-C414-46BA-AF63-E57A81C2B9FC}">
+  <ds:schemaRefs/>
+</ds:datastoreItem>
+</file>
+
+<file path=customXml/itemProps35.xml><?xml version="1.0" encoding="utf-8"?>
+<ds:datastoreItem xmlns:ds="http://schemas.openxmlformats.org/officeDocument/2006/customXml" ds:itemID="{B77E3FB8-6B77-4C09-82A2-9AF5ACD3601A}">
+  <ds:schemaRefs/>
+</ds:datastoreItem>
+</file>
+
+<file path=customXml/itemProps36.xml><?xml version="1.0" encoding="utf-8"?>
+<ds:datastoreItem xmlns:ds="http://schemas.openxmlformats.org/officeDocument/2006/customXml" ds:itemID="{FCB61E48-E0AD-4F83-9AA4-8AC901918564}">
+  <ds:schemaRefs/>
+</ds:datastoreItem>
+</file>
+
+<file path=customXml/itemProps37.xml><?xml version="1.0" encoding="utf-8"?>
+<ds:datastoreItem xmlns:ds="http://schemas.openxmlformats.org/officeDocument/2006/customXml" ds:itemID="{DE9A5BE9-B208-45C2-93C1-997B1E18C5E8}">
+  <ds:schemaRefs/>
+</ds:datastoreItem>
+</file>
+
+<file path=customXml/itemProps38.xml><?xml version="1.0" encoding="utf-8"?>
+<ds:datastoreItem xmlns:ds="http://schemas.openxmlformats.org/officeDocument/2006/customXml" ds:itemID="{187CDBC8-4301-CA40-9C1E-C2AAF09F8BBD}">
+  <ds:schemaRefs/>
+</ds:datastoreItem>
+</file>
+
+<file path=customXml/itemProps39.xml><?xml version="1.0" encoding="utf-8"?>
+<ds:datastoreItem xmlns:ds="http://schemas.openxmlformats.org/officeDocument/2006/customXml" ds:itemID="{9BA6235D-7E1A-4B9C-ADE5-24E162A87D03}">
+  <ds:schemaRefs/>
+</ds:datastoreItem>
+</file>
+
+<file path=customXml/itemProps4.xml><?xml version="1.0" encoding="utf-8"?>
+<ds:datastoreItem xmlns:ds="http://schemas.openxmlformats.org/officeDocument/2006/customXml" ds:itemID="{55868A80-4CEC-40D9-B298-8CDA543EF6B4}">
+  <ds:schemaRefs/>
+</ds:datastoreItem>
+</file>
+
+<file path=customXml/itemProps40.xml><?xml version="1.0" encoding="utf-8"?>
+<ds:datastoreItem xmlns:ds="http://schemas.openxmlformats.org/officeDocument/2006/customXml" ds:itemID="{A1DE4887-2FA9-49BA-B8BF-E79FB8D56958}">
+  <ds:schemaRefs/>
+</ds:datastoreItem>
+</file>
+
+<file path=customXml/itemProps41.xml><?xml version="1.0" encoding="utf-8"?>
+<ds:datastoreItem xmlns:ds="http://schemas.openxmlformats.org/officeDocument/2006/customXml" ds:itemID="{A35AE265-4942-487E-9782-B0313E5BE5BA}">
+  <ds:schemaRefs/>
+</ds:datastoreItem>
+</file>
+
+<file path=customXml/itemProps42.xml><?xml version="1.0" encoding="utf-8"?>
+<ds:datastoreItem xmlns:ds="http://schemas.openxmlformats.org/officeDocument/2006/customXml" ds:itemID="{66FA18C0-85E2-48F7-961D-7BE01285C862}">
+  <ds:schemaRefs/>
+</ds:datastoreItem>
+</file>
+
+<file path=customXml/itemProps43.xml><?xml version="1.0" encoding="utf-8"?>
 <ds:datastoreItem xmlns:ds="http://schemas.openxmlformats.org/officeDocument/2006/customXml" ds:itemID="{AB24DB1C-E169-480A-9390-B8AAE56F6957}">
   <ds:schemaRefs/>
 </ds:datastoreItem>
 </file>
 
-<file path=customXml/itemProps35.xml><?xml version="1.0" encoding="utf-8"?>
-<ds:datastoreItem xmlns:ds="http://schemas.openxmlformats.org/officeDocument/2006/customXml" ds:itemID="{22F15940-6A24-4FEF-A717-C5EC22A291A1}">
+<file path=customXml/itemProps44.xml><?xml version="1.0" encoding="utf-8"?>
+<ds:datastoreItem xmlns:ds="http://schemas.openxmlformats.org/officeDocument/2006/customXml" ds:itemID="{8AA700CF-41AC-4CCC-923C-17ED3F632772}">
   <ds:schemaRefs/>
 </ds:datastoreItem>
 </file>
 
-<file path=customXml/itemProps36.xml><?xml version="1.0" encoding="utf-8"?>
-<ds:datastoreItem xmlns:ds="http://schemas.openxmlformats.org/officeDocument/2006/customXml" ds:itemID="{45B06F8E-AA4D-4F38-9B8B-099300ECC694}">
+<file path=customXml/itemProps45.xml><?xml version="1.0" encoding="utf-8"?>
+<ds:datastoreItem xmlns:ds="http://schemas.openxmlformats.org/officeDocument/2006/customXml" ds:itemID="{DCC1EDEA-6109-42CD-9115-6BD85EF38642}">
   <ds:schemaRefs/>
 </ds:datastoreItem>
 </file>
 
-<file path=customXml/itemProps37.xml><?xml version="1.0" encoding="utf-8"?>
-<ds:datastoreItem xmlns:ds="http://schemas.openxmlformats.org/officeDocument/2006/customXml" ds:itemID="{55868A80-4CEC-40D9-B298-8CDA543EF6B4}">
+<file path=customXml/itemProps46.xml><?xml version="1.0" encoding="utf-8"?>
+<ds:datastoreItem xmlns:ds="http://schemas.openxmlformats.org/officeDocument/2006/customXml" ds:itemID="{EF9A843C-DEE1-4221-96D6-063228FC0A5C}">
   <ds:schemaRefs/>
 </ds:datastoreItem>
 </file>
 
-<file path=customXml/itemProps38.xml><?xml version="1.0" encoding="utf-8"?>
-<ds:datastoreItem xmlns:ds="http://schemas.openxmlformats.org/officeDocument/2006/customXml" ds:itemID="{90BBE109-2328-4050-BC2C-A7208F976826}">
+<file path=customXml/itemProps47.xml><?xml version="1.0" encoding="utf-8"?>
+<ds:datastoreItem xmlns:ds="http://schemas.openxmlformats.org/officeDocument/2006/customXml" ds:itemID="{3DAEF0AC-8F99-434C-A5E8-5F51192FBC2E}">
   <ds:schemaRefs/>
 </ds:datastoreItem>
 </file>
 
-<file path=customXml/itemProps39.xml><?xml version="1.0" encoding="utf-8"?>
-<ds:datastoreItem xmlns:ds="http://schemas.openxmlformats.org/officeDocument/2006/customXml" ds:itemID="{66FA18C0-85E2-48F7-961D-7BE01285C862}">
+<file path=customXml/itemProps48.xml><?xml version="1.0" encoding="utf-8"?>
+<ds:datastoreItem xmlns:ds="http://schemas.openxmlformats.org/officeDocument/2006/customXml" ds:itemID="{357320CA-212D-4182-9447-766838BC3644}">
   <ds:schemaRefs/>
 </ds:datastoreItem>
 </file>
 
-<file path=customXml/itemProps4.xml><?xml version="1.0" encoding="utf-8"?>
-<ds:datastoreItem xmlns:ds="http://schemas.openxmlformats.org/officeDocument/2006/customXml" ds:itemID="{187CDBC8-4301-CA40-9C1E-C2AAF09F8BBD}">
+<file path=customXml/itemProps49.xml><?xml version="1.0" encoding="utf-8"?>
+<ds:datastoreItem xmlns:ds="http://schemas.openxmlformats.org/officeDocument/2006/customXml" ds:itemID="{664F7CED-B0DA-429D-9A7F-4CBF61D24C26}">
   <ds:schemaRefs/>
 </ds:datastoreItem>
 </file>
 
-<file path=customXml/itemProps40.xml><?xml version="1.0" encoding="utf-8"?>
+<file path=customXml/itemProps5.xml><?xml version="1.0" encoding="utf-8"?>
+<ds:datastoreItem xmlns:ds="http://schemas.openxmlformats.org/officeDocument/2006/customXml" ds:itemID="{0D0AC32F-64CA-4FED-863B-4E0877612F21}">
+  <ds:schemaRefs/>
+</ds:datastoreItem>
+</file>
+
+<file path=customXml/itemProps50.xml><?xml version="1.0" encoding="utf-8"?>
 <ds:datastoreItem xmlns:ds="http://schemas.openxmlformats.org/officeDocument/2006/customXml" ds:itemID="{4907208B-9EFE-4124-A198-13AD782B858C}">
   <ds:schemaRefs/>
 </ds:datastoreItem>
 </file>
 
-<file path=customXml/itemProps41.xml><?xml version="1.0" encoding="utf-8"?>
-<ds:datastoreItem xmlns:ds="http://schemas.openxmlformats.org/officeDocument/2006/customXml" ds:itemID="{7F01121C-13E9-483A-B7E6-46DD03B75200}">
+<file path=customXml/itemProps51.xml><?xml version="1.0" encoding="utf-8"?>
+<ds:datastoreItem xmlns:ds="http://schemas.openxmlformats.org/officeDocument/2006/customXml" ds:itemID="{552033E5-1422-443A-ABA7-A9FA421D7629}">
   <ds:schemaRefs/>
 </ds:datastoreItem>
 </file>
 
-<file path=customXml/itemProps42.xml><?xml version="1.0" encoding="utf-8"?>
+<file path=customXml/itemProps52.xml><?xml version="1.0" encoding="utf-8"?>
+<ds:datastoreItem xmlns:ds="http://schemas.openxmlformats.org/officeDocument/2006/customXml" ds:itemID="{10CA47D5-62BF-412C-82C9-AD9C9628E81D}">
+  <ds:schemaRefs/>
+</ds:datastoreItem>
+</file>
+
+<file path=customXml/itemProps53.xml><?xml version="1.0" encoding="utf-8"?>
+<ds:datastoreItem xmlns:ds="http://schemas.openxmlformats.org/officeDocument/2006/customXml" ds:itemID="{57D5D086-3D49-4363-99E9-93FB10F7001F}">
+  <ds:schemaRefs/>
+</ds:datastoreItem>
+</file>
+
+<file path=customXml/itemProps54.xml><?xml version="1.0" encoding="utf-8"?>
 <ds:datastoreItem xmlns:ds="http://schemas.openxmlformats.org/officeDocument/2006/customXml" ds:itemID="{FFAB5E35-3CC7-4E36-92C6-6DCD3F34D8CF}">
   <ds:schemaRefs/>
 </ds:datastoreItem>
 </file>
 
-<file path=customXml/itemProps43.xml><?xml version="1.0" encoding="utf-8"?>
-<ds:datastoreItem xmlns:ds="http://schemas.openxmlformats.org/officeDocument/2006/customXml" ds:itemID="{0AF5DDBE-5E75-48FC-BA21-32ACE2374F30}">
-  <ds:schemaRefs/>
-</ds:datastoreItem>
-</file>
-
-<file path=customXml/itemProps44.xml><?xml version="1.0" encoding="utf-8"?>
-<ds:datastoreItem xmlns:ds="http://schemas.openxmlformats.org/officeDocument/2006/customXml" ds:itemID="{FCB61E48-E0AD-4F83-9AA4-8AC901918564}">
-  <ds:schemaRefs/>
-</ds:datastoreItem>
-</file>
-
-<file path=customXml/itemProps45.xml><?xml version="1.0" encoding="utf-8"?>
-<ds:datastoreItem xmlns:ds="http://schemas.openxmlformats.org/officeDocument/2006/customXml" ds:itemID="{552033E5-1422-443A-ABA7-A9FA421D7629}">
-  <ds:schemaRefs/>
-</ds:datastoreItem>
-</file>
-
-<file path=customXml/itemProps46.xml><?xml version="1.0" encoding="utf-8"?>
-<ds:datastoreItem xmlns:ds="http://schemas.openxmlformats.org/officeDocument/2006/customXml" ds:itemID="{46D5571C-37EA-4B1A-965C-D1FF428CABBA}">
-  <ds:schemaRefs/>
-</ds:datastoreItem>
-</file>
-
-<file path=customXml/itemProps47.xml><?xml version="1.0" encoding="utf-8"?>
+<file path=customXml/itemProps55.xml><?xml version="1.0" encoding="utf-8"?>
 <ds:datastoreItem xmlns:ds="http://schemas.openxmlformats.org/officeDocument/2006/customXml" ds:itemID="{F0F415B7-3B60-D646-8E61-195FAF28F2E9}">
   <ds:schemaRefs/>
 </ds:datastoreItem>
 </file>
 
-<file path=customXml/itemProps48.xml><?xml version="1.0" encoding="utf-8"?>
-<ds:datastoreItem xmlns:ds="http://schemas.openxmlformats.org/officeDocument/2006/customXml" ds:itemID="{84926F0E-4CF9-4868-9C6A-F4B02CC81AC4}">
-  <ds:schemaRefs/>
-</ds:datastoreItem>
-</file>
-
-<file path=customXml/itemProps49.xml><?xml version="1.0" encoding="utf-8"?>
-<ds:datastoreItem xmlns:ds="http://schemas.openxmlformats.org/officeDocument/2006/customXml" ds:itemID="{5F64DE57-8A63-47CA-A8AA-FC8E23CF697A}">
-  <ds:schemaRefs/>
-</ds:datastoreItem>
-</file>
-
-<file path=customXml/itemProps5.xml><?xml version="1.0" encoding="utf-8"?>
+<file path=customXml/itemProps6.xml><?xml version="1.0" encoding="utf-8"?>
 <ds:datastoreItem xmlns:ds="http://schemas.openxmlformats.org/officeDocument/2006/customXml" ds:itemID="{C9933F99-DED2-42B9-8123-10C71C06D0F5}">
   <ds:schemaRefs/>
 </ds:datastoreItem>
 </file>
 
-<file path=customXml/itemProps50.xml><?xml version="1.0" encoding="utf-8"?>
-<ds:datastoreItem xmlns:ds="http://schemas.openxmlformats.org/officeDocument/2006/customXml" ds:itemID="{8AA700CF-41AC-4CCC-923C-17ED3F632772}">
+<file path=customXml/itemProps7.xml><?xml version="1.0" encoding="utf-8"?>
+<ds:datastoreItem xmlns:ds="http://schemas.openxmlformats.org/officeDocument/2006/customXml" ds:itemID="{708F14FE-66F6-4744-AD1D-7632167C0D90}">
   <ds:schemaRefs/>
 </ds:datastoreItem>
 </file>
 
-<file path=customXml/itemProps51.xml><?xml version="1.0" encoding="utf-8"?>
-<ds:datastoreItem xmlns:ds="http://schemas.openxmlformats.org/officeDocument/2006/customXml" ds:itemID="{7DDF22D5-378F-4B43-9E2C-6011B6850318}">
+<file path=customXml/itemProps8.xml><?xml version="1.0" encoding="utf-8"?>
+<ds:datastoreItem xmlns:ds="http://schemas.openxmlformats.org/officeDocument/2006/customXml" ds:itemID="{BA2D1F52-F0AD-4181-AA76-1D6F58ED2D3E}">
   <ds:schemaRefs/>
 </ds:datastoreItem>
 </file>
 
-<file path=customXml/itemProps52.xml><?xml version="1.0" encoding="utf-8"?>
-<ds:datastoreItem xmlns:ds="http://schemas.openxmlformats.org/officeDocument/2006/customXml" ds:itemID="{DE9A5BE9-B208-45C2-93C1-997B1E18C5E8}">
-  <ds:schemaRefs/>
-</ds:datastoreItem>
-</file>
-
-<file path=customXml/itemProps53.xml><?xml version="1.0" encoding="utf-8"?>
-<ds:datastoreItem xmlns:ds="http://schemas.openxmlformats.org/officeDocument/2006/customXml" ds:itemID="{0D0AC32F-64CA-4FED-863B-4E0877612F21}">
-  <ds:schemaRefs/>
-</ds:datastoreItem>
-</file>
-
-<file path=customXml/itemProps54.xml><?xml version="1.0" encoding="utf-8"?>
-<ds:datastoreItem xmlns:ds="http://schemas.openxmlformats.org/officeDocument/2006/customXml" ds:itemID="{DCBF58FE-EC78-4FA4-A4AD-8EA1AF6C427F}">
-  <ds:schemaRefs/>
-</ds:datastoreItem>
-</file>
-
-<file path=customXml/itemProps55.xml><?xml version="1.0" encoding="utf-8"?>
-<ds:datastoreItem xmlns:ds="http://schemas.openxmlformats.org/officeDocument/2006/customXml" ds:itemID="{DCC1EDEA-6109-42CD-9115-6BD85EF38642}">
-  <ds:schemaRefs/>
-</ds:datastoreItem>
-</file>
-
-<file path=customXml/itemProps6.xml><?xml version="1.0" encoding="utf-8"?>
-<ds:datastoreItem xmlns:ds="http://schemas.openxmlformats.org/officeDocument/2006/customXml" ds:itemID="{17B6E611-A877-40D8-9669-147A1865FF06}">
-  <ds:schemaRefs/>
-</ds:datastoreItem>
-</file>
-
-<file path=customXml/itemProps7.xml><?xml version="1.0" encoding="utf-8"?>
-<ds:datastoreItem xmlns:ds="http://schemas.openxmlformats.org/officeDocument/2006/customXml" ds:itemID="{EF9A843C-DEE1-4221-96D6-063228FC0A5C}">
-  <ds:schemaRefs/>
-</ds:datastoreItem>
-</file>
-
-<file path=customXml/itemProps8.xml><?xml version="1.0" encoding="utf-8"?>
-<ds:datastoreItem xmlns:ds="http://schemas.openxmlformats.org/officeDocument/2006/customXml" ds:itemID="{A435609F-4C76-4415-A5FC-BB21AE5C4FD2}">
-  <ds:schemaRefs/>
-</ds:datastoreItem>
-</file>
-
 <file path=customXml/itemProps9.xml><?xml version="1.0" encoding="utf-8"?>
-<ds:datastoreItem xmlns:ds="http://schemas.openxmlformats.org/officeDocument/2006/customXml" ds:itemID="{9BA6235D-7E1A-4B9C-ADE5-24E162A87D03}">
+<ds:datastoreItem xmlns:ds="http://schemas.openxmlformats.org/officeDocument/2006/customXml" ds:itemID="{B0437DFC-C606-441B-B8FC-7769CEA71C34}">
   <ds:schemaRefs/>
 </ds:datastoreItem>
 </file>
